--- a/examples/communication_friction/communication_friction.pptx
+++ b/examples/communication_friction/communication_friction.pptx
@@ -3328,7 +3328,7 @@
         <p:spPr>
           <a:xfrm>
             <a:off x="731520" y="1371600"/>
-            <a:ext cx="10728655" cy="1524000"/>
+            <a:ext cx="10728655" cy="413766"/>
           </a:xfrm>
           <a:prstGeom prst="rect">
             <a:avLst/>
@@ -3363,8 +3363,8 @@
         </p:nvSpPr>
         <p:spPr>
           <a:xfrm>
-            <a:off x="731520" y="3169920"/>
-            <a:ext cx="10728655" cy="416560"/>
+            <a:off x="731520" y="2059686"/>
+            <a:ext cx="10728655" cy="350266"/>
           </a:xfrm>
           <a:prstGeom prst="rect">
             <a:avLst/>
@@ -3399,8 +3399,8 @@
         </p:nvSpPr>
         <p:spPr>
           <a:xfrm>
-            <a:off x="731520" y="3723639"/>
-            <a:ext cx="10728655" cy="416560"/>
+            <a:off x="731520" y="2547112"/>
+            <a:ext cx="10728655" cy="350266"/>
           </a:xfrm>
           <a:prstGeom prst="rect">
             <a:avLst/>
@@ -3435,8 +3435,8 @@
         </p:nvSpPr>
         <p:spPr>
           <a:xfrm>
-            <a:off x="731520" y="4277359"/>
-            <a:ext cx="10728655" cy="416560"/>
+            <a:off x="731520" y="3034538"/>
+            <a:ext cx="10728655" cy="350266"/>
           </a:xfrm>
           <a:prstGeom prst="rect">
             <a:avLst/>
@@ -3471,8 +3471,8 @@
         </p:nvSpPr>
         <p:spPr>
           <a:xfrm>
-            <a:off x="731520" y="4968240"/>
-            <a:ext cx="54864" cy="1524000"/>
+            <a:off x="731520" y="3659124"/>
+            <a:ext cx="54864" cy="855472"/>
           </a:xfrm>
           <a:prstGeom prst="rect">
             <a:avLst/>
@@ -3516,8 +3516,8 @@
         </p:nvSpPr>
         <p:spPr>
           <a:xfrm>
-            <a:off x="923544" y="4968240"/>
-            <a:ext cx="10536631" cy="716280"/>
+            <a:off x="923544" y="3659124"/>
+            <a:ext cx="10536631" cy="413766"/>
           </a:xfrm>
           <a:prstGeom prst="rect">
             <a:avLst/>
@@ -3552,8 +3552,8 @@
         </p:nvSpPr>
         <p:spPr>
           <a:xfrm>
-            <a:off x="923544" y="5775960"/>
-            <a:ext cx="10536631" cy="716280"/>
+            <a:off x="923544" y="4164330"/>
+            <a:ext cx="10536631" cy="350266"/>
           </a:xfrm>
           <a:prstGeom prst="rect">
             <a:avLst/>
@@ -4186,7 +4186,7 @@
         <p:spPr>
           <a:xfrm>
             <a:off x="731520" y="1371600"/>
-            <a:ext cx="5135727" cy="548640"/>
+            <a:ext cx="281940" cy="548640"/>
           </a:xfrm>
           <a:prstGeom prst="rect">
             <a:avLst/>
@@ -4222,7 +4222,7 @@
         <p:spPr>
           <a:xfrm>
             <a:off x="731520" y="2103120"/>
-            <a:ext cx="5135727" cy="4389120"/>
+            <a:ext cx="281940" cy="2395728"/>
           </a:xfrm>
           <a:prstGeom prst="rect">
             <a:avLst/>
@@ -4300,8 +4300,8 @@
         </p:nvSpPr>
         <p:spPr>
           <a:xfrm>
-            <a:off x="6324447" y="1371600"/>
-            <a:ext cx="5135727" cy="548640"/>
+            <a:off x="1470660" y="1371600"/>
+            <a:ext cx="408939" cy="548640"/>
           </a:xfrm>
           <a:prstGeom prst="rect">
             <a:avLst/>
@@ -4336,8 +4336,8 @@
         </p:nvSpPr>
         <p:spPr>
           <a:xfrm>
-            <a:off x="6324447" y="2103120"/>
-            <a:ext cx="5135727" cy="4389120"/>
+            <a:off x="1470660" y="2103120"/>
+            <a:ext cx="408939" cy="2395728"/>
           </a:xfrm>
           <a:prstGeom prst="rect">
             <a:avLst/>
@@ -4603,7 +4603,7 @@
         <p:spPr>
           <a:xfrm>
             <a:off x="731520" y="1371600"/>
-            <a:ext cx="54864" cy="1584959"/>
+            <a:ext cx="54864" cy="855472"/>
           </a:xfrm>
           <a:prstGeom prst="rect">
             <a:avLst/>
@@ -4648,7 +4648,7 @@
         <p:spPr>
           <a:xfrm>
             <a:off x="923544" y="1371600"/>
-            <a:ext cx="8342071" cy="746759"/>
+            <a:ext cx="1120140" cy="413766"/>
           </a:xfrm>
           <a:prstGeom prst="rect">
             <a:avLst/>
@@ -4683,8 +4683,8 @@
         </p:nvSpPr>
         <p:spPr>
           <a:xfrm>
-            <a:off x="923544" y="2209800"/>
-            <a:ext cx="8342071" cy="746759"/>
+            <a:off x="923544" y="1876806"/>
+            <a:ext cx="1120140" cy="350266"/>
           </a:xfrm>
           <a:prstGeom prst="rect">
             <a:avLst/>
@@ -4719,8 +4719,8 @@
         </p:nvSpPr>
         <p:spPr>
           <a:xfrm>
-            <a:off x="731520" y="3139440"/>
-            <a:ext cx="8534095" cy="1584959"/>
+            <a:off x="731520" y="2409952"/>
+            <a:ext cx="1312164" cy="1443227"/>
           </a:xfrm>
           <a:prstGeom prst="rect">
             <a:avLst/>
@@ -4798,8 +4798,8 @@
         </p:nvSpPr>
         <p:spPr>
           <a:xfrm>
-            <a:off x="731520" y="4907280"/>
-            <a:ext cx="8534095" cy="1584959"/>
+            <a:off x="731520" y="4036060"/>
+            <a:ext cx="1312164" cy="413766"/>
           </a:xfrm>
           <a:prstGeom prst="rect">
             <a:avLst/>
@@ -4828,7 +4828,7 @@
       </p:sp>
       <p:pic>
         <p:nvPicPr>
-          <p:cNvPr id="9" name="Picture 8" descr="tmpz1_ymq4r.png"/>
+          <p:cNvPr id="9" name="Picture 8" descr="tmpipvijmjt.png"/>
           <p:cNvPicPr>
             <a:picLocks noChangeAspect="1"/>
           </p:cNvPicPr>
@@ -4842,7 +4842,7 @@
         </p:blipFill>
         <p:spPr>
           <a:xfrm>
-            <a:off x="9631375" y="3017520"/>
+            <a:off x="2409444" y="1371600"/>
             <a:ext cx="1828800" cy="1828800"/>
           </a:xfrm>
           <a:prstGeom prst="rect">
@@ -5313,7 +5313,7 @@
         <p:spPr>
           <a:xfrm>
             <a:off x="731520" y="1371600"/>
-            <a:ext cx="8716975" cy="2446020"/>
+            <a:ext cx="246380" cy="1645920"/>
           </a:xfrm>
           <a:prstGeom prst="rect">
             <a:avLst/>
@@ -5371,7 +5371,7 @@
       </p:sp>
       <p:pic>
         <p:nvPicPr>
-          <p:cNvPr id="5" name="Picture 4" descr="tmpyh77adyu.png"/>
+          <p:cNvPr id="5" name="Picture 4" descr="tmpj8qs2xio.png"/>
           <p:cNvPicPr>
             <a:picLocks noChangeAspect="1"/>
           </p:cNvPicPr>
@@ -5385,7 +5385,7 @@
         </p:blipFill>
         <p:spPr>
           <a:xfrm>
-            <a:off x="9814255" y="1771650"/>
+            <a:off x="1343660" y="1371600"/>
             <a:ext cx="1645920" cy="1645920"/>
           </a:xfrm>
           <a:prstGeom prst="rect">
@@ -5401,8 +5401,8 @@
         </p:nvSpPr>
         <p:spPr>
           <a:xfrm>
-            <a:off x="731520" y="4046220"/>
-            <a:ext cx="54864" cy="2446020"/>
+            <a:off x="731520" y="3246120"/>
+            <a:ext cx="54864" cy="1077722"/>
           </a:xfrm>
           <a:prstGeom prst="rect">
             <a:avLst/>
@@ -5446,8 +5446,8 @@
         </p:nvSpPr>
         <p:spPr>
           <a:xfrm>
-            <a:off x="923544" y="4046220"/>
-            <a:ext cx="5035143" cy="1177289"/>
+            <a:off x="923544" y="3246120"/>
+            <a:ext cx="1704340" cy="413766"/>
           </a:xfrm>
           <a:prstGeom prst="rect">
             <a:avLst/>
@@ -5482,8 +5482,8 @@
         </p:nvSpPr>
         <p:spPr>
           <a:xfrm>
-            <a:off x="923544" y="5314950"/>
-            <a:ext cx="5035143" cy="1177289"/>
+            <a:off x="923544" y="3751326"/>
+            <a:ext cx="1704340" cy="572516"/>
           </a:xfrm>
           <a:prstGeom prst="rect">
             <a:avLst/>
@@ -5531,8 +5531,8 @@
         </p:nvSpPr>
         <p:spPr>
           <a:xfrm>
-            <a:off x="6233007" y="4046220"/>
-            <a:ext cx="54864" cy="2446020"/>
+            <a:off x="2902203" y="3246120"/>
+            <a:ext cx="54864" cy="1077722"/>
           </a:xfrm>
           <a:prstGeom prst="rect">
             <a:avLst/>
@@ -5576,8 +5576,8 @@
         </p:nvSpPr>
         <p:spPr>
           <a:xfrm>
-            <a:off x="6425031" y="4046220"/>
-            <a:ext cx="5035143" cy="1177289"/>
+            <a:off x="3094227" y="3246120"/>
+            <a:ext cx="1678940" cy="413766"/>
           </a:xfrm>
           <a:prstGeom prst="rect">
             <a:avLst/>
@@ -5612,8 +5612,8 @@
         </p:nvSpPr>
         <p:spPr>
           <a:xfrm>
-            <a:off x="6425031" y="5314950"/>
-            <a:ext cx="5035143" cy="1177289"/>
+            <a:off x="3094227" y="3751326"/>
+            <a:ext cx="1678940" cy="572516"/>
           </a:xfrm>
           <a:prstGeom prst="rect">
             <a:avLst/>
@@ -5764,7 +5764,7 @@
                               </p:stCondLst>
                             </p:cTn>
                             <p:tgtEl>
-                              <p:spTgt spid="6"/>
+                              <p:spTgt spid="9"/>
                             </p:tgtEl>
                             <p:attrNameLst>
                               <p:attrName>style.visibility</p:attrName>
@@ -5791,7 +5791,7 @@
                               </p:stCondLst>
                             </p:cTn>
                             <p:tgtEl>
-                              <p:spTgt spid="9"/>
+                              <p:spTgt spid="6"/>
                             </p:tgtEl>
                             <p:attrNameLst>
                               <p:attrName>style.visibility</p:attrName>
@@ -5818,7 +5818,7 @@
                               </p:stCondLst>
                             </p:cTn>
                             <p:tgtEl>
-                              <p:spTgt spid="7"/>
+                              <p:spTgt spid="10"/>
                             </p:tgtEl>
                             <p:attrNameLst>
                               <p:attrName>style.visibility</p:attrName>
@@ -5845,60 +5845,6 @@
                               </p:stCondLst>
                             </p:cTn>
                             <p:tgtEl>
-                              <p:spTgt spid="10"/>
-                            </p:tgtEl>
-                            <p:attrNameLst>
-                              <p:attrName>style.visibility</p:attrName>
-                            </p:attrNameLst>
-                          </p:cBhvr>
-                          <p:to>
-                            <p:strVal val="hidden"/>
-                          </p:to>
-                        </p:set>
-                      </p:childTnLst>
-                    </p:cTn>
-                  </p:par>
-                  <p:par>
-                    <p:cTn id="18" fill="hold">
-                      <p:stCondLst>
-                        <p:cond delay="0"/>
-                      </p:stCondLst>
-                      <p:childTnLst>
-                        <p:set>
-                          <p:cBhvr>
-                            <p:cTn id="19" dur="1" fill="hold">
-                              <p:stCondLst>
-                                <p:cond delay="0"/>
-                              </p:stCondLst>
-                            </p:cTn>
-                            <p:tgtEl>
-                              <p:spTgt spid="8"/>
-                            </p:tgtEl>
-                            <p:attrNameLst>
-                              <p:attrName>style.visibility</p:attrName>
-                            </p:attrNameLst>
-                          </p:cBhvr>
-                          <p:to>
-                            <p:strVal val="hidden"/>
-                          </p:to>
-                        </p:set>
-                      </p:childTnLst>
-                    </p:cTn>
-                  </p:par>
-                  <p:par>
-                    <p:cTn id="20" fill="hold">
-                      <p:stCondLst>
-                        <p:cond delay="0"/>
-                      </p:stCondLst>
-                      <p:childTnLst>
-                        <p:set>
-                          <p:cBhvr>
-                            <p:cTn id="21" dur="1" fill="hold">
-                              <p:stCondLst>
-                                <p:cond delay="0"/>
-                              </p:stCondLst>
-                            </p:cTn>
-                            <p:tgtEl>
                               <p:spTgt spid="11"/>
                             </p:tgtEl>
                             <p:attrNameLst>
@@ -5916,29 +5862,29 @@
               </p:cTn>
             </p:par>
             <p:seq concurrent="1" nextAc="seek">
-              <p:cTn id="22" dur="indefinite" nodeType="mainSeq">
+              <p:cTn id="18" dur="indefinite" nodeType="mainSeq">
                 <p:childTnLst>
                   <p:par>
-                    <p:cTn id="23" fill="hold">
+                    <p:cTn id="19" fill="hold">
                       <p:stCondLst>
                         <p:cond delay="indefinite"/>
                       </p:stCondLst>
                       <p:childTnLst>
                         <p:par>
-                          <p:cTn id="24" fill="hold">
+                          <p:cTn id="20" fill="hold">
                             <p:stCondLst>
                               <p:cond delay="0"/>
                             </p:stCondLst>
                             <p:childTnLst>
                               <p:par>
-                                <p:cTn id="25" presetID="10" presetClass="entr" presetSubtype="0" fill="hold" grpId="0" nodeType="clickEffect">
+                                <p:cTn id="21" presetID="10" presetClass="entr" presetSubtype="0" fill="hold" grpId="0" nodeType="clickEffect">
                                   <p:stCondLst>
                                     <p:cond delay="0"/>
                                   </p:stCondLst>
                                   <p:childTnLst>
                                     <p:animEffect transition="in" filter="fade">
                                       <p:cBhvr>
-                                        <p:cTn id="26" dur="500"/>
+                                        <p:cTn id="22" dur="500"/>
                                         <p:tgtEl>
                                           <p:spTgt spid="4"/>
                                         </p:tgtEl>
@@ -5946,7 +5892,7 @@
                                     </p:animEffect>
                                     <p:set>
                                       <p:cBhvr>
-                                        <p:cTn id="27" dur="1" fill="hold">
+                                        <p:cTn id="23" dur="1" fill="hold">
                                           <p:stCondLst>
                                             <p:cond delay="0"/>
                                           </p:stCondLst>
@@ -5966,14 +5912,14 @@
                                 </p:cTn>
                               </p:par>
                               <p:par>
-                                <p:cTn id="28" presetID="10" presetClass="entr" presetSubtype="0" fill="hold" grpId="0" nodeType="withEffect">
+                                <p:cTn id="24" presetID="10" presetClass="entr" presetSubtype="0" fill="hold" grpId="0" nodeType="withEffect">
                                   <p:stCondLst>
                                     <p:cond delay="0"/>
                                   </p:stCondLst>
                                   <p:childTnLst>
                                     <p:animEffect transition="in" filter="fade">
                                       <p:cBhvr>
-                                        <p:cTn id="29" dur="500"/>
+                                        <p:cTn id="25" dur="500"/>
                                         <p:tgtEl>
                                           <p:spTgt spid="5"/>
                                         </p:tgtEl>
@@ -5981,7 +5927,7 @@
                                     </p:animEffect>
                                     <p:set>
                                       <p:cBhvr>
-                                        <p:cTn id="30" dur="1" fill="hold">
+                                        <p:cTn id="26" dur="1" fill="hold">
                                           <p:stCondLst>
                                             <p:cond delay="0"/>
                                           </p:stCondLst>
@@ -6007,26 +5953,26 @@
                     </p:cTn>
                   </p:par>
                   <p:par>
-                    <p:cTn id="31" fill="hold">
+                    <p:cTn id="27" fill="hold">
                       <p:stCondLst>
                         <p:cond delay="indefinite"/>
                       </p:stCondLst>
                       <p:childTnLst>
                         <p:par>
-                          <p:cTn id="32" fill="hold">
+                          <p:cTn id="28" fill="hold">
                             <p:stCondLst>
                               <p:cond delay="0"/>
                             </p:stCondLst>
                             <p:childTnLst>
                               <p:par>
-                                <p:cTn id="33" presetID="10" presetClass="entr" presetSubtype="0" fill="hold" grpId="0" nodeType="clickEffect">
+                                <p:cTn id="29" presetID="10" presetClass="entr" presetSubtype="0" fill="hold" grpId="0" nodeType="clickEffect">
                                   <p:stCondLst>
                                     <p:cond delay="0"/>
                                   </p:stCondLst>
                                   <p:childTnLst>
                                     <p:animEffect transition="in" filter="fade">
                                       <p:cBhvr>
-                                        <p:cTn id="34" dur="500"/>
+                                        <p:cTn id="30" dur="500"/>
                                         <p:tgtEl>
                                           <p:spTgt spid="6"/>
                                         </p:tgtEl>
@@ -6034,7 +5980,7 @@
                                     </p:animEffect>
                                     <p:set>
                                       <p:cBhvr>
-                                        <p:cTn id="35" dur="1" fill="hold">
+                                        <p:cTn id="31" dur="1" fill="hold">
                                           <p:stCondLst>
                                             <p:cond delay="0"/>
                                           </p:stCondLst>
@@ -6054,14 +6000,14 @@
                                 </p:cTn>
                               </p:par>
                               <p:par>
-                                <p:cTn id="36" presetID="10" presetClass="entr" presetSubtype="0" fill="hold" grpId="0" nodeType="withEffect">
+                                <p:cTn id="32" presetID="10" presetClass="entr" presetSubtype="0" fill="hold" grpId="0" nodeType="withEffect">
                                   <p:stCondLst>
                                     <p:cond delay="0"/>
                                   </p:stCondLst>
                                   <p:childTnLst>
                                     <p:animEffect transition="in" filter="fade">
                                       <p:cBhvr>
-                                        <p:cTn id="37" dur="500"/>
+                                        <p:cTn id="33" dur="500"/>
                                         <p:tgtEl>
                                           <p:spTgt spid="7"/>
                                         </p:tgtEl>
@@ -6069,7 +6015,7 @@
                                     </p:animEffect>
                                     <p:set>
                                       <p:cBhvr>
-                                        <p:cTn id="38" dur="1" fill="hold">
+                                        <p:cTn id="34" dur="1" fill="hold">
                                           <p:stCondLst>
                                             <p:cond delay="0"/>
                                           </p:stCondLst>
@@ -6089,14 +6035,14 @@
                                 </p:cTn>
                               </p:par>
                               <p:par>
-                                <p:cTn id="39" presetID="10" presetClass="entr" presetSubtype="0" fill="hold" grpId="0" nodeType="withEffect">
+                                <p:cTn id="35" presetID="10" presetClass="entr" presetSubtype="0" fill="hold" grpId="0" nodeType="withEffect">
                                   <p:stCondLst>
                                     <p:cond delay="0"/>
                                   </p:stCondLst>
                                   <p:childTnLst>
                                     <p:animEffect transition="in" filter="fade">
                                       <p:cBhvr>
-                                        <p:cTn id="40" dur="500"/>
+                                        <p:cTn id="36" dur="500"/>
                                         <p:tgtEl>
                                           <p:spTgt spid="8"/>
                                         </p:tgtEl>
@@ -6104,7 +6050,7 @@
                                     </p:animEffect>
                                     <p:set>
                                       <p:cBhvr>
-                                        <p:cTn id="41" dur="1" fill="hold">
+                                        <p:cTn id="37" dur="1" fill="hold">
                                           <p:stCondLst>
                                             <p:cond delay="0"/>
                                           </p:stCondLst>
@@ -6124,28 +6070,28 @@
                                 </p:cTn>
                               </p:par>
                               <p:par>
-                                <p:cTn id="42" presetID="10" presetClass="entr" presetSubtype="0" fill="hold" grpId="0" nodeType="withEffect">
+                                <p:cTn id="38" presetID="10" presetClass="entr" presetSubtype="0" fill="hold" grpId="0" nodeType="withEffect">
                                   <p:stCondLst>
                                     <p:cond delay="0"/>
                                   </p:stCondLst>
                                   <p:childTnLst>
                                     <p:animEffect transition="in" filter="fade">
                                       <p:cBhvr>
-                                        <p:cTn id="43" dur="500"/>
-                                        <p:tgtEl>
-                                          <p:spTgt spid="6"/>
+                                        <p:cTn id="39" dur="500"/>
+                                        <p:tgtEl>
+                                          <p:spTgt spid="9"/>
                                         </p:tgtEl>
                                       </p:cBhvr>
                                     </p:animEffect>
                                     <p:set>
                                       <p:cBhvr>
-                                        <p:cTn id="44" dur="1" fill="hold">
+                                        <p:cTn id="40" dur="1" fill="hold">
                                           <p:stCondLst>
                                             <p:cond delay="0"/>
                                           </p:stCondLst>
                                         </p:cTn>
                                         <p:tgtEl>
-                                          <p:spTgt spid="6"/>
+                                          <p:spTgt spid="9"/>
                                         </p:tgtEl>
                                         <p:attrNameLst>
                                           <p:attrName>style.visibility</p:attrName>
@@ -6159,28 +6105,28 @@
                                 </p:cTn>
                               </p:par>
                               <p:par>
-                                <p:cTn id="45" presetID="10" presetClass="entr" presetSubtype="0" fill="hold" grpId="0" nodeType="withEffect">
+                                <p:cTn id="41" presetID="10" presetClass="entr" presetSubtype="0" fill="hold" grpId="0" nodeType="withEffect">
                                   <p:stCondLst>
                                     <p:cond delay="0"/>
                                   </p:stCondLst>
                                   <p:childTnLst>
                                     <p:animEffect transition="in" filter="fade">
                                       <p:cBhvr>
-                                        <p:cTn id="46" dur="500"/>
-                                        <p:tgtEl>
-                                          <p:spTgt spid="9"/>
+                                        <p:cTn id="42" dur="500"/>
+                                        <p:tgtEl>
+                                          <p:spTgt spid="6"/>
                                         </p:tgtEl>
                                       </p:cBhvr>
                                     </p:animEffect>
                                     <p:set>
                                       <p:cBhvr>
-                                        <p:cTn id="47" dur="1" fill="hold">
+                                        <p:cTn id="43" dur="1" fill="hold">
                                           <p:stCondLst>
                                             <p:cond delay="0"/>
                                           </p:stCondLst>
                                         </p:cTn>
                                         <p:tgtEl>
-                                          <p:spTgt spid="9"/>
+                                          <p:spTgt spid="6"/>
                                         </p:tgtEl>
                                         <p:attrNameLst>
                                           <p:attrName>style.visibility</p:attrName>
@@ -6194,28 +6140,28 @@
                                 </p:cTn>
                               </p:par>
                               <p:par>
-                                <p:cTn id="48" presetID="10" presetClass="entr" presetSubtype="0" fill="hold" grpId="0" nodeType="withEffect">
+                                <p:cTn id="44" presetID="10" presetClass="entr" presetSubtype="0" fill="hold" grpId="0" nodeType="withEffect">
                                   <p:stCondLst>
                                     <p:cond delay="0"/>
                                   </p:stCondLst>
                                   <p:childTnLst>
                                     <p:animEffect transition="in" filter="fade">
                                       <p:cBhvr>
-                                        <p:cTn id="49" dur="500"/>
-                                        <p:tgtEl>
-                                          <p:spTgt spid="7"/>
+                                        <p:cTn id="45" dur="500"/>
+                                        <p:tgtEl>
+                                          <p:spTgt spid="10"/>
                                         </p:tgtEl>
                                       </p:cBhvr>
                                     </p:animEffect>
                                     <p:set>
                                       <p:cBhvr>
-                                        <p:cTn id="50" dur="1" fill="hold">
+                                        <p:cTn id="46" dur="1" fill="hold">
                                           <p:stCondLst>
                                             <p:cond delay="0"/>
                                           </p:stCondLst>
                                         </p:cTn>
                                         <p:tgtEl>
-                                          <p:spTgt spid="7"/>
+                                          <p:spTgt spid="10"/>
                                         </p:tgtEl>
                                         <p:attrNameLst>
                                           <p:attrName>style.visibility</p:attrName>
@@ -6229,92 +6175,22 @@
                                 </p:cTn>
                               </p:par>
                               <p:par>
-                                <p:cTn id="51" presetID="10" presetClass="entr" presetSubtype="0" fill="hold" grpId="0" nodeType="withEffect">
+                                <p:cTn id="47" presetID="10" presetClass="entr" presetSubtype="0" fill="hold" grpId="0" nodeType="withEffect">
                                   <p:stCondLst>
                                     <p:cond delay="0"/>
                                   </p:stCondLst>
                                   <p:childTnLst>
                                     <p:animEffect transition="in" filter="fade">
                                       <p:cBhvr>
-                                        <p:cTn id="52" dur="500"/>
-                                        <p:tgtEl>
-                                          <p:spTgt spid="10"/>
+                                        <p:cTn id="48" dur="500"/>
+                                        <p:tgtEl>
+                                          <p:spTgt spid="11"/>
                                         </p:tgtEl>
                                       </p:cBhvr>
                                     </p:animEffect>
                                     <p:set>
                                       <p:cBhvr>
-                                        <p:cTn id="53" dur="1" fill="hold">
-                                          <p:stCondLst>
-                                            <p:cond delay="0"/>
-                                          </p:stCondLst>
-                                        </p:cTn>
-                                        <p:tgtEl>
-                                          <p:spTgt spid="10"/>
-                                        </p:tgtEl>
-                                        <p:attrNameLst>
-                                          <p:attrName>style.visibility</p:attrName>
-                                        </p:attrNameLst>
-                                      </p:cBhvr>
-                                      <p:to>
-                                        <p:strVal val="visible"/>
-                                      </p:to>
-                                    </p:set>
-                                  </p:childTnLst>
-                                </p:cTn>
-                              </p:par>
-                              <p:par>
-                                <p:cTn id="54" presetID="10" presetClass="entr" presetSubtype="0" fill="hold" grpId="0" nodeType="withEffect">
-                                  <p:stCondLst>
-                                    <p:cond delay="0"/>
-                                  </p:stCondLst>
-                                  <p:childTnLst>
-                                    <p:animEffect transition="in" filter="fade">
-                                      <p:cBhvr>
-                                        <p:cTn id="55" dur="500"/>
-                                        <p:tgtEl>
-                                          <p:spTgt spid="8"/>
-                                        </p:tgtEl>
-                                      </p:cBhvr>
-                                    </p:animEffect>
-                                    <p:set>
-                                      <p:cBhvr>
-                                        <p:cTn id="56" dur="1" fill="hold">
-                                          <p:stCondLst>
-                                            <p:cond delay="0"/>
-                                          </p:stCondLst>
-                                        </p:cTn>
-                                        <p:tgtEl>
-                                          <p:spTgt spid="8"/>
-                                        </p:tgtEl>
-                                        <p:attrNameLst>
-                                          <p:attrName>style.visibility</p:attrName>
-                                        </p:attrNameLst>
-                                      </p:cBhvr>
-                                      <p:to>
-                                        <p:strVal val="visible"/>
-                                      </p:to>
-                                    </p:set>
-                                  </p:childTnLst>
-                                </p:cTn>
-                              </p:par>
-                              <p:par>
-                                <p:cTn id="57" presetID="10" presetClass="entr" presetSubtype="0" fill="hold" grpId="0" nodeType="withEffect">
-                                  <p:stCondLst>
-                                    <p:cond delay="0"/>
-                                  </p:stCondLst>
-                                  <p:childTnLst>
-                                    <p:animEffect transition="in" filter="fade">
-                                      <p:cBhvr>
-                                        <p:cTn id="58" dur="500"/>
-                                        <p:tgtEl>
-                                          <p:spTgt spid="11"/>
-                                        </p:tgtEl>
-                                      </p:cBhvr>
-                                    </p:animEffect>
-                                    <p:set>
-                                      <p:cBhvr>
-                                        <p:cTn id="59" dur="1" fill="hold">
+                                        <p:cTn id="49" dur="1" fill="hold">
                                           <p:stCondLst>
                                             <p:cond delay="0"/>
                                           </p:stCondLst>
@@ -6461,7 +6337,7 @@
         </p:nvSpPr>
         <p:spPr>
           <a:xfrm>
-            <a:off x="731520" y="2535174"/>
+            <a:off x="731520" y="1371600"/>
             <a:ext cx="164592" cy="164592"/>
           </a:xfrm>
           <a:prstGeom prst="roundRect">
@@ -6507,7 +6383,7 @@
         <p:spPr>
           <a:xfrm>
             <a:off x="969264" y="1371600"/>
-            <a:ext cx="4897983" cy="2491739"/>
+            <a:ext cx="408939" cy="350266"/>
           </a:xfrm>
           <a:prstGeom prst="rect">
             <a:avLst/>
@@ -6542,8 +6418,8 @@
         </p:nvSpPr>
         <p:spPr>
           <a:xfrm>
-            <a:off x="731520" y="4000500"/>
-            <a:ext cx="5135727" cy="2491739"/>
+            <a:off x="731520" y="1859025"/>
+            <a:ext cx="646683" cy="1538478"/>
           </a:xfrm>
           <a:prstGeom prst="rect">
             <a:avLst/>
@@ -6607,7 +6483,7 @@
         </p:nvSpPr>
         <p:spPr>
           <a:xfrm>
-            <a:off x="6324447" y="2535174"/>
+            <a:off x="1835404" y="1371600"/>
             <a:ext cx="164592" cy="164592"/>
           </a:xfrm>
           <a:prstGeom prst="roundRect">
@@ -6652,8 +6528,8 @@
         </p:nvSpPr>
         <p:spPr>
           <a:xfrm>
-            <a:off x="6562191" y="1371600"/>
-            <a:ext cx="4897983" cy="2491739"/>
+            <a:off x="2073148" y="1371600"/>
+            <a:ext cx="345440" cy="350266"/>
           </a:xfrm>
           <a:prstGeom prst="rect">
             <a:avLst/>
@@ -6688,8 +6564,8 @@
         </p:nvSpPr>
         <p:spPr>
           <a:xfrm>
-            <a:off x="6324447" y="4000500"/>
-            <a:ext cx="5135727" cy="2491739"/>
+            <a:off x="1835404" y="1859025"/>
+            <a:ext cx="583183" cy="1824228"/>
           </a:xfrm>
           <a:prstGeom prst="rect">
             <a:avLst/>
@@ -7210,7 +7086,7 @@
       </p:sp>
       <p:pic>
         <p:nvPicPr>
-          <p:cNvPr id="4" name="Picture 3" descr="tmpcw9h_odm.png"/>
+          <p:cNvPr id="4" name="Picture 3" descr="tmpevnx71ep.png"/>
           <p:cNvPicPr>
             <a:picLocks noChangeAspect="1"/>
           </p:cNvPicPr>
@@ -7224,7 +7100,7 @@
         </p:blipFill>
         <p:spPr>
           <a:xfrm>
-            <a:off x="2636443" y="1371600"/>
+            <a:off x="731520" y="1371600"/>
             <a:ext cx="1188720" cy="1188720"/>
           </a:xfrm>
           <a:prstGeom prst="rect">
@@ -7241,7 +7117,7 @@
         <p:spPr>
           <a:xfrm>
             <a:off x="731520" y="2697480"/>
-            <a:ext cx="4998567" cy="480060"/>
+            <a:ext cx="1188720" cy="445516"/>
           </a:xfrm>
           <a:prstGeom prst="rect">
             <a:avLst/>
@@ -7276,8 +7152,8 @@
         </p:nvSpPr>
         <p:spPr>
           <a:xfrm>
-            <a:off x="731520" y="3314700"/>
-            <a:ext cx="4998567" cy="480060"/>
+            <a:off x="731520" y="3280156"/>
+            <a:ext cx="1188720" cy="572516"/>
           </a:xfrm>
           <a:prstGeom prst="rect">
             <a:avLst/>
@@ -7319,7 +7195,7 @@
       </p:sp>
       <p:pic>
         <p:nvPicPr>
-          <p:cNvPr id="7" name="Picture 6" descr="tmproqhgz87.png"/>
+          <p:cNvPr id="7" name="Picture 6" descr="tmpeli9cgwv.png"/>
           <p:cNvPicPr>
             <a:picLocks noChangeAspect="1"/>
           </p:cNvPicPr>
@@ -7333,7 +7209,7 @@
         </p:blipFill>
         <p:spPr>
           <a:xfrm>
-            <a:off x="8366531" y="1371600"/>
+            <a:off x="2651760" y="1371600"/>
             <a:ext cx="1188720" cy="1188720"/>
           </a:xfrm>
           <a:prstGeom prst="rect">
@@ -7349,8 +7225,8 @@
         </p:nvSpPr>
         <p:spPr>
           <a:xfrm>
-            <a:off x="6461607" y="2697480"/>
-            <a:ext cx="4998567" cy="480060"/>
+            <a:off x="2651760" y="2697480"/>
+            <a:ext cx="1188720" cy="445516"/>
           </a:xfrm>
           <a:prstGeom prst="rect">
             <a:avLst/>
@@ -7385,8 +7261,8 @@
         </p:nvSpPr>
         <p:spPr>
           <a:xfrm>
-            <a:off x="6461607" y="3314700"/>
-            <a:ext cx="4998567" cy="480060"/>
+            <a:off x="2651760" y="3280156"/>
+            <a:ext cx="1188720" cy="572516"/>
           </a:xfrm>
           <a:prstGeom prst="rect">
             <a:avLst/>
@@ -7434,8 +7310,8 @@
         </p:nvSpPr>
         <p:spPr>
           <a:xfrm>
-            <a:off x="731520" y="4069079"/>
-            <a:ext cx="54864" cy="2423160"/>
+            <a:off x="731520" y="4126991"/>
+            <a:ext cx="54864" cy="1077722"/>
           </a:xfrm>
           <a:prstGeom prst="rect">
             <a:avLst/>
@@ -7479,8 +7355,8 @@
         </p:nvSpPr>
         <p:spPr>
           <a:xfrm>
-            <a:off x="923544" y="4069079"/>
-            <a:ext cx="10536631" cy="1165860"/>
+            <a:off x="923544" y="4126991"/>
+            <a:ext cx="10536631" cy="413766"/>
           </a:xfrm>
           <a:prstGeom prst="rect">
             <a:avLst/>
@@ -7515,8 +7391,8 @@
         </p:nvSpPr>
         <p:spPr>
           <a:xfrm>
-            <a:off x="923544" y="5326379"/>
-            <a:ext cx="10536631" cy="1165860"/>
+            <a:off x="923544" y="4632198"/>
+            <a:ext cx="10536631" cy="572516"/>
           </a:xfrm>
           <a:prstGeom prst="rect">
             <a:avLst/>
@@ -8133,7 +8009,7 @@
         <p:spPr>
           <a:xfrm>
             <a:off x="731520" y="1371600"/>
-            <a:ext cx="54864" cy="2446020"/>
+            <a:ext cx="54864" cy="1077722"/>
           </a:xfrm>
           <a:prstGeom prst="rect">
             <a:avLst/>
@@ -8178,7 +8054,7 @@
         <p:spPr>
           <a:xfrm>
             <a:off x="923544" y="1371600"/>
-            <a:ext cx="7519111" cy="1177289"/>
+            <a:ext cx="980440" cy="413766"/>
           </a:xfrm>
           <a:prstGeom prst="rect">
             <a:avLst/>
@@ -8213,8 +8089,8 @@
         </p:nvSpPr>
         <p:spPr>
           <a:xfrm>
-            <a:off x="923544" y="2640330"/>
-            <a:ext cx="7519111" cy="1177289"/>
+            <a:off x="923544" y="1876806"/>
+            <a:ext cx="980440" cy="572516"/>
           </a:xfrm>
           <a:prstGeom prst="rect">
             <a:avLst/>
@@ -8262,8 +8138,8 @@
         </p:nvSpPr>
         <p:spPr>
           <a:xfrm>
-            <a:off x="731520" y="4046220"/>
-            <a:ext cx="7711135" cy="2446020"/>
+            <a:off x="731520" y="2677922"/>
+            <a:ext cx="1172464" cy="699516"/>
           </a:xfrm>
           <a:prstGeom prst="rect">
             <a:avLst/>
@@ -8305,7 +8181,7 @@
       </p:sp>
       <p:pic>
         <p:nvPicPr>
-          <p:cNvPr id="8" name="Picture 7" descr="tmptkz4agjb.png"/>
+          <p:cNvPr id="8" name="Picture 7" descr="tmpkur6j0nb.png"/>
           <p:cNvPicPr>
             <a:picLocks noChangeAspect="1"/>
           </p:cNvPicPr>
@@ -8319,7 +8195,7 @@
         </p:blipFill>
         <p:spPr>
           <a:xfrm>
-            <a:off x="8899855" y="2651760"/>
+            <a:off x="2361184" y="1371600"/>
             <a:ext cx="2560320" cy="2560320"/>
           </a:xfrm>
           <a:prstGeom prst="rect">
@@ -8790,7 +8666,7 @@
         </p:nvSpPr>
         <p:spPr>
           <a:xfrm>
-            <a:off x="731520" y="1877949"/>
+            <a:off x="731520" y="1371600"/>
             <a:ext cx="164592" cy="164592"/>
           </a:xfrm>
           <a:prstGeom prst="roundRect">
@@ -8836,7 +8712,7 @@
         <p:spPr>
           <a:xfrm>
             <a:off x="969264" y="1371600"/>
-            <a:ext cx="3937863" cy="1177289"/>
+            <a:ext cx="154940" cy="350266"/>
           </a:xfrm>
           <a:prstGeom prst="rect">
             <a:avLst/>
@@ -8871,8 +8747,8 @@
         </p:nvSpPr>
         <p:spPr>
           <a:xfrm>
-            <a:off x="731520" y="2640330"/>
-            <a:ext cx="4175607" cy="1177289"/>
+            <a:off x="731520" y="1813306"/>
+            <a:ext cx="392684" cy="1387094"/>
           </a:xfrm>
           <a:prstGeom prst="rect">
             <a:avLst/>
@@ -8930,7 +8806,7 @@
       </p:sp>
       <p:pic>
         <p:nvPicPr>
-          <p:cNvPr id="7" name="Picture 6" descr="tmpry3cf57n.png"/>
+          <p:cNvPr id="7" name="Picture 6" descr="tmp7g679y00.png"/>
           <p:cNvPicPr>
             <a:picLocks noChangeAspect="1"/>
           </p:cNvPicPr>
@@ -8944,7 +8820,7 @@
         </p:blipFill>
         <p:spPr>
           <a:xfrm>
-            <a:off x="5181447" y="1680210"/>
+            <a:off x="1398524" y="1371600"/>
             <a:ext cx="1828800" cy="1828800"/>
           </a:xfrm>
           <a:prstGeom prst="rect">
@@ -8960,7 +8836,7 @@
         </p:nvSpPr>
         <p:spPr>
           <a:xfrm>
-            <a:off x="7284567" y="1877949"/>
+            <a:off x="3501644" y="1371600"/>
             <a:ext cx="164592" cy="164592"/>
           </a:xfrm>
           <a:prstGeom prst="roundRect">
@@ -9005,8 +8881,8 @@
         </p:nvSpPr>
         <p:spPr>
           <a:xfrm>
-            <a:off x="7522311" y="1371600"/>
-            <a:ext cx="3937863" cy="1177289"/>
+            <a:off x="3739388" y="1371600"/>
+            <a:ext cx="154940" cy="350266"/>
           </a:xfrm>
           <a:prstGeom prst="rect">
             <a:avLst/>
@@ -9041,8 +8917,8 @@
         </p:nvSpPr>
         <p:spPr>
           <a:xfrm>
-            <a:off x="7284567" y="2640330"/>
-            <a:ext cx="4175607" cy="1177289"/>
+            <a:off x="3501644" y="1813306"/>
+            <a:ext cx="392684" cy="1387094"/>
           </a:xfrm>
           <a:prstGeom prst="rect">
             <a:avLst/>
@@ -9120,8 +8996,8 @@
         </p:nvSpPr>
         <p:spPr>
           <a:xfrm>
-            <a:off x="731520" y="4046220"/>
-            <a:ext cx="54864" cy="2446020"/>
+            <a:off x="731520" y="3429000"/>
+            <a:ext cx="54864" cy="1077722"/>
           </a:xfrm>
           <a:prstGeom prst="rect">
             <a:avLst/>
@@ -9165,8 +9041,8 @@
         </p:nvSpPr>
         <p:spPr>
           <a:xfrm>
-            <a:off x="923544" y="4046220"/>
-            <a:ext cx="10536631" cy="1177289"/>
+            <a:off x="923544" y="3429000"/>
+            <a:ext cx="10536631" cy="413766"/>
           </a:xfrm>
           <a:prstGeom prst="rect">
             <a:avLst/>
@@ -9201,8 +9077,8 @@
         </p:nvSpPr>
         <p:spPr>
           <a:xfrm>
-            <a:off x="923544" y="5314950"/>
-            <a:ext cx="10536631" cy="1177289"/>
+            <a:off x="923544" y="3934206"/>
+            <a:ext cx="10536631" cy="572516"/>
           </a:xfrm>
           <a:prstGeom prst="rect">
             <a:avLst/>
@@ -9913,7 +9789,7 @@
         <p:spPr>
           <a:xfrm>
             <a:off x="6095847" y="2194560"/>
-            <a:ext cx="0" cy="609600"/>
+            <a:ext cx="0" cy="274319"/>
           </a:xfrm>
           <a:prstGeom prst="line">
             <a:avLst/>
@@ -9948,7 +9824,7 @@
         </p:nvSpPr>
         <p:spPr>
           <a:xfrm>
-            <a:off x="731520" y="2804160"/>
+            <a:off x="731520" y="2468879"/>
             <a:ext cx="10728655" cy="822960"/>
           </a:xfrm>
           <a:prstGeom prst="roundRect">
@@ -10003,8 +9879,8 @@
         </p:nvCxnSpPr>
         <p:spPr>
           <a:xfrm>
-            <a:off x="6095847" y="3627119"/>
-            <a:ext cx="0" cy="609601"/>
+            <a:off x="6095847" y="3291839"/>
+            <a:ext cx="0" cy="274321"/>
           </a:xfrm>
           <a:prstGeom prst="line">
             <a:avLst/>
@@ -10039,7 +9915,7 @@
         </p:nvSpPr>
         <p:spPr>
           <a:xfrm>
-            <a:off x="731520" y="4236720"/>
+            <a:off x="731520" y="3566160"/>
             <a:ext cx="10728655" cy="822960"/>
           </a:xfrm>
           <a:prstGeom prst="roundRect">
@@ -10094,8 +9970,8 @@
         </p:nvCxnSpPr>
         <p:spPr>
           <a:xfrm>
-            <a:off x="6095847" y="5059680"/>
-            <a:ext cx="0" cy="609599"/>
+            <a:off x="6095847" y="4389120"/>
+            <a:ext cx="0" cy="274320"/>
           </a:xfrm>
           <a:prstGeom prst="line">
             <a:avLst/>
@@ -10130,7 +10006,7 @@
         </p:nvSpPr>
         <p:spPr>
           <a:xfrm>
-            <a:off x="731520" y="5669279"/>
+            <a:off x="731520" y="4663440"/>
             <a:ext cx="10728655" cy="822960"/>
           </a:xfrm>
           <a:prstGeom prst="roundRect">
@@ -10283,7 +10159,7 @@
         <p:spPr>
           <a:xfrm>
             <a:off x="731520" y="1371600"/>
-            <a:ext cx="8625535" cy="434340"/>
+            <a:ext cx="1297940" cy="413766"/>
           </a:xfrm>
           <a:prstGeom prst="rect">
             <a:avLst/>
@@ -10318,8 +10194,8 @@
         </p:nvSpPr>
         <p:spPr>
           <a:xfrm>
-            <a:off x="731520" y="2034540"/>
-            <a:ext cx="8625535" cy="434340"/>
+            <a:off x="731520" y="2013966"/>
+            <a:ext cx="1297940" cy="413766"/>
           </a:xfrm>
           <a:prstGeom prst="rect">
             <a:avLst/>
@@ -10354,8 +10230,8 @@
         </p:nvSpPr>
         <p:spPr>
           <a:xfrm>
-            <a:off x="731520" y="2697480"/>
-            <a:ext cx="8625535" cy="434340"/>
+            <a:off x="731520" y="2656332"/>
+            <a:ext cx="1297940" cy="413766"/>
           </a:xfrm>
           <a:prstGeom prst="rect">
             <a:avLst/>
@@ -10390,8 +10266,8 @@
         </p:nvSpPr>
         <p:spPr>
           <a:xfrm>
-            <a:off x="731520" y="3360420"/>
-            <a:ext cx="8625535" cy="434340"/>
+            <a:off x="731520" y="3298698"/>
+            <a:ext cx="1297940" cy="413766"/>
           </a:xfrm>
           <a:prstGeom prst="rect">
             <a:avLst/>
@@ -10420,7 +10296,7 @@
       </p:sp>
       <p:pic>
         <p:nvPicPr>
-          <p:cNvPr id="8" name="Picture 7" descr="tmpar7kna_3.png"/>
+          <p:cNvPr id="8" name="Picture 7" descr="tmphyq3w694.png"/>
           <p:cNvPicPr>
             <a:picLocks noChangeAspect="1"/>
           </p:cNvPicPr>
@@ -10434,7 +10310,7 @@
         </p:blipFill>
         <p:spPr>
           <a:xfrm>
-            <a:off x="9814255" y="1760219"/>
+            <a:off x="2486660" y="1371600"/>
             <a:ext cx="1645920" cy="1645920"/>
           </a:xfrm>
           <a:prstGeom prst="rect">
@@ -10450,8 +10326,8 @@
         </p:nvSpPr>
         <p:spPr>
           <a:xfrm>
-            <a:off x="731520" y="4069079"/>
-            <a:ext cx="54864" cy="2423160"/>
+            <a:off x="731520" y="3986783"/>
+            <a:ext cx="54864" cy="1077722"/>
           </a:xfrm>
           <a:prstGeom prst="rect">
             <a:avLst/>
@@ -10495,8 +10371,8 @@
         </p:nvSpPr>
         <p:spPr>
           <a:xfrm>
-            <a:off x="923544" y="4069079"/>
-            <a:ext cx="10536631" cy="1165860"/>
+            <a:off x="923544" y="3986783"/>
+            <a:ext cx="10536631" cy="413766"/>
           </a:xfrm>
           <a:prstGeom prst="rect">
             <a:avLst/>
@@ -10531,8 +10407,8 @@
         </p:nvSpPr>
         <p:spPr>
           <a:xfrm>
-            <a:off x="923544" y="5326379"/>
-            <a:ext cx="10536631" cy="1165860"/>
+            <a:off x="923544" y="4491990"/>
+            <a:ext cx="10536631" cy="572516"/>
           </a:xfrm>
           <a:prstGeom prst="rect">
             <a:avLst/>
@@ -11285,7 +11161,7 @@
       </p:sp>
       <p:pic>
         <p:nvPicPr>
-          <p:cNvPr id="4" name="Picture 3" descr="tmpz1_ymq4r.png"/>
+          <p:cNvPr id="4" name="Picture 3" descr="tmpipvijmjt.png"/>
           <p:cNvPicPr>
             <a:picLocks noChangeAspect="1"/>
           </p:cNvPicPr>
@@ -11299,7 +11175,7 @@
         </p:blipFill>
         <p:spPr>
           <a:xfrm>
-            <a:off x="1074694" y="1371600"/>
+            <a:off x="731520" y="1371600"/>
             <a:ext cx="1371600" cy="1371600"/>
           </a:xfrm>
           <a:prstGeom prst="rect">
@@ -11316,7 +11192,7 @@
         <p:spPr>
           <a:xfrm>
             <a:off x="731520" y="2834640"/>
-            <a:ext cx="2057948" cy="1783079"/>
+            <a:ext cx="1371600" cy="445516"/>
           </a:xfrm>
           <a:prstGeom prst="rect">
             <a:avLst/>
@@ -11351,8 +11227,8 @@
         </p:nvSpPr>
         <p:spPr>
           <a:xfrm>
-            <a:off x="731520" y="4709160"/>
-            <a:ext cx="2057948" cy="1783079"/>
+            <a:off x="731520" y="3371596"/>
+            <a:ext cx="1371600" cy="572516"/>
           </a:xfrm>
           <a:prstGeom prst="rect">
             <a:avLst/>
@@ -11400,8 +11276,8 @@
         </p:nvCxnSpPr>
         <p:spPr>
           <a:xfrm>
-            <a:off x="2789468" y="3931920"/>
-            <a:ext cx="2277405" cy="0"/>
+            <a:off x="2103120" y="3931920"/>
+            <a:ext cx="219456" cy="0"/>
           </a:xfrm>
           <a:prstGeom prst="line">
             <a:avLst/>
@@ -11430,7 +11306,7 @@
       </p:cxnSp>
       <p:pic>
         <p:nvPicPr>
-          <p:cNvPr id="8" name="Picture 7" descr="tmpyh77adyu.png"/>
+          <p:cNvPr id="8" name="Picture 7" descr="tmpj8qs2xio.png"/>
           <p:cNvPicPr>
             <a:picLocks noChangeAspect="1"/>
           </p:cNvPicPr>
@@ -11444,7 +11320,7 @@
         </p:blipFill>
         <p:spPr>
           <a:xfrm>
-            <a:off x="5410047" y="1371600"/>
+            <a:off x="2322576" y="1371600"/>
             <a:ext cx="1371600" cy="1371600"/>
           </a:xfrm>
           <a:prstGeom prst="rect">
@@ -11460,8 +11336,8 @@
         </p:nvSpPr>
         <p:spPr>
           <a:xfrm>
-            <a:off x="5066873" y="2834640"/>
-            <a:ext cx="2057948" cy="1783079"/>
+            <a:off x="2322576" y="2834640"/>
+            <a:ext cx="1371600" cy="445516"/>
           </a:xfrm>
           <a:prstGeom prst="rect">
             <a:avLst/>
@@ -11496,8 +11372,8 @@
         </p:nvSpPr>
         <p:spPr>
           <a:xfrm>
-            <a:off x="5066873" y="4709160"/>
-            <a:ext cx="2057948" cy="1783079"/>
+            <a:off x="2322576" y="3371596"/>
+            <a:ext cx="1371600" cy="572516"/>
           </a:xfrm>
           <a:prstGeom prst="rect">
             <a:avLst/>
@@ -11545,8 +11421,8 @@
         </p:nvCxnSpPr>
         <p:spPr>
           <a:xfrm>
-            <a:off x="7124821" y="3931920"/>
-            <a:ext cx="2277405" cy="0"/>
+            <a:off x="3694176" y="3931920"/>
+            <a:ext cx="219456" cy="0"/>
           </a:xfrm>
           <a:prstGeom prst="line">
             <a:avLst/>
@@ -11575,7 +11451,7 @@
       </p:cxnSp>
       <p:pic>
         <p:nvPicPr>
-          <p:cNvPr id="12" name="Picture 11" descr="tmp03gj_bh4.png"/>
+          <p:cNvPr id="12" name="Picture 11" descr="tmphkwplr67.png"/>
           <p:cNvPicPr>
             <a:picLocks noChangeAspect="1"/>
           </p:cNvPicPr>
@@ -11589,7 +11465,7 @@
         </p:blipFill>
         <p:spPr>
           <a:xfrm>
-            <a:off x="9745400" y="1371600"/>
+            <a:off x="3913632" y="1371600"/>
             <a:ext cx="1371600" cy="1371600"/>
           </a:xfrm>
           <a:prstGeom prst="rect">
@@ -11605,8 +11481,8 @@
         </p:nvSpPr>
         <p:spPr>
           <a:xfrm>
-            <a:off x="9402226" y="2834640"/>
-            <a:ext cx="2057948" cy="1783079"/>
+            <a:off x="3913632" y="2834640"/>
+            <a:ext cx="1371600" cy="445516"/>
           </a:xfrm>
           <a:prstGeom prst="rect">
             <a:avLst/>
@@ -11641,8 +11517,8 @@
         </p:nvSpPr>
         <p:spPr>
           <a:xfrm>
-            <a:off x="9402226" y="4709160"/>
-            <a:ext cx="2057948" cy="1783079"/>
+            <a:off x="3913632" y="3371596"/>
+            <a:ext cx="1371600" cy="572516"/>
           </a:xfrm>
           <a:prstGeom prst="rect">
             <a:avLst/>
@@ -13093,7 +12969,7 @@
         </p:nvSpPr>
         <p:spPr>
           <a:xfrm>
-            <a:off x="731520" y="2535174"/>
+            <a:off x="731520" y="1371600"/>
             <a:ext cx="164592" cy="164592"/>
           </a:xfrm>
           <a:prstGeom prst="roundRect">
@@ -13139,7 +13015,7 @@
         <p:spPr>
           <a:xfrm>
             <a:off x="969264" y="1371600"/>
-            <a:ext cx="1820204" cy="2491739"/>
+            <a:ext cx="281940" cy="350266"/>
           </a:xfrm>
           <a:prstGeom prst="rect">
             <a:avLst/>
@@ -13174,8 +13050,8 @@
         </p:nvSpPr>
         <p:spPr>
           <a:xfrm>
-            <a:off x="731520" y="4000500"/>
-            <a:ext cx="2057948" cy="2491739"/>
+            <a:off x="731520" y="1859025"/>
+            <a:ext cx="767079" cy="2109978"/>
           </a:xfrm>
           <a:prstGeom prst="rect">
             <a:avLst/>
@@ -13253,8 +13129,8 @@
         </p:nvCxnSpPr>
         <p:spPr>
           <a:xfrm>
-            <a:off x="2789468" y="3931920"/>
-            <a:ext cx="2277405" cy="0"/>
+            <a:off x="1498600" y="3931920"/>
+            <a:ext cx="219456" cy="0"/>
           </a:xfrm>
           <a:prstGeom prst="line">
             <a:avLst/>
@@ -13289,7 +13165,7 @@
         </p:nvSpPr>
         <p:spPr>
           <a:xfrm>
-            <a:off x="5066873" y="2535174"/>
+            <a:off x="1718056" y="1371600"/>
             <a:ext cx="164592" cy="164592"/>
           </a:xfrm>
           <a:prstGeom prst="roundRect">
@@ -13334,8 +13210,8 @@
         </p:nvSpPr>
         <p:spPr>
           <a:xfrm>
-            <a:off x="5304617" y="1371600"/>
-            <a:ext cx="1820204" cy="2491739"/>
+            <a:off x="1955800" y="1371600"/>
+            <a:ext cx="281940" cy="350266"/>
           </a:xfrm>
           <a:prstGeom prst="rect">
             <a:avLst/>
@@ -13370,8 +13246,8 @@
         </p:nvSpPr>
         <p:spPr>
           <a:xfrm>
-            <a:off x="5066873" y="4000500"/>
-            <a:ext cx="2057948" cy="2491739"/>
+            <a:off x="1718056" y="1859025"/>
+            <a:ext cx="678180" cy="1665478"/>
           </a:xfrm>
           <a:prstGeom prst="rect">
             <a:avLst/>
@@ -13435,8 +13311,8 @@
         </p:nvCxnSpPr>
         <p:spPr>
           <a:xfrm>
-            <a:off x="7124821" y="3931920"/>
-            <a:ext cx="2277405" cy="0"/>
+            <a:off x="2396236" y="3931920"/>
+            <a:ext cx="219456" cy="0"/>
           </a:xfrm>
           <a:prstGeom prst="line">
             <a:avLst/>
@@ -13471,7 +13347,7 @@
         </p:nvSpPr>
         <p:spPr>
           <a:xfrm>
-            <a:off x="9402226" y="2535174"/>
+            <a:off x="2615692" y="1371600"/>
             <a:ext cx="164592" cy="164592"/>
           </a:xfrm>
           <a:prstGeom prst="roundRect">
@@ -13516,8 +13392,8 @@
         </p:nvSpPr>
         <p:spPr>
           <a:xfrm>
-            <a:off x="9639970" y="1371600"/>
-            <a:ext cx="1820204" cy="2491739"/>
+            <a:off x="2853436" y="1371600"/>
+            <a:ext cx="281940" cy="350266"/>
           </a:xfrm>
           <a:prstGeom prst="rect">
             <a:avLst/>
@@ -13552,8 +13428,8 @@
         </p:nvSpPr>
         <p:spPr>
           <a:xfrm>
-            <a:off x="9402226" y="4000500"/>
-            <a:ext cx="2057948" cy="2491739"/>
+            <a:off x="2615692" y="1859025"/>
+            <a:ext cx="881379" cy="1443227"/>
           </a:xfrm>
           <a:prstGeom prst="rect">
             <a:avLst/>
@@ -14396,7 +14272,7 @@
         </p:nvGraphicFramePr>
         <p:xfrm>
           <a:off x="731520" y="1371600"/>
-          <a:ext cx="10728655" cy="2423160"/>
+          <a:ext cx="10728655" cy="2057400"/>
         </p:xfrm>
         <a:graphic>
           <a:graphicData uri="http://schemas.openxmlformats.org/drawingml/2006/table">
@@ -14408,7 +14284,7 @@
                 <a:gridCol w="5364327"/>
                 <a:gridCol w="5364328"/>
               </a:tblGrid>
-              <a:tr h="484632">
+              <a:tr h="411480">
                 <a:tc>
                   <a:txBody>
                     <a:bodyPr/>
@@ -14458,7 +14334,7 @@
                   </a:tcPr>
                 </a:tc>
               </a:tr>
-              <a:tr h="484632">
+              <a:tr h="411480">
                 <a:tc>
                   <a:txBody>
                     <a:bodyPr/>
@@ -14508,7 +14384,7 @@
                   </a:tcPr>
                 </a:tc>
               </a:tr>
-              <a:tr h="484632">
+              <a:tr h="411480">
                 <a:tc>
                   <a:txBody>
                     <a:bodyPr/>
@@ -14558,7 +14434,7 @@
                   </a:tcPr>
                 </a:tc>
               </a:tr>
-              <a:tr h="484632">
+              <a:tr h="411480">
                 <a:tc>
                   <a:txBody>
                     <a:bodyPr/>
@@ -14608,7 +14484,7 @@
                   </a:tcPr>
                 </a:tc>
               </a:tr>
-              <a:tr h="484632">
+              <a:tr h="411480">
                 <a:tc>
                   <a:txBody>
                     <a:bodyPr/>
@@ -14670,8 +14546,8 @@
         </p:nvSpPr>
         <p:spPr>
           <a:xfrm>
-            <a:off x="731520" y="4069079"/>
-            <a:ext cx="54864" cy="2423160"/>
+            <a:off x="731520" y="3703320"/>
+            <a:ext cx="54864" cy="855472"/>
           </a:xfrm>
           <a:prstGeom prst="rect">
             <a:avLst/>
@@ -14715,8 +14591,8 @@
         </p:nvSpPr>
         <p:spPr>
           <a:xfrm>
-            <a:off x="923544" y="4069079"/>
-            <a:ext cx="10536631" cy="1165860"/>
+            <a:off x="923544" y="3703320"/>
+            <a:ext cx="10536631" cy="413766"/>
           </a:xfrm>
           <a:prstGeom prst="rect">
             <a:avLst/>
@@ -14751,8 +14627,8 @@
         </p:nvSpPr>
         <p:spPr>
           <a:xfrm>
-            <a:off x="923544" y="5326379"/>
-            <a:ext cx="10536631" cy="1165860"/>
+            <a:off x="923544" y="4208526"/>
+            <a:ext cx="10536631" cy="350266"/>
           </a:xfrm>
           <a:prstGeom prst="rect">
             <a:avLst/>
@@ -15270,8 +15146,8 @@
         </p:nvSpPr>
         <p:spPr>
           <a:xfrm>
-            <a:off x="731520" y="1371600"/>
-            <a:ext cx="8534095" cy="1108710"/>
+            <a:off x="731520" y="2434843"/>
+            <a:ext cx="8412480" cy="445516"/>
           </a:xfrm>
           <a:prstGeom prst="rect">
             <a:avLst/>
@@ -15306,8 +15182,8 @@
         </p:nvSpPr>
         <p:spPr>
           <a:xfrm>
-            <a:off x="731520" y="2708910"/>
-            <a:ext cx="1597091" cy="1108710"/>
+            <a:off x="731520" y="3081527"/>
+            <a:ext cx="592836" cy="749808"/>
           </a:xfrm>
           <a:prstGeom prst="roundRect">
             <a:avLst/>
@@ -15340,7 +15216,7 @@
           <a:lstStyle/>
           <a:p>
             <a:pPr algn="ctr">
-              <a:defRPr sz="1800" b="0">
+              <a:defRPr sz="1400" b="0">
                 <a:solidFill>
                   <a:srgbClr val="2C3E50"/>
                 </a:solidFill>
@@ -15361,8 +15237,8 @@
         </p:nvCxnSpPr>
         <p:spPr>
           <a:xfrm>
-            <a:off x="2328611" y="3263264"/>
-            <a:ext cx="1871411" cy="0"/>
+            <a:off x="1324356" y="3456432"/>
+            <a:ext cx="475488" cy="0"/>
           </a:xfrm>
           <a:prstGeom prst="line">
             <a:avLst/>
@@ -15397,8 +15273,8 @@
         </p:nvSpPr>
         <p:spPr>
           <a:xfrm>
-            <a:off x="4200022" y="2708910"/>
-            <a:ext cx="1597091" cy="1108710"/>
+            <a:off x="1799844" y="3081527"/>
+            <a:ext cx="592836" cy="749808"/>
           </a:xfrm>
           <a:prstGeom prst="roundRect">
             <a:avLst/>
@@ -15431,7 +15307,7 @@
           <a:lstStyle/>
           <a:p>
             <a:pPr algn="ctr">
-              <a:defRPr sz="1800" b="0">
+              <a:defRPr sz="1400" b="0">
                 <a:solidFill>
                   <a:srgbClr val="2C3E50"/>
                 </a:solidFill>
@@ -15452,8 +15328,8 @@
         </p:nvCxnSpPr>
         <p:spPr>
           <a:xfrm>
-            <a:off x="5797113" y="3263264"/>
-            <a:ext cx="1871411" cy="0"/>
+            <a:off x="2392680" y="3456432"/>
+            <a:ext cx="475488" cy="0"/>
           </a:xfrm>
           <a:prstGeom prst="line">
             <a:avLst/>
@@ -15488,8 +15364,8 @@
         </p:nvSpPr>
         <p:spPr>
           <a:xfrm>
-            <a:off x="7668524" y="2708910"/>
-            <a:ext cx="1597091" cy="1108710"/>
+            <a:off x="2868168" y="3081527"/>
+            <a:ext cx="592836" cy="749808"/>
           </a:xfrm>
           <a:prstGeom prst="roundRect">
             <a:avLst/>
@@ -15522,7 +15398,7 @@
           <a:lstStyle/>
           <a:p>
             <a:pPr algn="ctr">
-              <a:defRPr sz="1800" b="0">
+              <a:defRPr sz="1400" b="0">
                 <a:solidFill>
                   <a:srgbClr val="2C3E50"/>
                 </a:solidFill>
@@ -15543,8 +15419,8 @@
         </p:nvSpPr>
         <p:spPr>
           <a:xfrm>
-            <a:off x="731520" y="4046220"/>
-            <a:ext cx="8534095" cy="1108710"/>
+            <a:off x="731520" y="4032504"/>
+            <a:ext cx="8412480" cy="445516"/>
           </a:xfrm>
           <a:prstGeom prst="rect">
             <a:avLst/>
@@ -15579,8 +15455,8 @@
         </p:nvSpPr>
         <p:spPr>
           <a:xfrm>
-            <a:off x="731520" y="5383529"/>
-            <a:ext cx="1597091" cy="1108710"/>
+            <a:off x="731520" y="4679188"/>
+            <a:ext cx="592836" cy="749808"/>
           </a:xfrm>
           <a:prstGeom prst="roundRect">
             <a:avLst/>
@@ -15613,7 +15489,7 @@
           <a:lstStyle/>
           <a:p>
             <a:pPr algn="ctr">
-              <a:defRPr sz="1800" b="0">
+              <a:defRPr sz="1400" b="0">
                 <a:solidFill>
                   <a:srgbClr val="2C3E50"/>
                 </a:solidFill>
@@ -15634,8 +15510,8 @@
         </p:nvCxnSpPr>
         <p:spPr>
           <a:xfrm>
-            <a:off x="2328611" y="5937884"/>
-            <a:ext cx="1871411" cy="0"/>
+            <a:off x="1324356" y="5054092"/>
+            <a:ext cx="475488" cy="0"/>
           </a:xfrm>
           <a:prstGeom prst="line">
             <a:avLst/>
@@ -15670,8 +15546,8 @@
         </p:nvSpPr>
         <p:spPr>
           <a:xfrm>
-            <a:off x="4200022" y="5383529"/>
-            <a:ext cx="1597091" cy="1108710"/>
+            <a:off x="1799844" y="4679188"/>
+            <a:ext cx="592836" cy="749808"/>
           </a:xfrm>
           <a:prstGeom prst="roundRect">
             <a:avLst/>
@@ -15704,7 +15580,7 @@
           <a:lstStyle/>
           <a:p>
             <a:pPr algn="ctr">
-              <a:defRPr sz="1800" b="0">
+              <a:defRPr sz="1400" b="0">
                 <a:solidFill>
                   <a:srgbClr val="2C3E50"/>
                 </a:solidFill>
@@ -15725,8 +15601,8 @@
         </p:nvCxnSpPr>
         <p:spPr>
           <a:xfrm>
-            <a:off x="5797113" y="5937884"/>
-            <a:ext cx="1871411" cy="0"/>
+            <a:off x="2392680" y="5054092"/>
+            <a:ext cx="475488" cy="0"/>
           </a:xfrm>
           <a:prstGeom prst="line">
             <a:avLst/>
@@ -15761,8 +15637,8 @@
         </p:nvSpPr>
         <p:spPr>
           <a:xfrm>
-            <a:off x="7668524" y="5383529"/>
-            <a:ext cx="1597091" cy="1108710"/>
+            <a:off x="2868168" y="4679188"/>
+            <a:ext cx="592836" cy="749808"/>
           </a:xfrm>
           <a:prstGeom prst="roundRect">
             <a:avLst/>
@@ -15795,7 +15671,7 @@
           <a:lstStyle/>
           <a:p>
             <a:pPr algn="ctr">
-              <a:defRPr sz="1800" b="0">
+              <a:defRPr sz="1400" b="0">
                 <a:solidFill>
                   <a:srgbClr val="2C3E50"/>
                 </a:solidFill>
@@ -15810,7 +15686,7 @@
       </p:sp>
       <p:pic>
         <p:nvPicPr>
-          <p:cNvPr id="16" name="Picture 15" descr="tmptkz4agjb.png"/>
+          <p:cNvPr id="16" name="Picture 15" descr="tmpkur6j0nb.png"/>
           <p:cNvPicPr>
             <a:picLocks noChangeAspect="1"/>
           </p:cNvPicPr>
@@ -15824,8 +15700,8 @@
         </p:blipFill>
         <p:spPr>
           <a:xfrm>
-            <a:off x="9631375" y="3017520"/>
-            <a:ext cx="1828800" cy="1828800"/>
+            <a:off x="9400032" y="3154679"/>
+            <a:ext cx="1554480" cy="1554480"/>
           </a:xfrm>
           <a:prstGeom prst="rect">
             <a:avLst/>
@@ -15889,7 +15765,7 @@
                               </p:stCondLst>
                             </p:cTn>
                             <p:tgtEl>
-                              <p:spTgt spid="11"/>
+                              <p:spTgt spid="7"/>
                             </p:tgtEl>
                             <p:attrNameLst>
                               <p:attrName>style.visibility</p:attrName>
@@ -15916,7 +15792,7 @@
                               </p:stCondLst>
                             </p:cTn>
                             <p:tgtEl>
-                              <p:spTgt spid="5"/>
+                              <p:spTgt spid="11"/>
                             </p:tgtEl>
                             <p:attrNameLst>
                               <p:attrName>style.visibility</p:attrName>
@@ -15997,7 +15873,7 @@
                               </p:stCondLst>
                             </p:cTn>
                             <p:tgtEl>
-                              <p:spTgt spid="7"/>
+                              <p:spTgt spid="5"/>
                             </p:tgtEl>
                             <p:attrNameLst>
                               <p:attrName>style.visibility</p:attrName>
@@ -16382,7 +16258,7 @@
                                       <p:cBhvr>
                                         <p:cTn id="49" dur="500"/>
                                         <p:tgtEl>
-                                          <p:spTgt spid="11"/>
+                                          <p:spTgt spid="7"/>
                                         </p:tgtEl>
                                       </p:cBhvr>
                                     </p:animEffect>
@@ -16394,7 +16270,7 @@
                                           </p:stCondLst>
                                         </p:cTn>
                                         <p:tgtEl>
-                                          <p:spTgt spid="11"/>
+                                          <p:spTgt spid="7"/>
                                         </p:tgtEl>
                                         <p:attrNameLst>
                                           <p:attrName>style.visibility</p:attrName>
@@ -16417,7 +16293,7 @@
                                       <p:cBhvr>
                                         <p:cTn id="52" dur="500"/>
                                         <p:tgtEl>
-                                          <p:spTgt spid="5"/>
+                                          <p:spTgt spid="11"/>
                                         </p:tgtEl>
                                       </p:cBhvr>
                                     </p:animEffect>
@@ -16429,7 +16305,7 @@
                                           </p:stCondLst>
                                         </p:cTn>
                                         <p:tgtEl>
-                                          <p:spTgt spid="5"/>
+                                          <p:spTgt spid="11"/>
                                         </p:tgtEl>
                                         <p:attrNameLst>
                                           <p:attrName>style.visibility</p:attrName>
@@ -16522,7 +16398,7 @@
                                       <p:cBhvr>
                                         <p:cTn id="61" dur="500"/>
                                         <p:tgtEl>
-                                          <p:spTgt spid="7"/>
+                                          <p:spTgt spid="5"/>
                                         </p:tgtEl>
                                       </p:cBhvr>
                                     </p:animEffect>
@@ -16534,7 +16410,7 @@
                                           </p:stCondLst>
                                         </p:cTn>
                                         <p:tgtEl>
-                                          <p:spTgt spid="7"/>
+                                          <p:spTgt spid="5"/>
                                         </p:tgtEl>
                                         <p:attrNameLst>
                                           <p:attrName>style.visibility</p:attrName>
@@ -16799,7 +16675,7 @@
         <p:spPr>
           <a:xfrm>
             <a:off x="731520" y="1371600"/>
-            <a:ext cx="54864" cy="2423160"/>
+            <a:ext cx="54864" cy="1077722"/>
           </a:xfrm>
           <a:prstGeom prst="rect">
             <a:avLst/>
@@ -16844,7 +16720,7 @@
         <p:spPr>
           <a:xfrm>
             <a:off x="923544" y="1371600"/>
-            <a:ext cx="3201314" cy="1165860"/>
+            <a:ext cx="662939" cy="413766"/>
           </a:xfrm>
           <a:prstGeom prst="rect">
             <a:avLst/>
@@ -16879,8 +16755,8 @@
         </p:nvSpPr>
         <p:spPr>
           <a:xfrm>
-            <a:off x="923544" y="2628900"/>
-            <a:ext cx="3201314" cy="1165860"/>
+            <a:off x="923544" y="1876806"/>
+            <a:ext cx="662939" cy="572516"/>
           </a:xfrm>
           <a:prstGeom prst="rect">
             <a:avLst/>
@@ -16928,8 +16804,8 @@
         </p:nvCxnSpPr>
         <p:spPr>
           <a:xfrm>
-            <a:off x="4124858" y="2583180"/>
-            <a:ext cx="3941978" cy="0"/>
+            <a:off x="1586484" y="1910461"/>
+            <a:ext cx="548640" cy="0"/>
           </a:xfrm>
           <a:prstGeom prst="line">
             <a:avLst/>
@@ -16964,8 +16840,8 @@
         </p:nvSpPr>
         <p:spPr>
           <a:xfrm>
-            <a:off x="8066836" y="1371600"/>
-            <a:ext cx="54864" cy="2423160"/>
+            <a:off x="2135124" y="1371600"/>
+            <a:ext cx="54864" cy="1077722"/>
           </a:xfrm>
           <a:prstGeom prst="rect">
             <a:avLst/>
@@ -17009,8 +16885,8 @@
         </p:nvSpPr>
         <p:spPr>
           <a:xfrm>
-            <a:off x="8258860" y="1371600"/>
-            <a:ext cx="3201314" cy="1165860"/>
+            <a:off x="2327148" y="1371600"/>
+            <a:ext cx="535939" cy="413766"/>
           </a:xfrm>
           <a:prstGeom prst="rect">
             <a:avLst/>
@@ -17045,8 +16921,8 @@
         </p:nvSpPr>
         <p:spPr>
           <a:xfrm>
-            <a:off x="8258860" y="2628900"/>
-            <a:ext cx="3201314" cy="1165860"/>
+            <a:off x="2327148" y="1876806"/>
+            <a:ext cx="535939" cy="572516"/>
           </a:xfrm>
           <a:prstGeom prst="rect">
             <a:avLst/>
@@ -17094,8 +16970,8 @@
         </p:nvSpPr>
         <p:spPr>
           <a:xfrm>
-            <a:off x="731520" y="4069079"/>
-            <a:ext cx="10728655" cy="2423160"/>
+            <a:off x="731520" y="2723642"/>
+            <a:ext cx="10728655" cy="413766"/>
           </a:xfrm>
           <a:prstGeom prst="rect">
             <a:avLst/>
@@ -17179,7 +17055,7 @@
                               </p:stCondLst>
                             </p:cTn>
                             <p:tgtEl>
-                              <p:spTgt spid="8"/>
+                              <p:spTgt spid="6"/>
                             </p:tgtEl>
                             <p:attrNameLst>
                               <p:attrName>style.visibility</p:attrName>
@@ -17206,7 +17082,7 @@
                               </p:stCondLst>
                             </p:cTn>
                             <p:tgtEl>
-                              <p:spTgt spid="5"/>
+                              <p:spTgt spid="8"/>
                             </p:tgtEl>
                             <p:attrNameLst>
                               <p:attrName>style.visibility</p:attrName>
@@ -17260,7 +17136,7 @@
                               </p:stCondLst>
                             </p:cTn>
                             <p:tgtEl>
-                              <p:spTgt spid="6"/>
+                              <p:spTgt spid="10"/>
                             </p:tgtEl>
                             <p:attrNameLst>
                               <p:attrName>style.visibility</p:attrName>
@@ -17287,33 +17163,6 @@
                               </p:stCondLst>
                             </p:cTn>
                             <p:tgtEl>
-                              <p:spTgt spid="10"/>
-                            </p:tgtEl>
-                            <p:attrNameLst>
-                              <p:attrName>style.visibility</p:attrName>
-                            </p:attrNameLst>
-                          </p:cBhvr>
-                          <p:to>
-                            <p:strVal val="hidden"/>
-                          </p:to>
-                        </p:set>
-                      </p:childTnLst>
-                    </p:cTn>
-                  </p:par>
-                  <p:par>
-                    <p:cTn id="16" fill="hold">
-                      <p:stCondLst>
-                        <p:cond delay="0"/>
-                      </p:stCondLst>
-                      <p:childTnLst>
-                        <p:set>
-                          <p:cBhvr>
-                            <p:cTn id="17" dur="1" fill="hold">
-                              <p:stCondLst>
-                                <p:cond delay="0"/>
-                              </p:stCondLst>
-                            </p:cTn>
-                            <p:tgtEl>
                               <p:spTgt spid="11"/>
                             </p:tgtEl>
                             <p:attrNameLst>
@@ -17331,29 +17180,29 @@
               </p:cTn>
             </p:par>
             <p:seq concurrent="1" nextAc="seek">
-              <p:cTn id="18" dur="indefinite" nodeType="mainSeq">
+              <p:cTn id="16" dur="indefinite" nodeType="mainSeq">
                 <p:childTnLst>
                   <p:par>
-                    <p:cTn id="19" fill="hold">
+                    <p:cTn id="17" fill="hold">
                       <p:stCondLst>
                         <p:cond delay="indefinite"/>
                       </p:stCondLst>
                       <p:childTnLst>
                         <p:par>
-                          <p:cTn id="20" fill="hold">
+                          <p:cTn id="18" fill="hold">
                             <p:stCondLst>
                               <p:cond delay="0"/>
                             </p:stCondLst>
                             <p:childTnLst>
                               <p:par>
-                                <p:cTn id="21" presetID="10" presetClass="entr" presetSubtype="0" fill="hold" grpId="0" nodeType="clickEffect">
+                                <p:cTn id="19" presetID="10" presetClass="entr" presetSubtype="0" fill="hold" grpId="0" nodeType="clickEffect">
                                   <p:stCondLst>
                                     <p:cond delay="0"/>
                                   </p:stCondLst>
                                   <p:childTnLst>
                                     <p:animEffect transition="in" filter="fade">
                                       <p:cBhvr>
-                                        <p:cTn id="22" dur="500"/>
+                                        <p:cTn id="20" dur="500"/>
                                         <p:tgtEl>
                                           <p:spTgt spid="4"/>
                                         </p:tgtEl>
@@ -17361,7 +17210,7 @@
                                     </p:animEffect>
                                     <p:set>
                                       <p:cBhvr>
-                                        <p:cTn id="23" dur="1" fill="hold">
+                                        <p:cTn id="21" dur="1" fill="hold">
                                           <p:stCondLst>
                                             <p:cond delay="0"/>
                                           </p:stCondLst>
@@ -17381,14 +17230,14 @@
                                 </p:cTn>
                               </p:par>
                               <p:par>
-                                <p:cTn id="24" presetID="10" presetClass="entr" presetSubtype="0" fill="hold" grpId="0" nodeType="withEffect">
+                                <p:cTn id="22" presetID="10" presetClass="entr" presetSubtype="0" fill="hold" grpId="0" nodeType="withEffect">
                                   <p:stCondLst>
                                     <p:cond delay="0"/>
                                   </p:stCondLst>
                                   <p:childTnLst>
                                     <p:animEffect transition="in" filter="fade">
                                       <p:cBhvr>
-                                        <p:cTn id="25" dur="500"/>
+                                        <p:cTn id="23" dur="500"/>
                                         <p:tgtEl>
                                           <p:spTgt spid="5"/>
                                         </p:tgtEl>
@@ -17396,7 +17245,7 @@
                                     </p:animEffect>
                                     <p:set>
                                       <p:cBhvr>
-                                        <p:cTn id="26" dur="1" fill="hold">
+                                        <p:cTn id="24" dur="1" fill="hold">
                                           <p:stCondLst>
                                             <p:cond delay="0"/>
                                           </p:stCondLst>
@@ -17416,14 +17265,14 @@
                                 </p:cTn>
                               </p:par>
                               <p:par>
-                                <p:cTn id="27" presetID="10" presetClass="entr" presetSubtype="0" fill="hold" grpId="0" nodeType="withEffect">
+                                <p:cTn id="25" presetID="10" presetClass="entr" presetSubtype="0" fill="hold" grpId="0" nodeType="withEffect">
                                   <p:stCondLst>
                                     <p:cond delay="0"/>
                                   </p:stCondLst>
                                   <p:childTnLst>
                                     <p:animEffect transition="in" filter="fade">
                                       <p:cBhvr>
-                                        <p:cTn id="28" dur="500"/>
+                                        <p:cTn id="26" dur="500"/>
                                         <p:tgtEl>
                                           <p:spTgt spid="6"/>
                                         </p:tgtEl>
@@ -17431,7 +17280,7 @@
                                     </p:animEffect>
                                     <p:set>
                                       <p:cBhvr>
-                                        <p:cTn id="29" dur="1" fill="hold">
+                                        <p:cTn id="27" dur="1" fill="hold">
                                           <p:stCondLst>
                                             <p:cond delay="0"/>
                                           </p:stCondLst>
@@ -17457,26 +17306,26 @@
                     </p:cTn>
                   </p:par>
                   <p:par>
-                    <p:cTn id="30" fill="hold">
+                    <p:cTn id="28" fill="hold">
                       <p:stCondLst>
                         <p:cond delay="indefinite"/>
                       </p:stCondLst>
                       <p:childTnLst>
                         <p:par>
-                          <p:cTn id="31" fill="hold">
+                          <p:cTn id="29" fill="hold">
                             <p:stCondLst>
                               <p:cond delay="0"/>
                             </p:stCondLst>
                             <p:childTnLst>
                               <p:par>
-                                <p:cTn id="32" presetID="10" presetClass="entr" presetSubtype="0" fill="hold" grpId="0" nodeType="clickEffect">
+                                <p:cTn id="30" presetID="10" presetClass="entr" presetSubtype="0" fill="hold" grpId="0" nodeType="clickEffect">
                                   <p:stCondLst>
                                     <p:cond delay="0"/>
                                   </p:stCondLst>
                                   <p:childTnLst>
                                     <p:animEffect transition="in" filter="fade">
                                       <p:cBhvr>
-                                        <p:cTn id="33" dur="500"/>
+                                        <p:cTn id="31" dur="500"/>
                                         <p:tgtEl>
                                           <p:spTgt spid="7"/>
                                         </p:tgtEl>
@@ -17484,7 +17333,7 @@
                                     </p:animEffect>
                                     <p:set>
                                       <p:cBhvr>
-                                        <p:cTn id="34" dur="1" fill="hold">
+                                        <p:cTn id="32" dur="1" fill="hold">
                                           <p:stCondLst>
                                             <p:cond delay="0"/>
                                           </p:stCondLst>
@@ -17504,28 +17353,28 @@
                                 </p:cTn>
                               </p:par>
                               <p:par>
-                                <p:cTn id="35" presetID="10" presetClass="entr" presetSubtype="0" fill="hold" grpId="0" nodeType="withEffect">
+                                <p:cTn id="33" presetID="10" presetClass="entr" presetSubtype="0" fill="hold" grpId="0" nodeType="withEffect">
                                   <p:stCondLst>
                                     <p:cond delay="0"/>
                                   </p:stCondLst>
                                   <p:childTnLst>
                                     <p:animEffect transition="in" filter="fade">
                                       <p:cBhvr>
-                                        <p:cTn id="36" dur="500"/>
-                                        <p:tgtEl>
-                                          <p:spTgt spid="8"/>
+                                        <p:cTn id="34" dur="500"/>
+                                        <p:tgtEl>
+                                          <p:spTgt spid="6"/>
                                         </p:tgtEl>
                                       </p:cBhvr>
                                     </p:animEffect>
                                     <p:set>
                                       <p:cBhvr>
-                                        <p:cTn id="37" dur="1" fill="hold">
+                                        <p:cTn id="35" dur="1" fill="hold">
                                           <p:stCondLst>
                                             <p:cond delay="0"/>
                                           </p:stCondLst>
                                         </p:cTn>
                                         <p:tgtEl>
-                                          <p:spTgt spid="8"/>
+                                          <p:spTgt spid="6"/>
                                         </p:tgtEl>
                                         <p:attrNameLst>
                                           <p:attrName>style.visibility</p:attrName>
@@ -17539,28 +17388,28 @@
                                 </p:cTn>
                               </p:par>
                               <p:par>
-                                <p:cTn id="38" presetID="10" presetClass="entr" presetSubtype="0" fill="hold" grpId="0" nodeType="withEffect">
+                                <p:cTn id="36" presetID="10" presetClass="entr" presetSubtype="0" fill="hold" grpId="0" nodeType="withEffect">
                                   <p:stCondLst>
                                     <p:cond delay="0"/>
                                   </p:stCondLst>
                                   <p:childTnLst>
                                     <p:animEffect transition="in" filter="fade">
                                       <p:cBhvr>
-                                        <p:cTn id="39" dur="500"/>
-                                        <p:tgtEl>
-                                          <p:spTgt spid="5"/>
+                                        <p:cTn id="37" dur="500"/>
+                                        <p:tgtEl>
+                                          <p:spTgt spid="8"/>
                                         </p:tgtEl>
                                       </p:cBhvr>
                                     </p:animEffect>
                                     <p:set>
                                       <p:cBhvr>
-                                        <p:cTn id="40" dur="1" fill="hold">
+                                        <p:cTn id="38" dur="1" fill="hold">
                                           <p:stCondLst>
                                             <p:cond delay="0"/>
                                           </p:stCondLst>
                                         </p:cTn>
                                         <p:tgtEl>
-                                          <p:spTgt spid="5"/>
+                                          <p:spTgt spid="8"/>
                                         </p:tgtEl>
                                         <p:attrNameLst>
                                           <p:attrName>style.visibility</p:attrName>
@@ -17574,14 +17423,14 @@
                                 </p:cTn>
                               </p:par>
                               <p:par>
-                                <p:cTn id="41" presetID="10" presetClass="entr" presetSubtype="0" fill="hold" grpId="0" nodeType="withEffect">
+                                <p:cTn id="39" presetID="10" presetClass="entr" presetSubtype="0" fill="hold" grpId="0" nodeType="withEffect">
                                   <p:stCondLst>
                                     <p:cond delay="0"/>
                                   </p:stCondLst>
                                   <p:childTnLst>
                                     <p:animEffect transition="in" filter="fade">
                                       <p:cBhvr>
-                                        <p:cTn id="42" dur="500"/>
+                                        <p:cTn id="40" dur="500"/>
                                         <p:tgtEl>
                                           <p:spTgt spid="9"/>
                                         </p:tgtEl>
@@ -17589,7 +17438,7 @@
                                     </p:animEffect>
                                     <p:set>
                                       <p:cBhvr>
-                                        <p:cTn id="43" dur="1" fill="hold">
+                                        <p:cTn id="41" dur="1" fill="hold">
                                           <p:stCondLst>
                                             <p:cond delay="0"/>
                                           </p:stCondLst>
@@ -17609,57 +17458,22 @@
                                 </p:cTn>
                               </p:par>
                               <p:par>
-                                <p:cTn id="44" presetID="10" presetClass="entr" presetSubtype="0" fill="hold" grpId="0" nodeType="withEffect">
+                                <p:cTn id="42" presetID="10" presetClass="entr" presetSubtype="0" fill="hold" grpId="0" nodeType="withEffect">
                                   <p:stCondLst>
                                     <p:cond delay="0"/>
                                   </p:stCondLst>
                                   <p:childTnLst>
                                     <p:animEffect transition="in" filter="fade">
                                       <p:cBhvr>
-                                        <p:cTn id="45" dur="500"/>
-                                        <p:tgtEl>
-                                          <p:spTgt spid="6"/>
+                                        <p:cTn id="43" dur="500"/>
+                                        <p:tgtEl>
+                                          <p:spTgt spid="10"/>
                                         </p:tgtEl>
                                       </p:cBhvr>
                                     </p:animEffect>
                                     <p:set>
                                       <p:cBhvr>
-                                        <p:cTn id="46" dur="1" fill="hold">
-                                          <p:stCondLst>
-                                            <p:cond delay="0"/>
-                                          </p:stCondLst>
-                                        </p:cTn>
-                                        <p:tgtEl>
-                                          <p:spTgt spid="6"/>
-                                        </p:tgtEl>
-                                        <p:attrNameLst>
-                                          <p:attrName>style.visibility</p:attrName>
-                                        </p:attrNameLst>
-                                      </p:cBhvr>
-                                      <p:to>
-                                        <p:strVal val="visible"/>
-                                      </p:to>
-                                    </p:set>
-                                  </p:childTnLst>
-                                </p:cTn>
-                              </p:par>
-                              <p:par>
-                                <p:cTn id="47" presetID="10" presetClass="entr" presetSubtype="0" fill="hold" grpId="0" nodeType="withEffect">
-                                  <p:stCondLst>
-                                    <p:cond delay="0"/>
-                                  </p:stCondLst>
-                                  <p:childTnLst>
-                                    <p:animEffect transition="in" filter="fade">
-                                      <p:cBhvr>
-                                        <p:cTn id="48" dur="500"/>
-                                        <p:tgtEl>
-                                          <p:spTgt spid="10"/>
-                                        </p:tgtEl>
-                                      </p:cBhvr>
-                                    </p:animEffect>
-                                    <p:set>
-                                      <p:cBhvr>
-                                        <p:cTn id="49" dur="1" fill="hold">
+                                        <p:cTn id="44" dur="1" fill="hold">
                                           <p:stCondLst>
                                             <p:cond delay="0"/>
                                           </p:stCondLst>
@@ -17685,26 +17499,26 @@
                     </p:cTn>
                   </p:par>
                   <p:par>
-                    <p:cTn id="50" fill="hold">
+                    <p:cTn id="45" fill="hold">
                       <p:stCondLst>
                         <p:cond delay="indefinite"/>
                       </p:stCondLst>
                       <p:childTnLst>
                         <p:par>
-                          <p:cTn id="51" fill="hold">
+                          <p:cTn id="46" fill="hold">
                             <p:stCondLst>
                               <p:cond delay="0"/>
                             </p:stCondLst>
                             <p:childTnLst>
                               <p:par>
-                                <p:cTn id="52" presetID="10" presetClass="entr" presetSubtype="0" fill="hold" grpId="0" nodeType="clickEffect">
+                                <p:cTn id="47" presetID="10" presetClass="entr" presetSubtype="0" fill="hold" grpId="0" nodeType="clickEffect">
                                   <p:stCondLst>
                                     <p:cond delay="0"/>
                                   </p:stCondLst>
                                   <p:childTnLst>
                                     <p:animEffect transition="in" filter="fade">
                                       <p:cBhvr>
-                                        <p:cTn id="53" dur="500"/>
+                                        <p:cTn id="48" dur="500"/>
                                         <p:tgtEl>
                                           <p:spTgt spid="11"/>
                                         </p:tgtEl>
@@ -17712,7 +17526,7 @@
                                     </p:animEffect>
                                     <p:set>
                                       <p:cBhvr>
-                                        <p:cTn id="54" dur="1" fill="hold">
+                                        <p:cTn id="49" dur="1" fill="hold">
                                           <p:stCondLst>
                                             <p:cond delay="0"/>
                                           </p:stCondLst>

--- a/examples/communication_friction/communication_friction.pptx
+++ b/examples/communication_friction/communication_friction.pptx
@@ -3100,6 +3100,14 @@
 <file path=ppt/slides/slide1.xml><?xml version="1.0" encoding="utf-8"?>
 <p:sld xmlns:a="http://schemas.openxmlformats.org/drawingml/2006/main" xmlns:p="http://schemas.openxmlformats.org/presentationml/2006/main" xmlns:r="http://schemas.openxmlformats.org/officeDocument/2006/relationships">
   <p:cSld>
+    <p:bg>
+      <p:bgPr>
+        <a:solidFill>
+          <a:srgbClr val="FAFBFC"/>
+        </a:solidFill>
+        <a:effectLst/>
+      </p:bgPr>
+    </p:bg>
     <p:spTree>
       <p:nvGrpSpPr>
         <p:cNvPr id="1" name=""/>
@@ -3115,8 +3123,8 @@
         </p:nvSpPr>
         <p:spPr>
           <a:xfrm>
-            <a:off x="731520" y="1828800"/>
-            <a:ext cx="10728655" cy="1371600"/>
+            <a:off x="731520" y="1371600"/>
+            <a:ext cx="10728655" cy="604266"/>
           </a:xfrm>
           <a:prstGeom prst="rect">
             <a:avLst/>
@@ -3124,15 +3132,18 @@
           <a:noFill/>
         </p:spPr>
         <p:txBody>
-          <a:bodyPr wrap="square">
+          <a:bodyPr wrap="square" lIns="45720" rIns="45720" tIns="64008" bIns="64008">
             <a:spAutoFit/>
           </a:bodyPr>
           <a:lstStyle/>
           <a:p>
             <a:pPr algn="ctr">
-              <a:defRPr sz="4000" b="1">
+              <a:lnSpc>
+                <a:spcPct val="125000"/>
+              </a:lnSpc>
+              <a:defRPr sz="3000" b="1" i="0">
                 <a:solidFill>
-                  <a:srgbClr val="2C3E50"/>
+                  <a:srgbClr val="2E5A88"/>
                 </a:solidFill>
                 <a:latin typeface="FangSong"/>
               </a:defRPr>
@@ -3145,57 +3156,14 @@
       </p:sp>
       <p:sp>
         <p:nvSpPr>
-          <p:cNvPr id="3" name="Rectangle 2"/>
-          <p:cNvSpPr/>
+          <p:cNvPr id="3" name="TextBox 2"/>
+          <p:cNvSpPr txBox="1"/>
           <p:nvPr/>
         </p:nvSpPr>
         <p:spPr>
           <a:xfrm>
-            <a:off x="5181447" y="3383280"/>
-            <a:ext cx="1828800" cy="45720"/>
-          </a:xfrm>
-          <a:prstGeom prst="rect">
-            <a:avLst/>
-          </a:prstGeom>
-          <a:solidFill>
-            <a:srgbClr val="2E5A88"/>
-          </a:solidFill>
-          <a:ln>
-            <a:noFill/>
-          </a:ln>
-        </p:spPr>
-        <p:style>
-          <a:lnRef idx="1">
-            <a:schemeClr val="accent1"/>
-          </a:lnRef>
-          <a:fillRef idx="3">
-            <a:schemeClr val="accent1"/>
-          </a:fillRef>
-          <a:effectRef idx="2">
-            <a:schemeClr val="accent1"/>
-          </a:effectRef>
-          <a:fontRef idx="minor">
-            <a:schemeClr val="lt1"/>
-          </a:fontRef>
-        </p:style>
-        <p:txBody>
-          <a:bodyPr rtlCol="0" anchor="ctr"/>
-          <a:lstStyle/>
-          <a:p>
-            <a:pPr algn="ctr"/>
-          </a:p>
-        </p:txBody>
-      </p:sp>
-      <p:sp>
-        <p:nvSpPr>
-          <p:cNvPr id="4" name="TextBox 3"/>
-          <p:cNvSpPr txBox="1"/>
-          <p:nvPr/>
-        </p:nvSpPr>
-        <p:spPr>
-          <a:xfrm>
-            <a:off x="731520" y="3657600"/>
-            <a:ext cx="10728655" cy="914400"/>
+            <a:off x="731520" y="2231898"/>
+            <a:ext cx="10728655" cy="413766"/>
           </a:xfrm>
           <a:prstGeom prst="rect">
             <a:avLst/>
@@ -3203,13 +3171,16 @@
           <a:noFill/>
         </p:spPr>
         <p:txBody>
-          <a:bodyPr wrap="square">
+          <a:bodyPr wrap="square" lIns="45720" rIns="45720" tIns="64008" bIns="64008">
             <a:spAutoFit/>
           </a:bodyPr>
           <a:lstStyle/>
           <a:p>
             <a:pPr algn="ctr">
-              <a:defRPr sz="2400">
+              <a:lnSpc>
+                <a:spcPct val="125000"/>
+              </a:lnSpc>
+              <a:defRPr sz="1800" b="0" i="0">
                 <a:solidFill>
                   <a:srgbClr val="7B8FA3"/>
                 </a:solidFill>
@@ -3336,12 +3307,15 @@
           <a:noFill/>
         </p:spPr>
         <p:txBody>
-          <a:bodyPr wrap="square">
+          <a:bodyPr wrap="square" lIns="45720" rIns="45720" tIns="64008" bIns="64008">
             <a:spAutoFit/>
           </a:bodyPr>
           <a:lstStyle/>
           <a:p>
             <a:pPr algn="l">
+              <a:lnSpc>
+                <a:spcPct val="125000"/>
+              </a:lnSpc>
               <a:defRPr sz="1800" b="0" i="1">
                 <a:solidFill>
                   <a:srgbClr val="7B8FA3"/>
@@ -3372,12 +3346,15 @@
           <a:noFill/>
         </p:spPr>
         <p:txBody>
-          <a:bodyPr wrap="square">
+          <a:bodyPr wrap="square" lIns="45720" rIns="45720" tIns="64008" bIns="64008">
             <a:spAutoFit/>
           </a:bodyPr>
           <a:lstStyle/>
           <a:p>
             <a:pPr algn="l">
+              <a:lnSpc>
+                <a:spcPct val="125000"/>
+              </a:lnSpc>
               <a:defRPr sz="1400" b="0" i="0">
                 <a:solidFill>
                   <a:srgbClr val="2C3E50"/>
@@ -3408,12 +3385,15 @@
           <a:noFill/>
         </p:spPr>
         <p:txBody>
-          <a:bodyPr wrap="square">
+          <a:bodyPr wrap="square" lIns="45720" rIns="45720" tIns="64008" bIns="64008">
             <a:spAutoFit/>
           </a:bodyPr>
           <a:lstStyle/>
           <a:p>
             <a:pPr algn="l">
+              <a:lnSpc>
+                <a:spcPct val="125000"/>
+              </a:lnSpc>
               <a:defRPr sz="1400" b="0" i="0">
                 <a:solidFill>
                   <a:srgbClr val="2C3E50"/>
@@ -3444,12 +3424,15 @@
           <a:noFill/>
         </p:spPr>
         <p:txBody>
-          <a:bodyPr wrap="square">
+          <a:bodyPr wrap="square" lIns="45720" rIns="45720" tIns="64008" bIns="64008">
             <a:spAutoFit/>
           </a:bodyPr>
           <a:lstStyle/>
           <a:p>
             <a:pPr algn="l">
+              <a:lnSpc>
+                <a:spcPct val="125000"/>
+              </a:lnSpc>
               <a:defRPr sz="1400" b="0" i="0">
                 <a:solidFill>
                   <a:srgbClr val="2C3E50"/>
@@ -3465,59 +3448,14 @@
       </p:sp>
       <p:sp>
         <p:nvSpPr>
-          <p:cNvPr id="8" name="Rectangle 7"/>
-          <p:cNvSpPr/>
+          <p:cNvPr id="8" name="TextBox 7"/>
+          <p:cNvSpPr txBox="1"/>
           <p:nvPr/>
         </p:nvSpPr>
         <p:spPr>
           <a:xfrm>
             <a:off x="731520" y="3659124"/>
-            <a:ext cx="54864" cy="855472"/>
-          </a:xfrm>
-          <a:prstGeom prst="rect">
-            <a:avLst/>
-          </a:prstGeom>
-          <a:solidFill>
-            <a:srgbClr val="2E5A88"/>
-          </a:solidFill>
-          <a:ln w="12700">
-            <a:solidFill>
-              <a:srgbClr val="2E5A88"/>
-            </a:solidFill>
-          </a:ln>
-        </p:spPr>
-        <p:style>
-          <a:lnRef idx="1">
-            <a:schemeClr val="accent1"/>
-          </a:lnRef>
-          <a:fillRef idx="3">
-            <a:schemeClr val="accent1"/>
-          </a:fillRef>
-          <a:effectRef idx="2">
-            <a:schemeClr val="accent1"/>
-          </a:effectRef>
-          <a:fontRef idx="minor">
-            <a:schemeClr val="lt1"/>
-          </a:fontRef>
-        </p:style>
-        <p:txBody>
-          <a:bodyPr rtlCol="0" anchor="ctr"/>
-          <a:lstStyle/>
-          <a:p>
-            <a:pPr algn="ctr"/>
-          </a:p>
-        </p:txBody>
-      </p:sp>
-      <p:sp>
-        <p:nvSpPr>
-          <p:cNvPr id="9" name="TextBox 8"/>
-          <p:cNvSpPr txBox="1"/>
-          <p:nvPr/>
-        </p:nvSpPr>
-        <p:spPr>
-          <a:xfrm>
-            <a:off x="923544" y="3659124"/>
-            <a:ext cx="10536631" cy="413766"/>
+            <a:ext cx="10728655" cy="413766"/>
           </a:xfrm>
           <a:prstGeom prst="rect">
             <a:avLst/>
@@ -3525,12 +3463,15 @@
           <a:noFill/>
         </p:spPr>
         <p:txBody>
-          <a:bodyPr wrap="square">
+          <a:bodyPr wrap="square" lIns="45720" rIns="45720" tIns="64008" bIns="64008">
             <a:spAutoFit/>
           </a:bodyPr>
           <a:lstStyle/>
           <a:p>
             <a:pPr algn="l">
+              <a:lnSpc>
+                <a:spcPct val="125000"/>
+              </a:lnSpc>
               <a:defRPr sz="1800" b="1" i="0">
                 <a:solidFill>
                   <a:srgbClr val="2E5A88"/>
@@ -3546,14 +3487,14 @@
       </p:sp>
       <p:sp>
         <p:nvSpPr>
-          <p:cNvPr id="10" name="TextBox 9"/>
+          <p:cNvPr id="9" name="TextBox 8"/>
           <p:cNvSpPr txBox="1"/>
           <p:nvPr/>
         </p:nvSpPr>
         <p:spPr>
           <a:xfrm>
-            <a:off x="923544" y="4164330"/>
-            <a:ext cx="10536631" cy="350266"/>
+            <a:off x="731520" y="4146042"/>
+            <a:ext cx="10728655" cy="350266"/>
           </a:xfrm>
           <a:prstGeom prst="rect">
             <a:avLst/>
@@ -3561,12 +3502,15 @@
           <a:noFill/>
         </p:spPr>
         <p:txBody>
-          <a:bodyPr wrap="square">
+          <a:bodyPr wrap="square" lIns="45720" rIns="45720" tIns="64008" bIns="64008">
             <a:spAutoFit/>
           </a:bodyPr>
           <a:lstStyle/>
           <a:p>
             <a:pPr algn="l">
+              <a:lnSpc>
+                <a:spcPct val="125000"/>
+              </a:lnSpc>
               <a:defRPr sz="1400" b="0" i="0">
                 <a:solidFill>
                   <a:srgbClr val="2C3E50"/>
@@ -3731,60 +3675,33 @@
                       </p:childTnLst>
                     </p:cTn>
                   </p:par>
-                  <p:par>
-                    <p:cTn id="14" fill="hold">
-                      <p:stCondLst>
-                        <p:cond delay="0"/>
-                      </p:stCondLst>
-                      <p:childTnLst>
-                        <p:set>
-                          <p:cBhvr>
-                            <p:cTn id="15" dur="1" fill="hold">
-                              <p:stCondLst>
-                                <p:cond delay="0"/>
-                              </p:stCondLst>
-                            </p:cTn>
-                            <p:tgtEl>
-                              <p:spTgt spid="10"/>
-                            </p:tgtEl>
-                            <p:attrNameLst>
-                              <p:attrName>style.visibility</p:attrName>
-                            </p:attrNameLst>
-                          </p:cBhvr>
-                          <p:to>
-                            <p:strVal val="hidden"/>
-                          </p:to>
-                        </p:set>
-                      </p:childTnLst>
-                    </p:cTn>
-                  </p:par>
                 </p:childTnLst>
               </p:cTn>
             </p:par>
             <p:seq concurrent="1" nextAc="seek">
-              <p:cTn id="16" dur="indefinite" nodeType="mainSeq">
+              <p:cTn id="14" dur="indefinite" nodeType="mainSeq">
                 <p:childTnLst>
                   <p:par>
-                    <p:cTn id="17" fill="hold">
+                    <p:cTn id="15" fill="hold">
                       <p:stCondLst>
                         <p:cond delay="indefinite"/>
                       </p:stCondLst>
                       <p:childTnLst>
                         <p:par>
-                          <p:cTn id="18" fill="hold">
+                          <p:cTn id="16" fill="hold">
                             <p:stCondLst>
                               <p:cond delay="0"/>
                             </p:stCondLst>
                             <p:childTnLst>
                               <p:par>
-                                <p:cTn id="19" presetID="10" presetClass="entr" presetSubtype="0" fill="hold" grpId="0" nodeType="clickEffect">
+                                <p:cTn id="17" presetID="10" presetClass="entr" presetSubtype="0" fill="hold" grpId="0" nodeType="clickEffect">
                                   <p:stCondLst>
                                     <p:cond delay="0"/>
                                   </p:stCondLst>
                                   <p:childTnLst>
                                     <p:animEffect transition="in" filter="fade">
                                       <p:cBhvr>
-                                        <p:cTn id="20" dur="500"/>
+                                        <p:cTn id="18" dur="500"/>
                                         <p:tgtEl>
                                           <p:spTgt spid="4"/>
                                         </p:tgtEl>
@@ -3792,7 +3709,7 @@
                                     </p:animEffect>
                                     <p:set>
                                       <p:cBhvr>
-                                        <p:cTn id="21" dur="1" fill="hold">
+                                        <p:cTn id="19" dur="1" fill="hold">
                                           <p:stCondLst>
                                             <p:cond delay="0"/>
                                           </p:stCondLst>
@@ -3818,26 +3735,26 @@
                     </p:cTn>
                   </p:par>
                   <p:par>
-                    <p:cTn id="22" fill="hold">
+                    <p:cTn id="20" fill="hold">
                       <p:stCondLst>
                         <p:cond delay="indefinite"/>
                       </p:stCondLst>
                       <p:childTnLst>
                         <p:par>
-                          <p:cTn id="23" fill="hold">
+                          <p:cTn id="21" fill="hold">
                             <p:stCondLst>
                               <p:cond delay="0"/>
                             </p:stCondLst>
                             <p:childTnLst>
                               <p:par>
-                                <p:cTn id="24" presetID="10" presetClass="entr" presetSubtype="0" fill="hold" grpId="0" nodeType="clickEffect">
+                                <p:cTn id="22" presetID="10" presetClass="entr" presetSubtype="0" fill="hold" grpId="0" nodeType="clickEffect">
                                   <p:stCondLst>
                                     <p:cond delay="0"/>
                                   </p:stCondLst>
                                   <p:childTnLst>
                                     <p:animEffect transition="in" filter="fade">
                                       <p:cBhvr>
-                                        <p:cTn id="25" dur="500"/>
+                                        <p:cTn id="23" dur="500"/>
                                         <p:tgtEl>
                                           <p:spTgt spid="5"/>
                                         </p:tgtEl>
@@ -3845,7 +3762,7 @@
                                     </p:animEffect>
                                     <p:set>
                                       <p:cBhvr>
-                                        <p:cTn id="26" dur="1" fill="hold">
+                                        <p:cTn id="24" dur="1" fill="hold">
                                           <p:stCondLst>
                                             <p:cond delay="0"/>
                                           </p:stCondLst>
@@ -3865,14 +3782,14 @@
                                 </p:cTn>
                               </p:par>
                               <p:par>
-                                <p:cTn id="27" presetID="10" presetClass="entr" presetSubtype="0" fill="hold" grpId="0" nodeType="withEffect">
+                                <p:cTn id="25" presetID="10" presetClass="entr" presetSubtype="0" fill="hold" grpId="0" nodeType="withEffect">
                                   <p:stCondLst>
                                     <p:cond delay="0"/>
                                   </p:stCondLst>
                                   <p:childTnLst>
                                     <p:animEffect transition="in" filter="fade">
                                       <p:cBhvr>
-                                        <p:cTn id="28" dur="500"/>
+                                        <p:cTn id="26" dur="500"/>
                                         <p:tgtEl>
                                           <p:spTgt spid="6"/>
                                         </p:tgtEl>
@@ -3880,7 +3797,7 @@
                                     </p:animEffect>
                                     <p:set>
                                       <p:cBhvr>
-                                        <p:cTn id="29" dur="1" fill="hold">
+                                        <p:cTn id="27" dur="1" fill="hold">
                                           <p:stCondLst>
                                             <p:cond delay="0"/>
                                           </p:stCondLst>
@@ -3900,14 +3817,14 @@
                                 </p:cTn>
                               </p:par>
                               <p:par>
-                                <p:cTn id="30" presetID="10" presetClass="entr" presetSubtype="0" fill="hold" grpId="0" nodeType="withEffect">
+                                <p:cTn id="28" presetID="10" presetClass="entr" presetSubtype="0" fill="hold" grpId="0" nodeType="withEffect">
                                   <p:stCondLst>
                                     <p:cond delay="0"/>
                                   </p:stCondLst>
                                   <p:childTnLst>
                                     <p:animEffect transition="in" filter="fade">
                                       <p:cBhvr>
-                                        <p:cTn id="31" dur="500"/>
+                                        <p:cTn id="29" dur="500"/>
                                         <p:tgtEl>
                                           <p:spTgt spid="7"/>
                                         </p:tgtEl>
@@ -3915,7 +3832,7 @@
                                     </p:animEffect>
                                     <p:set>
                                       <p:cBhvr>
-                                        <p:cTn id="32" dur="1" fill="hold">
+                                        <p:cTn id="30" dur="1" fill="hold">
                                           <p:stCondLst>
                                             <p:cond delay="0"/>
                                           </p:stCondLst>
@@ -3941,26 +3858,26 @@
                     </p:cTn>
                   </p:par>
                   <p:par>
-                    <p:cTn id="33" fill="hold">
+                    <p:cTn id="31" fill="hold">
                       <p:stCondLst>
                         <p:cond delay="indefinite"/>
                       </p:stCondLst>
                       <p:childTnLst>
                         <p:par>
-                          <p:cTn id="34" fill="hold">
+                          <p:cTn id="32" fill="hold">
                             <p:stCondLst>
                               <p:cond delay="0"/>
                             </p:stCondLst>
                             <p:childTnLst>
                               <p:par>
-                                <p:cTn id="35" presetID="10" presetClass="entr" presetSubtype="0" fill="hold" grpId="0" nodeType="clickEffect">
+                                <p:cTn id="33" presetID="10" presetClass="entr" presetSubtype="0" fill="hold" grpId="0" nodeType="clickEffect">
                                   <p:stCondLst>
                                     <p:cond delay="0"/>
                                   </p:stCondLst>
                                   <p:childTnLst>
                                     <p:animEffect transition="in" filter="fade">
                                       <p:cBhvr>
-                                        <p:cTn id="36" dur="500"/>
+                                        <p:cTn id="34" dur="500"/>
                                         <p:tgtEl>
                                           <p:spTgt spid="8"/>
                                         </p:tgtEl>
@@ -3968,7 +3885,7 @@
                                     </p:animEffect>
                                     <p:set>
                                       <p:cBhvr>
-                                        <p:cTn id="37" dur="1" fill="hold">
+                                        <p:cTn id="35" dur="1" fill="hold">
                                           <p:stCondLst>
                                             <p:cond delay="0"/>
                                           </p:stCondLst>
@@ -3988,14 +3905,14 @@
                                 </p:cTn>
                               </p:par>
                               <p:par>
-                                <p:cTn id="38" presetID="10" presetClass="entr" presetSubtype="0" fill="hold" grpId="0" nodeType="withEffect">
+                                <p:cTn id="36" presetID="10" presetClass="entr" presetSubtype="0" fill="hold" grpId="0" nodeType="withEffect">
                                   <p:stCondLst>
                                     <p:cond delay="0"/>
                                   </p:stCondLst>
                                   <p:childTnLst>
                                     <p:animEffect transition="in" filter="fade">
                                       <p:cBhvr>
-                                        <p:cTn id="39" dur="500"/>
+                                        <p:cTn id="37" dur="500"/>
                                         <p:tgtEl>
                                           <p:spTgt spid="9"/>
                                         </p:tgtEl>
@@ -4003,48 +3920,13 @@
                                     </p:animEffect>
                                     <p:set>
                                       <p:cBhvr>
-                                        <p:cTn id="40" dur="1" fill="hold">
+                                        <p:cTn id="38" dur="1" fill="hold">
                                           <p:stCondLst>
                                             <p:cond delay="0"/>
                                           </p:stCondLst>
                                         </p:cTn>
                                         <p:tgtEl>
                                           <p:spTgt spid="9"/>
-                                        </p:tgtEl>
-                                        <p:attrNameLst>
-                                          <p:attrName>style.visibility</p:attrName>
-                                        </p:attrNameLst>
-                                      </p:cBhvr>
-                                      <p:to>
-                                        <p:strVal val="visible"/>
-                                      </p:to>
-                                    </p:set>
-                                  </p:childTnLst>
-                                </p:cTn>
-                              </p:par>
-                              <p:par>
-                                <p:cTn id="41" presetID="10" presetClass="entr" presetSubtype="0" fill="hold" grpId="0" nodeType="withEffect">
-                                  <p:stCondLst>
-                                    <p:cond delay="0"/>
-                                  </p:stCondLst>
-                                  <p:childTnLst>
-                                    <p:animEffect transition="in" filter="fade">
-                                      <p:cBhvr>
-                                        <p:cTn id="42" dur="500"/>
-                                        <p:tgtEl>
-                                          <p:spTgt spid="10"/>
-                                        </p:tgtEl>
-                                      </p:cBhvr>
-                                    </p:animEffect>
-                                    <p:set>
-                                      <p:cBhvr>
-                                        <p:cTn id="43" dur="1" fill="hold">
-                                          <p:stCondLst>
-                                            <p:cond delay="0"/>
-                                          </p:stCondLst>
-                                        </p:cTn>
-                                        <p:tgtEl>
-                                          <p:spTgt spid="10"/>
                                         </p:tgtEl>
                                         <p:attrNameLst>
                                           <p:attrName>style.visibility</p:attrName>
@@ -4186,7 +4068,7 @@
         <p:spPr>
           <a:xfrm>
             <a:off x="731520" y="1371600"/>
-            <a:ext cx="281940" cy="548640"/>
+            <a:ext cx="4572000" cy="445516"/>
           </a:xfrm>
           <a:prstGeom prst="rect">
             <a:avLst/>
@@ -4194,12 +4076,15 @@
           <a:noFill/>
         </p:spPr>
         <p:txBody>
-          <a:bodyPr wrap="square">
+          <a:bodyPr wrap="square" lIns="45720" rIns="45720" tIns="64008" bIns="64008">
             <a:spAutoFit/>
           </a:bodyPr>
           <a:lstStyle/>
           <a:p>
             <a:pPr algn="l">
+              <a:lnSpc>
+                <a:spcPct val="125000"/>
+              </a:lnSpc>
               <a:defRPr sz="2000" b="1" i="0">
                 <a:solidFill>
                   <a:srgbClr val="2E5A88"/>
@@ -4221,8 +4106,8 @@
         </p:nvSpPr>
         <p:spPr>
           <a:xfrm>
-            <a:off x="731520" y="2103120"/>
-            <a:ext cx="281940" cy="2395728"/>
+            <a:off x="731520" y="1963420"/>
+            <a:ext cx="4572000" cy="1252728"/>
           </a:xfrm>
           <a:prstGeom prst="rect">
             <a:avLst/>
@@ -4230,12 +4115,15 @@
           <a:noFill/>
         </p:spPr>
         <p:txBody>
-          <a:bodyPr wrap="square">
+          <a:bodyPr wrap="square" tIns="54864" bIns="54864">
             <a:spAutoFit/>
           </a:bodyPr>
           <a:lstStyle/>
           <a:p>
             <a:pPr>
+              <a:lnSpc>
+                <a:spcPct val="125000"/>
+              </a:lnSpc>
               <a:defRPr sz="1800">
                 <a:solidFill>
                   <a:srgbClr val="2C3E50"/>
@@ -4250,6 +4138,9 @@
           </a:p>
           <a:p>
             <a:pPr>
+              <a:lnSpc>
+                <a:spcPct val="125000"/>
+              </a:lnSpc>
               <a:defRPr sz="1800">
                 <a:solidFill>
                   <a:srgbClr val="2C3E50"/>
@@ -4264,6 +4155,9 @@
           </a:p>
           <a:p>
             <a:pPr>
+              <a:lnSpc>
+                <a:spcPct val="125000"/>
+              </a:lnSpc>
               <a:defRPr sz="1800">
                 <a:solidFill>
                   <a:srgbClr val="2C3E50"/>
@@ -4278,6 +4172,9 @@
           </a:p>
           <a:p>
             <a:pPr>
+              <a:lnSpc>
+                <a:spcPct val="125000"/>
+              </a:lnSpc>
               <a:defRPr sz="1800">
                 <a:solidFill>
                   <a:srgbClr val="2C3E50"/>
@@ -4300,8 +4197,8 @@
         </p:nvSpPr>
         <p:spPr>
           <a:xfrm>
-            <a:off x="1470660" y="1371600"/>
-            <a:ext cx="408939" cy="548640"/>
+            <a:off x="5596128" y="1371600"/>
+            <a:ext cx="4572000" cy="445516"/>
           </a:xfrm>
           <a:prstGeom prst="rect">
             <a:avLst/>
@@ -4309,12 +4206,15 @@
           <a:noFill/>
         </p:spPr>
         <p:txBody>
-          <a:bodyPr wrap="square">
+          <a:bodyPr wrap="square" lIns="45720" rIns="45720" tIns="64008" bIns="64008">
             <a:spAutoFit/>
           </a:bodyPr>
           <a:lstStyle/>
           <a:p>
             <a:pPr algn="l">
+              <a:lnSpc>
+                <a:spcPct val="125000"/>
+              </a:lnSpc>
               <a:defRPr sz="2000" b="1" i="0">
                 <a:solidFill>
                   <a:srgbClr val="6BC4A6"/>
@@ -4336,8 +4236,8 @@
         </p:nvSpPr>
         <p:spPr>
           <a:xfrm>
-            <a:off x="1470660" y="2103120"/>
-            <a:ext cx="408939" cy="2395728"/>
+            <a:off x="5596128" y="1963420"/>
+            <a:ext cx="4572000" cy="1252728"/>
           </a:xfrm>
           <a:prstGeom prst="rect">
             <a:avLst/>
@@ -4345,12 +4245,15 @@
           <a:noFill/>
         </p:spPr>
         <p:txBody>
-          <a:bodyPr wrap="square">
+          <a:bodyPr wrap="square" tIns="54864" bIns="54864">
             <a:spAutoFit/>
           </a:bodyPr>
           <a:lstStyle/>
           <a:p>
             <a:pPr>
+              <a:lnSpc>
+                <a:spcPct val="125000"/>
+              </a:lnSpc>
               <a:defRPr sz="1800">
                 <a:solidFill>
                   <a:srgbClr val="2C3E50"/>
@@ -4365,6 +4268,9 @@
           </a:p>
           <a:p>
             <a:pPr>
+              <a:lnSpc>
+                <a:spcPct val="125000"/>
+              </a:lnSpc>
               <a:defRPr sz="1800">
                 <a:solidFill>
                   <a:srgbClr val="2C3E50"/>
@@ -4379,6 +4285,9 @@
           </a:p>
           <a:p>
             <a:pPr>
+              <a:lnSpc>
+                <a:spcPct val="125000"/>
+              </a:lnSpc>
               <a:defRPr sz="1800">
                 <a:solidFill>
                   <a:srgbClr val="2C3E50"/>
@@ -4393,6 +4302,9 @@
           </a:p>
           <a:p>
             <a:pPr>
+              <a:lnSpc>
+                <a:spcPct val="125000"/>
+              </a:lnSpc>
               <a:defRPr sz="1800">
                 <a:solidFill>
                   <a:srgbClr val="2C3E50"/>
@@ -4418,6 +4330,14 @@
 <file path=ppt/slides/slide12.xml><?xml version="1.0" encoding="utf-8"?>
 <p:sld xmlns:a="http://schemas.openxmlformats.org/drawingml/2006/main" xmlns:p="http://schemas.openxmlformats.org/presentationml/2006/main" xmlns:r="http://schemas.openxmlformats.org/officeDocument/2006/relationships">
   <p:cSld>
+    <p:bg>
+      <p:bgPr>
+        <a:solidFill>
+          <a:srgbClr val="F0F4F8"/>
+        </a:solidFill>
+        <a:effectLst/>
+      </p:bgPr>
+    </p:bg>
     <p:spTree>
       <p:nvGrpSpPr>
         <p:cNvPr id="1" name=""/>
@@ -4433,8 +4353,8 @@
         </p:nvSpPr>
         <p:spPr>
           <a:xfrm>
-            <a:off x="731520" y="2286000"/>
-            <a:ext cx="10728655" cy="1371600"/>
+            <a:off x="731520" y="1371600"/>
+            <a:ext cx="10728655" cy="540766"/>
           </a:xfrm>
           <a:prstGeom prst="rect">
             <a:avLst/>
@@ -4442,15 +4362,18 @@
           <a:noFill/>
         </p:spPr>
         <p:txBody>
-          <a:bodyPr wrap="square">
+          <a:bodyPr wrap="square" lIns="45720" rIns="45720" tIns="64008" bIns="64008">
             <a:spAutoFit/>
           </a:bodyPr>
           <a:lstStyle/>
           <a:p>
             <a:pPr algn="ctr">
-              <a:defRPr sz="3600" b="1">
+              <a:lnSpc>
+                <a:spcPct val="125000"/>
+              </a:lnSpc>
+              <a:defRPr sz="2600" b="1" i="0">
                 <a:solidFill>
-                  <a:srgbClr val="2C3E50"/>
+                  <a:srgbClr val="2E5A88"/>
                 </a:solidFill>
                 <a:latin typeface="FangSong"/>
               </a:defRPr>
@@ -4469,8 +4392,8 @@
         </p:nvSpPr>
         <p:spPr>
           <a:xfrm>
-            <a:off x="731520" y="3840480"/>
-            <a:ext cx="10728655" cy="914400"/>
+            <a:off x="731520" y="2076957"/>
+            <a:ext cx="10728655" cy="413766"/>
           </a:xfrm>
           <a:prstGeom prst="rect">
             <a:avLst/>
@@ -4478,13 +4401,16 @@
           <a:noFill/>
         </p:spPr>
         <p:txBody>
-          <a:bodyPr wrap="square">
+          <a:bodyPr wrap="square" lIns="45720" rIns="45720" tIns="64008" bIns="64008">
             <a:spAutoFit/>
           </a:bodyPr>
           <a:lstStyle/>
           <a:p>
             <a:pPr algn="ctr">
-              <a:defRPr sz="1800">
+              <a:lnSpc>
+                <a:spcPct val="125000"/>
+              </a:lnSpc>
+              <a:defRPr sz="1800" b="0" i="0">
                 <a:solidFill>
                   <a:srgbClr val="7B8FA3"/>
                 </a:solidFill>
@@ -4596,59 +4522,14 @@
       </p:sp>
       <p:sp>
         <p:nvSpPr>
-          <p:cNvPr id="4" name="Rectangle 3"/>
-          <p:cNvSpPr/>
+          <p:cNvPr id="4" name="TextBox 3"/>
+          <p:cNvSpPr txBox="1"/>
           <p:nvPr/>
         </p:nvSpPr>
         <p:spPr>
           <a:xfrm>
             <a:off x="731520" y="1371600"/>
-            <a:ext cx="54864" cy="855472"/>
-          </a:xfrm>
-          <a:prstGeom prst="rect">
-            <a:avLst/>
-          </a:prstGeom>
-          <a:solidFill>
-            <a:srgbClr val="6BC4A6"/>
-          </a:solidFill>
-          <a:ln w="12700">
-            <a:solidFill>
-              <a:srgbClr val="6BC4A6"/>
-            </a:solidFill>
-          </a:ln>
-        </p:spPr>
-        <p:style>
-          <a:lnRef idx="1">
-            <a:schemeClr val="accent1"/>
-          </a:lnRef>
-          <a:fillRef idx="3">
-            <a:schemeClr val="accent1"/>
-          </a:fillRef>
-          <a:effectRef idx="2">
-            <a:schemeClr val="accent1"/>
-          </a:effectRef>
-          <a:fontRef idx="minor">
-            <a:schemeClr val="lt1"/>
-          </a:fontRef>
-        </p:style>
-        <p:txBody>
-          <a:bodyPr rtlCol="0" anchor="ctr"/>
-          <a:lstStyle/>
-          <a:p>
-            <a:pPr algn="ctr"/>
-          </a:p>
-        </p:txBody>
-      </p:sp>
-      <p:sp>
-        <p:nvSpPr>
-          <p:cNvPr id="5" name="TextBox 4"/>
-          <p:cNvSpPr txBox="1"/>
-          <p:nvPr/>
-        </p:nvSpPr>
-        <p:spPr>
-          <a:xfrm>
-            <a:off x="923544" y="1371600"/>
-            <a:ext cx="1120140" cy="413766"/>
+            <a:ext cx="3749039" cy="413766"/>
           </a:xfrm>
           <a:prstGeom prst="rect">
             <a:avLst/>
@@ -4656,12 +4537,15 @@
           <a:noFill/>
         </p:spPr>
         <p:txBody>
-          <a:bodyPr wrap="square">
+          <a:bodyPr wrap="square" lIns="45720" rIns="45720" tIns="64008" bIns="64008">
             <a:spAutoFit/>
           </a:bodyPr>
           <a:lstStyle/>
           <a:p>
             <a:pPr algn="l">
+              <a:lnSpc>
+                <a:spcPct val="125000"/>
+              </a:lnSpc>
               <a:defRPr sz="1800" b="1" i="0">
                 <a:solidFill>
                   <a:srgbClr val="6BC4A6"/>
@@ -4677,14 +4561,14 @@
       </p:sp>
       <p:sp>
         <p:nvSpPr>
-          <p:cNvPr id="6" name="TextBox 5"/>
+          <p:cNvPr id="5" name="TextBox 4"/>
           <p:cNvSpPr txBox="1"/>
           <p:nvPr/>
         </p:nvSpPr>
         <p:spPr>
           <a:xfrm>
-            <a:off x="923544" y="1876806"/>
-            <a:ext cx="1120140" cy="350266"/>
+            <a:off x="731520" y="1858517"/>
+            <a:ext cx="3749039" cy="350266"/>
           </a:xfrm>
           <a:prstGeom prst="rect">
             <a:avLst/>
@@ -4692,12 +4576,15 @@
           <a:noFill/>
         </p:spPr>
         <p:txBody>
-          <a:bodyPr wrap="square">
+          <a:bodyPr wrap="square" lIns="45720" rIns="45720" tIns="64008" bIns="64008">
             <a:spAutoFit/>
           </a:bodyPr>
           <a:lstStyle/>
           <a:p>
             <a:pPr algn="l">
+              <a:lnSpc>
+                <a:spcPct val="125000"/>
+              </a:lnSpc>
               <a:defRPr sz="1400" b="0" i="0">
                 <a:solidFill>
                   <a:srgbClr val="2C3E50"/>
@@ -4713,14 +4600,14 @@
       </p:sp>
       <p:sp>
         <p:nvSpPr>
-          <p:cNvPr id="7" name="TextBox 6"/>
+          <p:cNvPr id="6" name="TextBox 5"/>
           <p:cNvSpPr txBox="1"/>
           <p:nvPr/>
         </p:nvSpPr>
         <p:spPr>
           <a:xfrm>
-            <a:off x="731520" y="2409952"/>
-            <a:ext cx="1312164" cy="1443227"/>
+            <a:off x="731520" y="2391664"/>
+            <a:ext cx="3749039" cy="998728"/>
           </a:xfrm>
           <a:prstGeom prst="rect">
             <a:avLst/>
@@ -4728,12 +4615,15 @@
           <a:noFill/>
         </p:spPr>
         <p:txBody>
-          <a:bodyPr wrap="square">
+          <a:bodyPr wrap="square" tIns="54864" bIns="54864">
             <a:spAutoFit/>
           </a:bodyPr>
           <a:lstStyle/>
           <a:p>
             <a:pPr>
+              <a:lnSpc>
+                <a:spcPct val="125000"/>
+              </a:lnSpc>
               <a:defRPr sz="1400">
                 <a:solidFill>
                   <a:srgbClr val="2C3E50"/>
@@ -4748,6 +4638,9 @@
           </a:p>
           <a:p>
             <a:pPr>
+              <a:lnSpc>
+                <a:spcPct val="125000"/>
+              </a:lnSpc>
               <a:defRPr sz="1400">
                 <a:solidFill>
                   <a:srgbClr val="2C3E50"/>
@@ -4762,6 +4655,9 @@
           </a:p>
           <a:p>
             <a:pPr>
+              <a:lnSpc>
+                <a:spcPct val="125000"/>
+              </a:lnSpc>
               <a:defRPr sz="1400">
                 <a:solidFill>
                   <a:srgbClr val="2C3E50"/>
@@ -4776,6 +4672,9 @@
           </a:p>
           <a:p>
             <a:pPr>
+              <a:lnSpc>
+                <a:spcPct val="125000"/>
+              </a:lnSpc>
               <a:defRPr sz="1400">
                 <a:solidFill>
                   <a:srgbClr val="2C3E50"/>
@@ -4792,14 +4691,14 @@
       </p:sp>
       <p:sp>
         <p:nvSpPr>
-          <p:cNvPr id="8" name="TextBox 7"/>
+          <p:cNvPr id="7" name="TextBox 6"/>
           <p:cNvSpPr txBox="1"/>
           <p:nvPr/>
         </p:nvSpPr>
         <p:spPr>
           <a:xfrm>
-            <a:off x="731520" y="4036060"/>
-            <a:ext cx="1312164" cy="413766"/>
+            <a:off x="731520" y="3573272"/>
+            <a:ext cx="3749039" cy="413766"/>
           </a:xfrm>
           <a:prstGeom prst="rect">
             <a:avLst/>
@@ -4807,12 +4706,15 @@
           <a:noFill/>
         </p:spPr>
         <p:txBody>
-          <a:bodyPr wrap="square">
+          <a:bodyPr wrap="square" lIns="45720" rIns="45720" tIns="64008" bIns="64008">
             <a:spAutoFit/>
           </a:bodyPr>
           <a:lstStyle/>
           <a:p>
             <a:pPr algn="l">
+              <a:lnSpc>
+                <a:spcPct val="125000"/>
+              </a:lnSpc>
               <a:defRPr sz="1800" b="1" i="0">
                 <a:solidFill>
                   <a:srgbClr val="3D8B8B"/>
@@ -4828,7 +4730,7 @@
       </p:sp>
       <p:pic>
         <p:nvPicPr>
-          <p:cNvPr id="9" name="Picture 8" descr="tmpipvijmjt.png"/>
+          <p:cNvPr id="8" name="Picture 7" descr="tmptt_hxbbg.png"/>
           <p:cNvPicPr>
             <a:picLocks noChangeAspect="1"/>
           </p:cNvPicPr>
@@ -4842,7 +4744,7 @@
         </p:blipFill>
         <p:spPr>
           <a:xfrm>
-            <a:off x="2409444" y="1371600"/>
+            <a:off x="4846320" y="1371600"/>
             <a:ext cx="1828800" cy="1828800"/>
           </a:xfrm>
           <a:prstGeom prst="rect">
@@ -4880,7 +4782,7 @@
                               </p:stCondLst>
                             </p:cTn>
                             <p:tgtEl>
-                              <p:spTgt spid="7"/>
+                              <p:spTgt spid="6"/>
                             </p:tgtEl>
                             <p:attrNameLst>
                               <p:attrName>style.visibility</p:attrName>
@@ -4907,7 +4809,7 @@
                               </p:stCondLst>
                             </p:cTn>
                             <p:tgtEl>
-                              <p:spTgt spid="8"/>
+                              <p:spTgt spid="7"/>
                             </p:tgtEl>
                             <p:attrNameLst>
                               <p:attrName>style.visibility</p:attrName>
@@ -5018,7 +4920,7 @@
                                       <p:cBhvr>
                                         <p:cTn id="18" dur="500"/>
                                         <p:tgtEl>
-                                          <p:spTgt spid="6"/>
+                                          <p:spTgt spid="8"/>
                                         </p:tgtEl>
                                       </p:cBhvr>
                                     </p:animEffect>
@@ -5030,42 +4932,7 @@
                                           </p:stCondLst>
                                         </p:cTn>
                                         <p:tgtEl>
-                                          <p:spTgt spid="6"/>
-                                        </p:tgtEl>
-                                        <p:attrNameLst>
-                                          <p:attrName>style.visibility</p:attrName>
-                                        </p:attrNameLst>
-                                      </p:cBhvr>
-                                      <p:to>
-                                        <p:strVal val="visible"/>
-                                      </p:to>
-                                    </p:set>
-                                  </p:childTnLst>
-                                </p:cTn>
-                              </p:par>
-                              <p:par>
-                                <p:cTn id="20" presetID="10" presetClass="entr" presetSubtype="0" fill="hold" grpId="0" nodeType="withEffect">
-                                  <p:stCondLst>
-                                    <p:cond delay="0"/>
-                                  </p:stCondLst>
-                                  <p:childTnLst>
-                                    <p:animEffect transition="in" filter="fade">
-                                      <p:cBhvr>
-                                        <p:cTn id="21" dur="500"/>
-                                        <p:tgtEl>
-                                          <p:spTgt spid="9"/>
-                                        </p:tgtEl>
-                                      </p:cBhvr>
-                                    </p:animEffect>
-                                    <p:set>
-                                      <p:cBhvr>
-                                        <p:cTn id="22" dur="1" fill="hold">
-                                          <p:stCondLst>
-                                            <p:cond delay="0"/>
-                                          </p:stCondLst>
-                                        </p:cTn>
-                                        <p:tgtEl>
-                                          <p:spTgt spid="9"/>
+                                          <p:spTgt spid="8"/>
                                         </p:tgtEl>
                                         <p:attrNameLst>
                                           <p:attrName>style.visibility</p:attrName>
@@ -5085,40 +4952,40 @@
                     </p:cTn>
                   </p:par>
                   <p:par>
-                    <p:cTn id="23" fill="hold">
+                    <p:cTn id="20" fill="hold">
                       <p:stCondLst>
                         <p:cond delay="indefinite"/>
                       </p:stCondLst>
                       <p:childTnLst>
                         <p:par>
-                          <p:cTn id="24" fill="hold">
+                          <p:cTn id="21" fill="hold">
                             <p:stCondLst>
                               <p:cond delay="0"/>
                             </p:stCondLst>
                             <p:childTnLst>
                               <p:par>
-                                <p:cTn id="25" presetID="10" presetClass="entr" presetSubtype="0" fill="hold" grpId="0" nodeType="clickEffect">
+                                <p:cTn id="22" presetID="10" presetClass="entr" presetSubtype="0" fill="hold" grpId="0" nodeType="clickEffect">
                                   <p:stCondLst>
                                     <p:cond delay="0"/>
                                   </p:stCondLst>
                                   <p:childTnLst>
                                     <p:animEffect transition="in" filter="fade">
                                       <p:cBhvr>
-                                        <p:cTn id="26" dur="500"/>
-                                        <p:tgtEl>
-                                          <p:spTgt spid="7"/>
+                                        <p:cTn id="23" dur="500"/>
+                                        <p:tgtEl>
+                                          <p:spTgt spid="6"/>
                                         </p:tgtEl>
                                       </p:cBhvr>
                                     </p:animEffect>
                                     <p:set>
                                       <p:cBhvr>
-                                        <p:cTn id="27" dur="1" fill="hold">
+                                        <p:cTn id="24" dur="1" fill="hold">
                                           <p:stCondLst>
                                             <p:cond delay="0"/>
                                           </p:stCondLst>
                                         </p:cTn>
                                         <p:tgtEl>
-                                          <p:spTgt spid="7"/>
+                                          <p:spTgt spid="6"/>
                                         </p:tgtEl>
                                         <p:attrNameLst>
                                           <p:attrName>style.visibility</p:attrName>
@@ -5138,40 +5005,40 @@
                     </p:cTn>
                   </p:par>
                   <p:par>
-                    <p:cTn id="28" fill="hold">
+                    <p:cTn id="25" fill="hold">
                       <p:stCondLst>
                         <p:cond delay="indefinite"/>
                       </p:stCondLst>
                       <p:childTnLst>
                         <p:par>
-                          <p:cTn id="29" fill="hold">
+                          <p:cTn id="26" fill="hold">
                             <p:stCondLst>
                               <p:cond delay="0"/>
                             </p:stCondLst>
                             <p:childTnLst>
                               <p:par>
-                                <p:cTn id="30" presetID="10" presetClass="entr" presetSubtype="0" fill="hold" grpId="0" nodeType="clickEffect">
+                                <p:cTn id="27" presetID="10" presetClass="entr" presetSubtype="0" fill="hold" grpId="0" nodeType="clickEffect">
                                   <p:stCondLst>
                                     <p:cond delay="0"/>
                                   </p:stCondLst>
                                   <p:childTnLst>
                                     <p:animEffect transition="in" filter="fade">
                                       <p:cBhvr>
-                                        <p:cTn id="31" dur="500"/>
-                                        <p:tgtEl>
-                                          <p:spTgt spid="8"/>
+                                        <p:cTn id="28" dur="500"/>
+                                        <p:tgtEl>
+                                          <p:spTgt spid="7"/>
                                         </p:tgtEl>
                                       </p:cBhvr>
                                     </p:animEffect>
                                     <p:set>
                                       <p:cBhvr>
-                                        <p:cTn id="32" dur="1" fill="hold">
+                                        <p:cTn id="29" dur="1" fill="hold">
                                           <p:stCondLst>
                                             <p:cond delay="0"/>
                                           </p:stCondLst>
                                         </p:cTn>
                                         <p:tgtEl>
-                                          <p:spTgt spid="8"/>
+                                          <p:spTgt spid="7"/>
                                         </p:tgtEl>
                                         <p:attrNameLst>
                                           <p:attrName>style.visibility</p:attrName>
@@ -5313,7 +5180,7 @@
         <p:spPr>
           <a:xfrm>
             <a:off x="731520" y="1371600"/>
-            <a:ext cx="246380" cy="1645920"/>
+            <a:ext cx="411480" cy="4054855"/>
           </a:xfrm>
           <a:prstGeom prst="rect">
             <a:avLst/>
@@ -5321,12 +5188,15 @@
           <a:noFill/>
         </p:spPr>
         <p:txBody>
-          <a:bodyPr wrap="square">
+          <a:bodyPr wrap="square" tIns="54864" bIns="54864">
             <a:spAutoFit/>
           </a:bodyPr>
           <a:lstStyle/>
           <a:p>
             <a:pPr>
+              <a:lnSpc>
+                <a:spcPct val="125000"/>
+              </a:lnSpc>
               <a:defRPr sz="1800">
                 <a:solidFill>
                   <a:srgbClr val="2C3E50"/>
@@ -5341,6 +5211,9 @@
           </a:p>
           <a:p>
             <a:pPr>
+              <a:lnSpc>
+                <a:spcPct val="125000"/>
+              </a:lnSpc>
               <a:defRPr sz="1800">
                 <a:solidFill>
                   <a:srgbClr val="2C3E50"/>
@@ -5355,6 +5228,9 @@
           </a:p>
           <a:p>
             <a:pPr>
+              <a:lnSpc>
+                <a:spcPct val="125000"/>
+              </a:lnSpc>
               <a:defRPr sz="1800">
                 <a:solidFill>
                   <a:srgbClr val="2C3E50"/>
@@ -5371,7 +5247,7 @@
       </p:sp>
       <p:pic>
         <p:nvPicPr>
-          <p:cNvPr id="5" name="Picture 4" descr="tmpj8qs2xio.png"/>
+          <p:cNvPr id="5" name="Picture 4" descr="tmpkus5loqa.png"/>
           <p:cNvPicPr>
             <a:picLocks noChangeAspect="1"/>
           </p:cNvPicPr>
@@ -5385,7 +5261,7 @@
         </p:blipFill>
         <p:spPr>
           <a:xfrm>
-            <a:off x="1343660" y="1371600"/>
+            <a:off x="1508760" y="1371600"/>
             <a:ext cx="1645920" cy="1645920"/>
           </a:xfrm>
           <a:prstGeom prst="rect">
@@ -5395,59 +5271,14 @@
       </p:pic>
       <p:sp>
         <p:nvSpPr>
-          <p:cNvPr id="6" name="Rectangle 5"/>
-          <p:cNvSpPr/>
+          <p:cNvPr id="6" name="TextBox 5"/>
+          <p:cNvSpPr txBox="1"/>
           <p:nvPr/>
         </p:nvSpPr>
         <p:spPr>
           <a:xfrm>
-            <a:off x="731520" y="3246120"/>
-            <a:ext cx="54864" cy="1077722"/>
-          </a:xfrm>
-          <a:prstGeom prst="rect">
-            <a:avLst/>
-          </a:prstGeom>
-          <a:solidFill>
-            <a:srgbClr val="E8805C"/>
-          </a:solidFill>
-          <a:ln w="12700">
-            <a:solidFill>
-              <a:srgbClr val="E8805C"/>
-            </a:solidFill>
-          </a:ln>
-        </p:spPr>
-        <p:style>
-          <a:lnRef idx="1">
-            <a:schemeClr val="accent1"/>
-          </a:lnRef>
-          <a:fillRef idx="3">
-            <a:schemeClr val="accent1"/>
-          </a:fillRef>
-          <a:effectRef idx="2">
-            <a:schemeClr val="accent1"/>
-          </a:effectRef>
-          <a:fontRef idx="minor">
-            <a:schemeClr val="lt1"/>
-          </a:fontRef>
-        </p:style>
-        <p:txBody>
-          <a:bodyPr rtlCol="0" anchor="ctr"/>
-          <a:lstStyle/>
-          <a:p>
-            <a:pPr algn="ctr"/>
-          </a:p>
-        </p:txBody>
-      </p:sp>
-      <p:sp>
-        <p:nvSpPr>
-          <p:cNvPr id="7" name="TextBox 6"/>
-          <p:cNvSpPr txBox="1"/>
-          <p:nvPr/>
-        </p:nvSpPr>
-        <p:spPr>
-          <a:xfrm>
-            <a:off x="923544" y="3246120"/>
-            <a:ext cx="1704340" cy="413766"/>
+            <a:off x="731520" y="5655055"/>
+            <a:ext cx="2758440" cy="413766"/>
           </a:xfrm>
           <a:prstGeom prst="rect">
             <a:avLst/>
@@ -5455,12 +5286,15 @@
           <a:noFill/>
         </p:spPr>
         <p:txBody>
-          <a:bodyPr wrap="square">
+          <a:bodyPr wrap="square" lIns="45720" rIns="45720" tIns="64008" bIns="64008">
             <a:spAutoFit/>
           </a:bodyPr>
           <a:lstStyle/>
           <a:p>
             <a:pPr algn="l">
+              <a:lnSpc>
+                <a:spcPct val="125000"/>
+              </a:lnSpc>
               <a:defRPr sz="1800" b="1" i="0">
                 <a:solidFill>
                   <a:srgbClr val="E8805C"/>
@@ -5476,14 +5310,14 @@
       </p:sp>
       <p:sp>
         <p:nvSpPr>
-          <p:cNvPr id="8" name="TextBox 7"/>
+          <p:cNvPr id="7" name="TextBox 6"/>
           <p:cNvSpPr txBox="1"/>
           <p:nvPr/>
         </p:nvSpPr>
         <p:spPr>
           <a:xfrm>
-            <a:off x="923544" y="3751326"/>
-            <a:ext cx="1704340" cy="572516"/>
+            <a:off x="731520" y="6141973"/>
+            <a:ext cx="2758440" cy="350266"/>
           </a:xfrm>
           <a:prstGeom prst="rect">
             <a:avLst/>
@@ -5491,12 +5325,15 @@
           <a:noFill/>
         </p:spPr>
         <p:txBody>
-          <a:bodyPr wrap="square">
+          <a:bodyPr wrap="square" lIns="45720" rIns="45720" tIns="64008" bIns="64008">
             <a:spAutoFit/>
           </a:bodyPr>
           <a:lstStyle/>
           <a:p>
             <a:pPr algn="l">
+              <a:lnSpc>
+                <a:spcPct val="125000"/>
+              </a:lnSpc>
               <a:defRPr sz="1400" b="0" i="0">
                 <a:solidFill>
                   <a:srgbClr val="2C3E50"/>
@@ -5510,6 +5347,9 @@
           </a:p>
           <a:p>
             <a:pPr algn="l">
+              <a:lnSpc>
+                <a:spcPct val="125000"/>
+              </a:lnSpc>
               <a:defRPr sz="1400" b="0" i="0">
                 <a:solidFill>
                   <a:srgbClr val="2C3E50"/>
@@ -5525,59 +5365,14 @@
       </p:sp>
       <p:sp>
         <p:nvSpPr>
-          <p:cNvPr id="9" name="Rectangle 8"/>
-          <p:cNvSpPr/>
+          <p:cNvPr id="8" name="TextBox 7"/>
+          <p:cNvSpPr txBox="1"/>
           <p:nvPr/>
         </p:nvSpPr>
         <p:spPr>
           <a:xfrm>
-            <a:off x="2902203" y="3246120"/>
-            <a:ext cx="54864" cy="1077722"/>
-          </a:xfrm>
-          <a:prstGeom prst="rect">
-            <a:avLst/>
-          </a:prstGeom>
-          <a:solidFill>
-            <a:srgbClr val="3D8B8B"/>
-          </a:solidFill>
-          <a:ln w="12700">
-            <a:solidFill>
-              <a:srgbClr val="3D8B8B"/>
-            </a:solidFill>
-          </a:ln>
-        </p:spPr>
-        <p:style>
-          <a:lnRef idx="1">
-            <a:schemeClr val="accent1"/>
-          </a:lnRef>
-          <a:fillRef idx="3">
-            <a:schemeClr val="accent1"/>
-          </a:fillRef>
-          <a:effectRef idx="2">
-            <a:schemeClr val="accent1"/>
-          </a:effectRef>
-          <a:fontRef idx="minor">
-            <a:schemeClr val="lt1"/>
-          </a:fontRef>
-        </p:style>
-        <p:txBody>
-          <a:bodyPr rtlCol="0" anchor="ctr"/>
-          <a:lstStyle/>
-          <a:p>
-            <a:pPr algn="ctr"/>
-          </a:p>
-        </p:txBody>
-      </p:sp>
-      <p:sp>
-        <p:nvSpPr>
-          <p:cNvPr id="10" name="TextBox 9"/>
-          <p:cNvSpPr txBox="1"/>
-          <p:nvPr/>
-        </p:nvSpPr>
-        <p:spPr>
-          <a:xfrm>
-            <a:off x="3094227" y="3246120"/>
-            <a:ext cx="1678940" cy="413766"/>
+            <a:off x="3764279" y="5655055"/>
+            <a:ext cx="3241040" cy="413766"/>
           </a:xfrm>
           <a:prstGeom prst="rect">
             <a:avLst/>
@@ -5585,12 +5380,15 @@
           <a:noFill/>
         </p:spPr>
         <p:txBody>
-          <a:bodyPr wrap="square">
+          <a:bodyPr wrap="square" lIns="45720" rIns="45720" tIns="64008" bIns="64008">
             <a:spAutoFit/>
           </a:bodyPr>
           <a:lstStyle/>
           <a:p>
             <a:pPr algn="l">
+              <a:lnSpc>
+                <a:spcPct val="125000"/>
+              </a:lnSpc>
               <a:defRPr sz="1800" b="1" i="0">
                 <a:solidFill>
                   <a:srgbClr val="3D8B8B"/>
@@ -5606,14 +5404,14 @@
       </p:sp>
       <p:sp>
         <p:nvSpPr>
-          <p:cNvPr id="11" name="TextBox 10"/>
+          <p:cNvPr id="9" name="TextBox 8"/>
           <p:cNvSpPr txBox="1"/>
           <p:nvPr/>
         </p:nvSpPr>
         <p:spPr>
           <a:xfrm>
-            <a:off x="3094227" y="3751326"/>
-            <a:ext cx="1678940" cy="572516"/>
+            <a:off x="3764279" y="6141973"/>
+            <a:ext cx="3241040" cy="350266"/>
           </a:xfrm>
           <a:prstGeom prst="rect">
             <a:avLst/>
@@ -5621,12 +5419,15 @@
           <a:noFill/>
         </p:spPr>
         <p:txBody>
-          <a:bodyPr wrap="square">
+          <a:bodyPr wrap="square" lIns="45720" rIns="45720" tIns="64008" bIns="64008">
             <a:spAutoFit/>
           </a:bodyPr>
           <a:lstStyle/>
           <a:p>
             <a:pPr algn="l">
+              <a:lnSpc>
+                <a:spcPct val="125000"/>
+              </a:lnSpc>
               <a:defRPr sz="1400" b="0" i="0">
                 <a:solidFill>
                   <a:srgbClr val="2C3E50"/>
@@ -5640,6 +5441,9 @@
           </a:p>
           <a:p>
             <a:pPr algn="l">
+              <a:lnSpc>
+                <a:spcPct val="125000"/>
+              </a:lnSpc>
               <a:defRPr sz="1400" b="0" i="0">
                 <a:solidFill>
                   <a:srgbClr val="2C3E50"/>
@@ -5777,114 +5581,33 @@
                       </p:childTnLst>
                     </p:cTn>
                   </p:par>
-                  <p:par>
-                    <p:cTn id="12" fill="hold">
-                      <p:stCondLst>
-                        <p:cond delay="0"/>
-                      </p:stCondLst>
-                      <p:childTnLst>
-                        <p:set>
-                          <p:cBhvr>
-                            <p:cTn id="13" dur="1" fill="hold">
-                              <p:stCondLst>
-                                <p:cond delay="0"/>
-                              </p:stCondLst>
-                            </p:cTn>
-                            <p:tgtEl>
-                              <p:spTgt spid="6"/>
-                            </p:tgtEl>
-                            <p:attrNameLst>
-                              <p:attrName>style.visibility</p:attrName>
-                            </p:attrNameLst>
-                          </p:cBhvr>
-                          <p:to>
-                            <p:strVal val="hidden"/>
-                          </p:to>
-                        </p:set>
-                      </p:childTnLst>
-                    </p:cTn>
-                  </p:par>
-                  <p:par>
-                    <p:cTn id="14" fill="hold">
-                      <p:stCondLst>
-                        <p:cond delay="0"/>
-                      </p:stCondLst>
-                      <p:childTnLst>
-                        <p:set>
-                          <p:cBhvr>
-                            <p:cTn id="15" dur="1" fill="hold">
-                              <p:stCondLst>
-                                <p:cond delay="0"/>
-                              </p:stCondLst>
-                            </p:cTn>
-                            <p:tgtEl>
-                              <p:spTgt spid="10"/>
-                            </p:tgtEl>
-                            <p:attrNameLst>
-                              <p:attrName>style.visibility</p:attrName>
-                            </p:attrNameLst>
-                          </p:cBhvr>
-                          <p:to>
-                            <p:strVal val="hidden"/>
-                          </p:to>
-                        </p:set>
-                      </p:childTnLst>
-                    </p:cTn>
-                  </p:par>
-                  <p:par>
-                    <p:cTn id="16" fill="hold">
-                      <p:stCondLst>
-                        <p:cond delay="0"/>
-                      </p:stCondLst>
-                      <p:childTnLst>
-                        <p:set>
-                          <p:cBhvr>
-                            <p:cTn id="17" dur="1" fill="hold">
-                              <p:stCondLst>
-                                <p:cond delay="0"/>
-                              </p:stCondLst>
-                            </p:cTn>
-                            <p:tgtEl>
-                              <p:spTgt spid="11"/>
-                            </p:tgtEl>
-                            <p:attrNameLst>
-                              <p:attrName>style.visibility</p:attrName>
-                            </p:attrNameLst>
-                          </p:cBhvr>
-                          <p:to>
-                            <p:strVal val="hidden"/>
-                          </p:to>
-                        </p:set>
-                      </p:childTnLst>
-                    </p:cTn>
-                  </p:par>
                 </p:childTnLst>
               </p:cTn>
             </p:par>
             <p:seq concurrent="1" nextAc="seek">
-              <p:cTn id="18" dur="indefinite" nodeType="mainSeq">
+              <p:cTn id="12" dur="indefinite" nodeType="mainSeq">
                 <p:childTnLst>
                   <p:par>
-                    <p:cTn id="19" fill="hold">
+                    <p:cTn id="13" fill="hold">
                       <p:stCondLst>
                         <p:cond delay="indefinite"/>
                       </p:stCondLst>
                       <p:childTnLst>
                         <p:par>
-                          <p:cTn id="20" fill="hold">
+                          <p:cTn id="14" fill="hold">
                             <p:stCondLst>
                               <p:cond delay="0"/>
                             </p:stCondLst>
                             <p:childTnLst>
                               <p:par>
-                                <p:cTn id="21" presetID="10" presetClass="entr" presetSubtype="0" fill="hold" grpId="0" nodeType="clickEffect">
+                                <p:cTn id="15" presetID="10" presetClass="entr" presetSubtype="0" fill="hold" grpId="0" nodeType="clickEffect">
                                   <p:stCondLst>
                                     <p:cond delay="0"/>
                                   </p:stCondLst>
                                   <p:childTnLst>
                                     <p:animEffect transition="in" filter="fade">
                                       <p:cBhvr>
-                                        <p:cTn id="22" dur="500"/>
+                                        <p:cTn id="16" dur="500"/>
                                         <p:tgtEl>
                                           <p:spTgt spid="4"/>
                                         </p:tgtEl>
@@ -5892,7 +5615,7 @@
                                     </p:animEffect>
                                     <p:set>
                                       <p:cBhvr>
-                                        <p:cTn id="23" dur="1" fill="hold">
+                                        <p:cTn id="17" dur="1" fill="hold">
                                           <p:stCondLst>
                                             <p:cond delay="0"/>
                                           </p:stCondLst>
@@ -5912,14 +5635,14 @@
                                 </p:cTn>
                               </p:par>
                               <p:par>
-                                <p:cTn id="24" presetID="10" presetClass="entr" presetSubtype="0" fill="hold" grpId="0" nodeType="withEffect">
+                                <p:cTn id="18" presetID="10" presetClass="entr" presetSubtype="0" fill="hold" grpId="0" nodeType="withEffect">
                                   <p:stCondLst>
                                     <p:cond delay="0"/>
                                   </p:stCondLst>
                                   <p:childTnLst>
                                     <p:animEffect transition="in" filter="fade">
                                       <p:cBhvr>
-                                        <p:cTn id="25" dur="500"/>
+                                        <p:cTn id="19" dur="500"/>
                                         <p:tgtEl>
                                           <p:spTgt spid="5"/>
                                         </p:tgtEl>
@@ -5927,7 +5650,7 @@
                                     </p:animEffect>
                                     <p:set>
                                       <p:cBhvr>
-                                        <p:cTn id="26" dur="1" fill="hold">
+                                        <p:cTn id="20" dur="1" fill="hold">
                                           <p:stCondLst>
                                             <p:cond delay="0"/>
                                           </p:stCondLst>
@@ -5953,28 +5676,98 @@
                     </p:cTn>
                   </p:par>
                   <p:par>
-                    <p:cTn id="27" fill="hold">
+                    <p:cTn id="21" fill="hold">
                       <p:stCondLst>
                         <p:cond delay="indefinite"/>
                       </p:stCondLst>
                       <p:childTnLst>
                         <p:par>
-                          <p:cTn id="28" fill="hold">
+                          <p:cTn id="22" fill="hold">
                             <p:stCondLst>
                               <p:cond delay="0"/>
                             </p:stCondLst>
                             <p:childTnLst>
                               <p:par>
-                                <p:cTn id="29" presetID="10" presetClass="entr" presetSubtype="0" fill="hold" grpId="0" nodeType="clickEffect">
+                                <p:cTn id="23" presetID="10" presetClass="entr" presetSubtype="0" fill="hold" grpId="0" nodeType="clickEffect">
                                   <p:stCondLst>
                                     <p:cond delay="0"/>
                                   </p:stCondLst>
                                   <p:childTnLst>
                                     <p:animEffect transition="in" filter="fade">
                                       <p:cBhvr>
+                                        <p:cTn id="24" dur="500"/>
+                                        <p:tgtEl>
+                                          <p:spTgt spid="6"/>
+                                        </p:tgtEl>
+                                      </p:cBhvr>
+                                    </p:animEffect>
+                                    <p:set>
+                                      <p:cBhvr>
+                                        <p:cTn id="25" dur="1" fill="hold">
+                                          <p:stCondLst>
+                                            <p:cond delay="0"/>
+                                          </p:stCondLst>
+                                        </p:cTn>
+                                        <p:tgtEl>
+                                          <p:spTgt spid="6"/>
+                                        </p:tgtEl>
+                                        <p:attrNameLst>
+                                          <p:attrName>style.visibility</p:attrName>
+                                        </p:attrNameLst>
+                                      </p:cBhvr>
+                                      <p:to>
+                                        <p:strVal val="visible"/>
+                                      </p:to>
+                                    </p:set>
+                                  </p:childTnLst>
+                                </p:cTn>
+                              </p:par>
+                              <p:par>
+                                <p:cTn id="26" presetID="10" presetClass="entr" presetSubtype="0" fill="hold" grpId="0" nodeType="withEffect">
+                                  <p:stCondLst>
+                                    <p:cond delay="0"/>
+                                  </p:stCondLst>
+                                  <p:childTnLst>
+                                    <p:animEffect transition="in" filter="fade">
+                                      <p:cBhvr>
+                                        <p:cTn id="27" dur="500"/>
+                                        <p:tgtEl>
+                                          <p:spTgt spid="7"/>
+                                        </p:tgtEl>
+                                      </p:cBhvr>
+                                    </p:animEffect>
+                                    <p:set>
+                                      <p:cBhvr>
+                                        <p:cTn id="28" dur="1" fill="hold">
+                                          <p:stCondLst>
+                                            <p:cond delay="0"/>
+                                          </p:stCondLst>
+                                        </p:cTn>
+                                        <p:tgtEl>
+                                          <p:spTgt spid="7"/>
+                                        </p:tgtEl>
+                                        <p:attrNameLst>
+                                          <p:attrName>style.visibility</p:attrName>
+                                        </p:attrNameLst>
+                                      </p:cBhvr>
+                                      <p:to>
+                                        <p:strVal val="visible"/>
+                                      </p:to>
+                                    </p:set>
+                                  </p:childTnLst>
+                                </p:cTn>
+                              </p:par>
+                              <p:par>
+                                <p:cTn id="29" presetID="10" presetClass="entr" presetSubtype="0" fill="hold" grpId="0" nodeType="withEffect">
+                                  <p:stCondLst>
+                                    <p:cond delay="0"/>
+                                  </p:stCondLst>
+                                  <p:childTnLst>
+                                    <p:animEffect transition="in" filter="fade">
+                                      <p:cBhvr>
                                         <p:cTn id="30" dur="500"/>
                                         <p:tgtEl>
-                                          <p:spTgt spid="6"/>
+                                          <p:spTgt spid="8"/>
                                         </p:tgtEl>
                                       </p:cBhvr>
                                     </p:animEffect>
@@ -5986,7 +5779,7 @@
                                           </p:stCondLst>
                                         </p:cTn>
                                         <p:tgtEl>
-                                          <p:spTgt spid="6"/>
+                                          <p:spTgt spid="8"/>
                                         </p:tgtEl>
                                         <p:attrNameLst>
                                           <p:attrName>style.visibility</p:attrName>
@@ -6009,7 +5802,7 @@
                                       <p:cBhvr>
                                         <p:cTn id="33" dur="500"/>
                                         <p:tgtEl>
-                                          <p:spTgt spid="7"/>
+                                          <p:spTgt spid="9"/>
                                         </p:tgtEl>
                                       </p:cBhvr>
                                     </p:animEffect>
@@ -6021,182 +5814,7 @@
                                           </p:stCondLst>
                                         </p:cTn>
                                         <p:tgtEl>
-                                          <p:spTgt spid="7"/>
-                                        </p:tgtEl>
-                                        <p:attrNameLst>
-                                          <p:attrName>style.visibility</p:attrName>
-                                        </p:attrNameLst>
-                                      </p:cBhvr>
-                                      <p:to>
-                                        <p:strVal val="visible"/>
-                                      </p:to>
-                                    </p:set>
-                                  </p:childTnLst>
-                                </p:cTn>
-                              </p:par>
-                              <p:par>
-                                <p:cTn id="35" presetID="10" presetClass="entr" presetSubtype="0" fill="hold" grpId="0" nodeType="withEffect">
-                                  <p:stCondLst>
-                                    <p:cond delay="0"/>
-                                  </p:stCondLst>
-                                  <p:childTnLst>
-                                    <p:animEffect transition="in" filter="fade">
-                                      <p:cBhvr>
-                                        <p:cTn id="36" dur="500"/>
-                                        <p:tgtEl>
-                                          <p:spTgt spid="8"/>
-                                        </p:tgtEl>
-                                      </p:cBhvr>
-                                    </p:animEffect>
-                                    <p:set>
-                                      <p:cBhvr>
-                                        <p:cTn id="37" dur="1" fill="hold">
-                                          <p:stCondLst>
-                                            <p:cond delay="0"/>
-                                          </p:stCondLst>
-                                        </p:cTn>
-                                        <p:tgtEl>
-                                          <p:spTgt spid="8"/>
-                                        </p:tgtEl>
-                                        <p:attrNameLst>
-                                          <p:attrName>style.visibility</p:attrName>
-                                        </p:attrNameLst>
-                                      </p:cBhvr>
-                                      <p:to>
-                                        <p:strVal val="visible"/>
-                                      </p:to>
-                                    </p:set>
-                                  </p:childTnLst>
-                                </p:cTn>
-                              </p:par>
-                              <p:par>
-                                <p:cTn id="38" presetID="10" presetClass="entr" presetSubtype="0" fill="hold" grpId="0" nodeType="withEffect">
-                                  <p:stCondLst>
-                                    <p:cond delay="0"/>
-                                  </p:stCondLst>
-                                  <p:childTnLst>
-                                    <p:animEffect transition="in" filter="fade">
-                                      <p:cBhvr>
-                                        <p:cTn id="39" dur="500"/>
-                                        <p:tgtEl>
                                           <p:spTgt spid="9"/>
-                                        </p:tgtEl>
-                                      </p:cBhvr>
-                                    </p:animEffect>
-                                    <p:set>
-                                      <p:cBhvr>
-                                        <p:cTn id="40" dur="1" fill="hold">
-                                          <p:stCondLst>
-                                            <p:cond delay="0"/>
-                                          </p:stCondLst>
-                                        </p:cTn>
-                                        <p:tgtEl>
-                                          <p:spTgt spid="9"/>
-                                        </p:tgtEl>
-                                        <p:attrNameLst>
-                                          <p:attrName>style.visibility</p:attrName>
-                                        </p:attrNameLst>
-                                      </p:cBhvr>
-                                      <p:to>
-                                        <p:strVal val="visible"/>
-                                      </p:to>
-                                    </p:set>
-                                  </p:childTnLst>
-                                </p:cTn>
-                              </p:par>
-                              <p:par>
-                                <p:cTn id="41" presetID="10" presetClass="entr" presetSubtype="0" fill="hold" grpId="0" nodeType="withEffect">
-                                  <p:stCondLst>
-                                    <p:cond delay="0"/>
-                                  </p:stCondLst>
-                                  <p:childTnLst>
-                                    <p:animEffect transition="in" filter="fade">
-                                      <p:cBhvr>
-                                        <p:cTn id="42" dur="500"/>
-                                        <p:tgtEl>
-                                          <p:spTgt spid="6"/>
-                                        </p:tgtEl>
-                                      </p:cBhvr>
-                                    </p:animEffect>
-                                    <p:set>
-                                      <p:cBhvr>
-                                        <p:cTn id="43" dur="1" fill="hold">
-                                          <p:stCondLst>
-                                            <p:cond delay="0"/>
-                                          </p:stCondLst>
-                                        </p:cTn>
-                                        <p:tgtEl>
-                                          <p:spTgt spid="6"/>
-                                        </p:tgtEl>
-                                        <p:attrNameLst>
-                                          <p:attrName>style.visibility</p:attrName>
-                                        </p:attrNameLst>
-                                      </p:cBhvr>
-                                      <p:to>
-                                        <p:strVal val="visible"/>
-                                      </p:to>
-                                    </p:set>
-                                  </p:childTnLst>
-                                </p:cTn>
-                              </p:par>
-                              <p:par>
-                                <p:cTn id="44" presetID="10" presetClass="entr" presetSubtype="0" fill="hold" grpId="0" nodeType="withEffect">
-                                  <p:stCondLst>
-                                    <p:cond delay="0"/>
-                                  </p:stCondLst>
-                                  <p:childTnLst>
-                                    <p:animEffect transition="in" filter="fade">
-                                      <p:cBhvr>
-                                        <p:cTn id="45" dur="500"/>
-                                        <p:tgtEl>
-                                          <p:spTgt spid="10"/>
-                                        </p:tgtEl>
-                                      </p:cBhvr>
-                                    </p:animEffect>
-                                    <p:set>
-                                      <p:cBhvr>
-                                        <p:cTn id="46" dur="1" fill="hold">
-                                          <p:stCondLst>
-                                            <p:cond delay="0"/>
-                                          </p:stCondLst>
-                                        </p:cTn>
-                                        <p:tgtEl>
-                                          <p:spTgt spid="10"/>
-                                        </p:tgtEl>
-                                        <p:attrNameLst>
-                                          <p:attrName>style.visibility</p:attrName>
-                                        </p:attrNameLst>
-                                      </p:cBhvr>
-                                      <p:to>
-                                        <p:strVal val="visible"/>
-                                      </p:to>
-                                    </p:set>
-                                  </p:childTnLst>
-                                </p:cTn>
-                              </p:par>
-                              <p:par>
-                                <p:cTn id="47" presetID="10" presetClass="entr" presetSubtype="0" fill="hold" grpId="0" nodeType="withEffect">
-                                  <p:stCondLst>
-                                    <p:cond delay="0"/>
-                                  </p:stCondLst>
-                                  <p:childTnLst>
-                                    <p:animEffect transition="in" filter="fade">
-                                      <p:cBhvr>
-                                        <p:cTn id="48" dur="500"/>
-                                        <p:tgtEl>
-                                          <p:spTgt spid="11"/>
-                                        </p:tgtEl>
-                                      </p:cBhvr>
-                                    </p:animEffect>
-                                    <p:set>
-                                      <p:cBhvr>
-                                        <p:cTn id="49" dur="1" fill="hold">
-                                          <p:stCondLst>
-                                            <p:cond delay="0"/>
-                                          </p:stCondLst>
-                                        </p:cTn>
-                                        <p:tgtEl>
-                                          <p:spTgt spid="11"/>
                                         </p:tgtEl>
                                         <p:attrNameLst>
                                           <p:attrName>style.visibility</p:attrName>
@@ -6383,7 +6001,7 @@
         <p:spPr>
           <a:xfrm>
             <a:off x="969264" y="1371600"/>
-            <a:ext cx="408939" cy="350266"/>
+            <a:ext cx="980440" cy="350266"/>
           </a:xfrm>
           <a:prstGeom prst="rect">
             <a:avLst/>
@@ -6391,12 +6009,15 @@
           <a:noFill/>
         </p:spPr>
         <p:txBody>
-          <a:bodyPr wrap="square">
+          <a:bodyPr wrap="square" lIns="45720" rIns="45720" tIns="64008" bIns="64008">
             <a:spAutoFit/>
           </a:bodyPr>
           <a:lstStyle/>
           <a:p>
             <a:pPr algn="l">
+              <a:lnSpc>
+                <a:spcPct val="125000"/>
+              </a:lnSpc>
               <a:defRPr sz="1400" b="1" i="0">
                 <a:solidFill>
                   <a:srgbClr val="2C3E50"/>
@@ -6419,7 +6040,7 @@
         <p:spPr>
           <a:xfrm>
             <a:off x="731520" y="1859025"/>
-            <a:ext cx="646683" cy="1538478"/>
+            <a:ext cx="1218184" cy="2395728"/>
           </a:xfrm>
           <a:prstGeom prst="rect">
             <a:avLst/>
@@ -6427,12 +6048,15 @@
           <a:noFill/>
         </p:spPr>
         <p:txBody>
-          <a:bodyPr wrap="square">
+          <a:bodyPr wrap="square" tIns="54864" bIns="54864">
             <a:spAutoFit/>
           </a:bodyPr>
           <a:lstStyle/>
           <a:p>
             <a:pPr>
+              <a:lnSpc>
+                <a:spcPct val="125000"/>
+              </a:lnSpc>
               <a:defRPr sz="1800">
                 <a:solidFill>
                   <a:srgbClr val="2C3E50"/>
@@ -6447,6 +6071,9 @@
           </a:p>
           <a:p>
             <a:pPr>
+              <a:lnSpc>
+                <a:spcPct val="125000"/>
+              </a:lnSpc>
               <a:defRPr sz="1800">
                 <a:solidFill>
                   <a:srgbClr val="2C3E50"/>
@@ -6461,6 +6088,9 @@
           </a:p>
           <a:p>
             <a:pPr>
+              <a:lnSpc>
+                <a:spcPct val="125000"/>
+              </a:lnSpc>
               <a:defRPr sz="1800">
                 <a:solidFill>
                   <a:srgbClr val="2C3E50"/>
@@ -6483,7 +6113,7 @@
         </p:nvSpPr>
         <p:spPr>
           <a:xfrm>
-            <a:off x="1835404" y="1371600"/>
+            <a:off x="2406904" y="1371600"/>
             <a:ext cx="164592" cy="164592"/>
           </a:xfrm>
           <a:prstGeom prst="roundRect">
@@ -6528,8 +6158,8 @@
         </p:nvSpPr>
         <p:spPr>
           <a:xfrm>
-            <a:off x="2073148" y="1371600"/>
-            <a:ext cx="345440" cy="350266"/>
+            <a:off x="2644648" y="1371600"/>
+            <a:ext cx="802640" cy="350266"/>
           </a:xfrm>
           <a:prstGeom prst="rect">
             <a:avLst/>
@@ -6537,12 +6167,15 @@
           <a:noFill/>
         </p:spPr>
         <p:txBody>
-          <a:bodyPr wrap="square">
+          <a:bodyPr wrap="square" lIns="45720" rIns="45720" tIns="64008" bIns="64008">
             <a:spAutoFit/>
           </a:bodyPr>
           <a:lstStyle/>
           <a:p>
             <a:pPr algn="l">
+              <a:lnSpc>
+                <a:spcPct val="125000"/>
+              </a:lnSpc>
               <a:defRPr sz="1400" b="1" i="0">
                 <a:solidFill>
                   <a:srgbClr val="2C3E50"/>
@@ -6564,8 +6197,8 @@
         </p:nvSpPr>
         <p:spPr>
           <a:xfrm>
-            <a:off x="1835404" y="1859025"/>
-            <a:ext cx="583183" cy="1824228"/>
+            <a:off x="2406904" y="1859025"/>
+            <a:ext cx="1040384" cy="2967228"/>
           </a:xfrm>
           <a:prstGeom prst="rect">
             <a:avLst/>
@@ -6573,12 +6206,15 @@
           <a:noFill/>
         </p:spPr>
         <p:txBody>
-          <a:bodyPr wrap="square">
+          <a:bodyPr wrap="square" tIns="54864" bIns="54864">
             <a:spAutoFit/>
           </a:bodyPr>
           <a:lstStyle/>
           <a:p>
             <a:pPr>
+              <a:lnSpc>
+                <a:spcPct val="125000"/>
+              </a:lnSpc>
               <a:defRPr sz="1800">
                 <a:solidFill>
                   <a:srgbClr val="2C3E50"/>
@@ -6593,6 +6229,9 @@
           </a:p>
           <a:p>
             <a:pPr>
+              <a:lnSpc>
+                <a:spcPct val="125000"/>
+              </a:lnSpc>
               <a:defRPr sz="1800">
                 <a:solidFill>
                   <a:srgbClr val="2C3E50"/>
@@ -6607,6 +6246,9 @@
           </a:p>
           <a:p>
             <a:pPr>
+              <a:lnSpc>
+                <a:spcPct val="125000"/>
+              </a:lnSpc>
               <a:defRPr sz="1800">
                 <a:solidFill>
                   <a:srgbClr val="2C3E50"/>
@@ -7086,7 +6728,7 @@
       </p:sp>
       <p:pic>
         <p:nvPicPr>
-          <p:cNvPr id="4" name="Picture 3" descr="tmpevnx71ep.png"/>
+          <p:cNvPr id="4" name="Picture 3" descr="tmp4v4uti78.png"/>
           <p:cNvPicPr>
             <a:picLocks noChangeAspect="1"/>
           </p:cNvPicPr>
@@ -7117,7 +6759,7 @@
         <p:spPr>
           <a:xfrm>
             <a:off x="731520" y="2697480"/>
-            <a:ext cx="1188720" cy="445516"/>
+            <a:ext cx="1513840" cy="445516"/>
           </a:xfrm>
           <a:prstGeom prst="rect">
             <a:avLst/>
@@ -7125,12 +6767,15 @@
           <a:noFill/>
         </p:spPr>
         <p:txBody>
-          <a:bodyPr wrap="square">
+          <a:bodyPr wrap="square" lIns="45720" rIns="45720" tIns="64008" bIns="64008">
             <a:spAutoFit/>
           </a:bodyPr>
           <a:lstStyle/>
           <a:p>
             <a:pPr algn="l">
+              <a:lnSpc>
+                <a:spcPct val="125000"/>
+              </a:lnSpc>
               <a:defRPr sz="2000" b="1" i="0">
                 <a:solidFill>
                   <a:srgbClr val="2C3E50"/>
@@ -7153,7 +6798,7 @@
         <p:spPr>
           <a:xfrm>
             <a:off x="731520" y="3280156"/>
-            <a:ext cx="1188720" cy="572516"/>
+            <a:ext cx="1513840" cy="572516"/>
           </a:xfrm>
           <a:prstGeom prst="rect">
             <a:avLst/>
@@ -7161,12 +6806,15 @@
           <a:noFill/>
         </p:spPr>
         <p:txBody>
-          <a:bodyPr wrap="square">
+          <a:bodyPr wrap="square" lIns="45720" rIns="45720" tIns="64008" bIns="64008">
             <a:spAutoFit/>
           </a:bodyPr>
           <a:lstStyle/>
           <a:p>
             <a:pPr algn="l">
+              <a:lnSpc>
+                <a:spcPct val="125000"/>
+              </a:lnSpc>
               <a:defRPr sz="1400" b="0" i="0">
                 <a:solidFill>
                   <a:srgbClr val="7B8FA3"/>
@@ -7180,6 +6828,9 @@
           </a:p>
           <a:p>
             <a:pPr algn="l">
+              <a:lnSpc>
+                <a:spcPct val="125000"/>
+              </a:lnSpc>
               <a:defRPr sz="1400" b="0" i="0">
                 <a:solidFill>
                   <a:srgbClr val="7B8FA3"/>
@@ -7195,7 +6846,7 @@
       </p:sp>
       <p:pic>
         <p:nvPicPr>
-          <p:cNvPr id="7" name="Picture 6" descr="tmpeli9cgwv.png"/>
+          <p:cNvPr id="7" name="Picture 6" descr="tmppz78ysva.png"/>
           <p:cNvPicPr>
             <a:picLocks noChangeAspect="1"/>
           </p:cNvPicPr>
@@ -7209,7 +6860,7 @@
         </p:blipFill>
         <p:spPr>
           <a:xfrm>
-            <a:off x="2651760" y="1371600"/>
+            <a:off x="2976880" y="1371600"/>
             <a:ext cx="1188720" cy="1188720"/>
           </a:xfrm>
           <a:prstGeom prst="rect">
@@ -7225,8 +6876,8 @@
         </p:nvSpPr>
         <p:spPr>
           <a:xfrm>
-            <a:off x="2651760" y="2697480"/>
-            <a:ext cx="1188720" cy="445516"/>
+            <a:off x="2976880" y="2697480"/>
+            <a:ext cx="1526540" cy="445516"/>
           </a:xfrm>
           <a:prstGeom prst="rect">
             <a:avLst/>
@@ -7234,12 +6885,15 @@
           <a:noFill/>
         </p:spPr>
         <p:txBody>
-          <a:bodyPr wrap="square">
+          <a:bodyPr wrap="square" lIns="45720" rIns="45720" tIns="64008" bIns="64008">
             <a:spAutoFit/>
           </a:bodyPr>
           <a:lstStyle/>
           <a:p>
             <a:pPr algn="l">
+              <a:lnSpc>
+                <a:spcPct val="125000"/>
+              </a:lnSpc>
               <a:defRPr sz="2000" b="1" i="0">
                 <a:solidFill>
                   <a:srgbClr val="2C3E50"/>
@@ -7261,8 +6915,8 @@
         </p:nvSpPr>
         <p:spPr>
           <a:xfrm>
-            <a:off x="2651760" y="3280156"/>
-            <a:ext cx="1188720" cy="572516"/>
+            <a:off x="2976880" y="3280156"/>
+            <a:ext cx="1526540" cy="572516"/>
           </a:xfrm>
           <a:prstGeom prst="rect">
             <a:avLst/>
@@ -7270,12 +6924,15 @@
           <a:noFill/>
         </p:spPr>
         <p:txBody>
-          <a:bodyPr wrap="square">
+          <a:bodyPr wrap="square" lIns="45720" rIns="45720" tIns="64008" bIns="64008">
             <a:spAutoFit/>
           </a:bodyPr>
           <a:lstStyle/>
           <a:p>
             <a:pPr algn="l">
+              <a:lnSpc>
+                <a:spcPct val="125000"/>
+              </a:lnSpc>
               <a:defRPr sz="1400" b="0" i="0">
                 <a:solidFill>
                   <a:srgbClr val="7B8FA3"/>
@@ -7289,6 +6946,9 @@
           </a:p>
           <a:p>
             <a:pPr algn="l">
+              <a:lnSpc>
+                <a:spcPct val="125000"/>
+              </a:lnSpc>
               <a:defRPr sz="1400" b="0" i="0">
                 <a:solidFill>
                   <a:srgbClr val="7B8FA3"/>
@@ -7304,59 +6964,14 @@
       </p:sp>
       <p:sp>
         <p:nvSpPr>
-          <p:cNvPr id="10" name="Rectangle 9"/>
-          <p:cNvSpPr/>
+          <p:cNvPr id="10" name="TextBox 9"/>
+          <p:cNvSpPr txBox="1"/>
           <p:nvPr/>
         </p:nvSpPr>
         <p:spPr>
           <a:xfrm>
             <a:off x="731520" y="4126991"/>
-            <a:ext cx="54864" cy="1077722"/>
-          </a:xfrm>
-          <a:prstGeom prst="rect">
-            <a:avLst/>
-          </a:prstGeom>
-          <a:solidFill>
-            <a:srgbClr val="E8805C"/>
-          </a:solidFill>
-          <a:ln w="12700">
-            <a:solidFill>
-              <a:srgbClr val="E8805C"/>
-            </a:solidFill>
-          </a:ln>
-        </p:spPr>
-        <p:style>
-          <a:lnRef idx="1">
-            <a:schemeClr val="accent1"/>
-          </a:lnRef>
-          <a:fillRef idx="3">
-            <a:schemeClr val="accent1"/>
-          </a:fillRef>
-          <a:effectRef idx="2">
-            <a:schemeClr val="accent1"/>
-          </a:effectRef>
-          <a:fontRef idx="minor">
-            <a:schemeClr val="lt1"/>
-          </a:fontRef>
-        </p:style>
-        <p:txBody>
-          <a:bodyPr rtlCol="0" anchor="ctr"/>
-          <a:lstStyle/>
-          <a:p>
-            <a:pPr algn="ctr"/>
-          </a:p>
-        </p:txBody>
-      </p:sp>
-      <p:sp>
-        <p:nvSpPr>
-          <p:cNvPr id="11" name="TextBox 10"/>
-          <p:cNvSpPr txBox="1"/>
-          <p:nvPr/>
-        </p:nvSpPr>
-        <p:spPr>
-          <a:xfrm>
-            <a:off x="923544" y="4126991"/>
-            <a:ext cx="10536631" cy="413766"/>
+            <a:ext cx="10728655" cy="413766"/>
           </a:xfrm>
           <a:prstGeom prst="rect">
             <a:avLst/>
@@ -7364,12 +6979,15 @@
           <a:noFill/>
         </p:spPr>
         <p:txBody>
-          <a:bodyPr wrap="square">
+          <a:bodyPr wrap="square" lIns="45720" rIns="45720" tIns="64008" bIns="64008">
             <a:spAutoFit/>
           </a:bodyPr>
           <a:lstStyle/>
           <a:p>
             <a:pPr algn="l">
+              <a:lnSpc>
+                <a:spcPct val="125000"/>
+              </a:lnSpc>
               <a:defRPr sz="1800" b="1" i="0">
                 <a:solidFill>
                   <a:srgbClr val="E8805C"/>
@@ -7385,14 +7003,14 @@
       </p:sp>
       <p:sp>
         <p:nvSpPr>
-          <p:cNvPr id="12" name="TextBox 11"/>
+          <p:cNvPr id="11" name="TextBox 10"/>
           <p:cNvSpPr txBox="1"/>
           <p:nvPr/>
         </p:nvSpPr>
         <p:spPr>
           <a:xfrm>
-            <a:off x="923544" y="4632198"/>
-            <a:ext cx="10536631" cy="572516"/>
+            <a:off x="731520" y="4613909"/>
+            <a:ext cx="10728655" cy="572516"/>
           </a:xfrm>
           <a:prstGeom prst="rect">
             <a:avLst/>
@@ -7400,12 +7018,15 @@
           <a:noFill/>
         </p:spPr>
         <p:txBody>
-          <a:bodyPr wrap="square">
+          <a:bodyPr wrap="square" lIns="45720" rIns="45720" tIns="64008" bIns="64008">
             <a:spAutoFit/>
           </a:bodyPr>
           <a:lstStyle/>
           <a:p>
             <a:pPr algn="l">
+              <a:lnSpc>
+                <a:spcPct val="125000"/>
+              </a:lnSpc>
               <a:defRPr sz="1400" b="0" i="0">
                 <a:solidFill>
                   <a:srgbClr val="2C3E50"/>
@@ -7419,6 +7040,9 @@
           </a:p>
           <a:p>
             <a:pPr algn="l">
+              <a:lnSpc>
+                <a:spcPct val="125000"/>
+              </a:lnSpc>
               <a:defRPr sz="1400" b="0" i="0">
                 <a:solidFill>
                   <a:srgbClr val="2C3E50"/>
@@ -7502,60 +7126,33 @@
                       </p:childTnLst>
                     </p:cTn>
                   </p:par>
-                  <p:par>
-                    <p:cTn id="8" fill="hold">
-                      <p:stCondLst>
-                        <p:cond delay="0"/>
-                      </p:stCondLst>
-                      <p:childTnLst>
-                        <p:set>
-                          <p:cBhvr>
-                            <p:cTn id="9" dur="1" fill="hold">
-                              <p:stCondLst>
-                                <p:cond delay="0"/>
-                              </p:stCondLst>
-                            </p:cTn>
-                            <p:tgtEl>
-                              <p:spTgt spid="12"/>
-                            </p:tgtEl>
-                            <p:attrNameLst>
-                              <p:attrName>style.visibility</p:attrName>
-                            </p:attrNameLst>
-                          </p:cBhvr>
-                          <p:to>
-                            <p:strVal val="hidden"/>
-                          </p:to>
-                        </p:set>
-                      </p:childTnLst>
-                    </p:cTn>
-                  </p:par>
                 </p:childTnLst>
               </p:cTn>
             </p:par>
             <p:seq concurrent="1" nextAc="seek">
-              <p:cTn id="10" dur="indefinite" nodeType="mainSeq">
+              <p:cTn id="8" dur="indefinite" nodeType="mainSeq">
                 <p:childTnLst>
                   <p:par>
-                    <p:cTn id="11" fill="hold">
+                    <p:cTn id="9" fill="hold">
                       <p:stCondLst>
                         <p:cond delay="indefinite"/>
                       </p:stCondLst>
                       <p:childTnLst>
                         <p:par>
-                          <p:cTn id="12" fill="hold">
+                          <p:cTn id="10" fill="hold">
                             <p:stCondLst>
                               <p:cond delay="0"/>
                             </p:stCondLst>
                             <p:childTnLst>
                               <p:par>
-                                <p:cTn id="13" presetID="10" presetClass="entr" presetSubtype="0" fill="hold" grpId="0" nodeType="clickEffect">
+                                <p:cTn id="11" presetID="10" presetClass="entr" presetSubtype="0" fill="hold" grpId="0" nodeType="clickEffect">
                                   <p:stCondLst>
                                     <p:cond delay="0"/>
                                   </p:stCondLst>
                                   <p:childTnLst>
                                     <p:animEffect transition="in" filter="fade">
                                       <p:cBhvr>
-                                        <p:cTn id="14" dur="500"/>
+                                        <p:cTn id="12" dur="500"/>
                                         <p:tgtEl>
                                           <p:spTgt spid="4"/>
                                         </p:tgtEl>
@@ -7563,7 +7160,7 @@
                                     </p:animEffect>
                                     <p:set>
                                       <p:cBhvr>
-                                        <p:cTn id="15" dur="1" fill="hold">
+                                        <p:cTn id="13" dur="1" fill="hold">
                                           <p:stCondLst>
                                             <p:cond delay="0"/>
                                           </p:stCondLst>
@@ -7583,14 +7180,14 @@
                                 </p:cTn>
                               </p:par>
                               <p:par>
-                                <p:cTn id="16" presetID="10" presetClass="entr" presetSubtype="0" fill="hold" grpId="0" nodeType="withEffect">
+                                <p:cTn id="14" presetID="10" presetClass="entr" presetSubtype="0" fill="hold" grpId="0" nodeType="withEffect">
                                   <p:stCondLst>
                                     <p:cond delay="0"/>
                                   </p:stCondLst>
                                   <p:childTnLst>
                                     <p:animEffect transition="in" filter="fade">
                                       <p:cBhvr>
-                                        <p:cTn id="17" dur="500"/>
+                                        <p:cTn id="15" dur="500"/>
                                         <p:tgtEl>
                                           <p:spTgt spid="5"/>
                                         </p:tgtEl>
@@ -7598,7 +7195,7 @@
                                     </p:animEffect>
                                     <p:set>
                                       <p:cBhvr>
-                                        <p:cTn id="18" dur="1" fill="hold">
+                                        <p:cTn id="16" dur="1" fill="hold">
                                           <p:stCondLst>
                                             <p:cond delay="0"/>
                                           </p:stCondLst>
@@ -7618,14 +7215,14 @@
                                 </p:cTn>
                               </p:par>
                               <p:par>
-                                <p:cTn id="19" presetID="10" presetClass="entr" presetSubtype="0" fill="hold" grpId="0" nodeType="withEffect">
+                                <p:cTn id="17" presetID="10" presetClass="entr" presetSubtype="0" fill="hold" grpId="0" nodeType="withEffect">
                                   <p:stCondLst>
                                     <p:cond delay="0"/>
                                   </p:stCondLst>
                                   <p:childTnLst>
                                     <p:animEffect transition="in" filter="fade">
                                       <p:cBhvr>
-                                        <p:cTn id="20" dur="500"/>
+                                        <p:cTn id="18" dur="500"/>
                                         <p:tgtEl>
                                           <p:spTgt spid="6"/>
                                         </p:tgtEl>
@@ -7633,7 +7230,7 @@
                                     </p:animEffect>
                                     <p:set>
                                       <p:cBhvr>
-                                        <p:cTn id="21" dur="1" fill="hold">
+                                        <p:cTn id="19" dur="1" fill="hold">
                                           <p:stCondLst>
                                             <p:cond delay="0"/>
                                           </p:stCondLst>
@@ -7653,14 +7250,14 @@
                                 </p:cTn>
                               </p:par>
                               <p:par>
-                                <p:cTn id="22" presetID="10" presetClass="entr" presetSubtype="0" fill="hold" grpId="0" nodeType="withEffect">
+                                <p:cTn id="20" presetID="10" presetClass="entr" presetSubtype="0" fill="hold" grpId="0" nodeType="withEffect">
                                   <p:stCondLst>
                                     <p:cond delay="0"/>
                                   </p:stCondLst>
                                   <p:childTnLst>
                                     <p:animEffect transition="in" filter="fade">
                                       <p:cBhvr>
-                                        <p:cTn id="23" dur="500"/>
+                                        <p:cTn id="21" dur="500"/>
                                         <p:tgtEl>
                                           <p:spTgt spid="7"/>
                                         </p:tgtEl>
@@ -7668,7 +7265,7 @@
                                     </p:animEffect>
                                     <p:set>
                                       <p:cBhvr>
-                                        <p:cTn id="24" dur="1" fill="hold">
+                                        <p:cTn id="22" dur="1" fill="hold">
                                           <p:stCondLst>
                                             <p:cond delay="0"/>
                                           </p:stCondLst>
@@ -7688,14 +7285,14 @@
                                 </p:cTn>
                               </p:par>
                               <p:par>
-                                <p:cTn id="25" presetID="10" presetClass="entr" presetSubtype="0" fill="hold" grpId="0" nodeType="withEffect">
+                                <p:cTn id="23" presetID="10" presetClass="entr" presetSubtype="0" fill="hold" grpId="0" nodeType="withEffect">
                                   <p:stCondLst>
                                     <p:cond delay="0"/>
                                   </p:stCondLst>
                                   <p:childTnLst>
                                     <p:animEffect transition="in" filter="fade">
                                       <p:cBhvr>
-                                        <p:cTn id="26" dur="500"/>
+                                        <p:cTn id="24" dur="500"/>
                                         <p:tgtEl>
                                           <p:spTgt spid="8"/>
                                         </p:tgtEl>
@@ -7703,7 +7300,7 @@
                                     </p:animEffect>
                                     <p:set>
                                       <p:cBhvr>
-                                        <p:cTn id="27" dur="1" fill="hold">
+                                        <p:cTn id="25" dur="1" fill="hold">
                                           <p:stCondLst>
                                             <p:cond delay="0"/>
                                           </p:stCondLst>
@@ -7723,14 +7320,14 @@
                                 </p:cTn>
                               </p:par>
                               <p:par>
-                                <p:cTn id="28" presetID="10" presetClass="entr" presetSubtype="0" fill="hold" grpId="0" nodeType="withEffect">
+                                <p:cTn id="26" presetID="10" presetClass="entr" presetSubtype="0" fill="hold" grpId="0" nodeType="withEffect">
                                   <p:stCondLst>
                                     <p:cond delay="0"/>
                                   </p:stCondLst>
                                   <p:childTnLst>
                                     <p:animEffect transition="in" filter="fade">
                                       <p:cBhvr>
-                                        <p:cTn id="29" dur="500"/>
+                                        <p:cTn id="27" dur="500"/>
                                         <p:tgtEl>
                                           <p:spTgt spid="9"/>
                                         </p:tgtEl>
@@ -7738,7 +7335,7 @@
                                     </p:animEffect>
                                     <p:set>
                                       <p:cBhvr>
-                                        <p:cTn id="30" dur="1" fill="hold">
+                                        <p:cTn id="28" dur="1" fill="hold">
                                           <p:stCondLst>
                                             <p:cond delay="0"/>
                                           </p:stCondLst>
@@ -7764,26 +7361,26 @@
                     </p:cTn>
                   </p:par>
                   <p:par>
-                    <p:cTn id="31" fill="hold">
+                    <p:cTn id="29" fill="hold">
                       <p:stCondLst>
                         <p:cond delay="indefinite"/>
                       </p:stCondLst>
                       <p:childTnLst>
                         <p:par>
-                          <p:cTn id="32" fill="hold">
+                          <p:cTn id="30" fill="hold">
                             <p:stCondLst>
                               <p:cond delay="0"/>
                             </p:stCondLst>
                             <p:childTnLst>
                               <p:par>
-                                <p:cTn id="33" presetID="10" presetClass="entr" presetSubtype="0" fill="hold" grpId="0" nodeType="clickEffect">
+                                <p:cTn id="31" presetID="10" presetClass="entr" presetSubtype="0" fill="hold" grpId="0" nodeType="clickEffect">
                                   <p:stCondLst>
                                     <p:cond delay="0"/>
                                   </p:stCondLst>
                                   <p:childTnLst>
                                     <p:animEffect transition="in" filter="fade">
                                       <p:cBhvr>
-                                        <p:cTn id="34" dur="500"/>
+                                        <p:cTn id="32" dur="500"/>
                                         <p:tgtEl>
                                           <p:spTgt spid="10"/>
                                         </p:tgtEl>
@@ -7791,7 +7388,7 @@
                                     </p:animEffect>
                                     <p:set>
                                       <p:cBhvr>
-                                        <p:cTn id="35" dur="1" fill="hold">
+                                        <p:cTn id="33" dur="1" fill="hold">
                                           <p:stCondLst>
                                             <p:cond delay="0"/>
                                           </p:stCondLst>
@@ -7811,14 +7408,14 @@
                                 </p:cTn>
                               </p:par>
                               <p:par>
-                                <p:cTn id="36" presetID="10" presetClass="entr" presetSubtype="0" fill="hold" grpId="0" nodeType="withEffect">
+                                <p:cTn id="34" presetID="10" presetClass="entr" presetSubtype="0" fill="hold" grpId="0" nodeType="withEffect">
                                   <p:stCondLst>
                                     <p:cond delay="0"/>
                                   </p:stCondLst>
                                   <p:childTnLst>
                                     <p:animEffect transition="in" filter="fade">
                                       <p:cBhvr>
-                                        <p:cTn id="37" dur="500"/>
+                                        <p:cTn id="35" dur="500"/>
                                         <p:tgtEl>
                                           <p:spTgt spid="11"/>
                                         </p:tgtEl>
@@ -7826,48 +7423,13 @@
                                     </p:animEffect>
                                     <p:set>
                                       <p:cBhvr>
-                                        <p:cTn id="38" dur="1" fill="hold">
+                                        <p:cTn id="36" dur="1" fill="hold">
                                           <p:stCondLst>
                                             <p:cond delay="0"/>
                                           </p:stCondLst>
                                         </p:cTn>
                                         <p:tgtEl>
                                           <p:spTgt spid="11"/>
-                                        </p:tgtEl>
-                                        <p:attrNameLst>
-                                          <p:attrName>style.visibility</p:attrName>
-                                        </p:attrNameLst>
-                                      </p:cBhvr>
-                                      <p:to>
-                                        <p:strVal val="visible"/>
-                                      </p:to>
-                                    </p:set>
-                                  </p:childTnLst>
-                                </p:cTn>
-                              </p:par>
-                              <p:par>
-                                <p:cTn id="39" presetID="10" presetClass="entr" presetSubtype="0" fill="hold" grpId="0" nodeType="withEffect">
-                                  <p:stCondLst>
-                                    <p:cond delay="0"/>
-                                  </p:stCondLst>
-                                  <p:childTnLst>
-                                    <p:animEffect transition="in" filter="fade">
-                                      <p:cBhvr>
-                                        <p:cTn id="40" dur="500"/>
-                                        <p:tgtEl>
-                                          <p:spTgt spid="12"/>
-                                        </p:tgtEl>
-                                      </p:cBhvr>
-                                    </p:animEffect>
-                                    <p:set>
-                                      <p:cBhvr>
-                                        <p:cTn id="41" dur="1" fill="hold">
-                                          <p:stCondLst>
-                                            <p:cond delay="0"/>
-                                          </p:stCondLst>
-                                        </p:cTn>
-                                        <p:tgtEl>
-                                          <p:spTgt spid="12"/>
                                         </p:tgtEl>
                                         <p:attrNameLst>
                                           <p:attrName>style.visibility</p:attrName>
@@ -8002,59 +7564,14 @@
       </p:sp>
       <p:sp>
         <p:nvSpPr>
-          <p:cNvPr id="4" name="Rectangle 3"/>
-          <p:cNvSpPr/>
+          <p:cNvPr id="4" name="TextBox 3"/>
+          <p:cNvSpPr txBox="1"/>
           <p:nvPr/>
         </p:nvSpPr>
         <p:spPr>
           <a:xfrm>
             <a:off x="731520" y="1371600"/>
-            <a:ext cx="54864" cy="1077722"/>
-          </a:xfrm>
-          <a:prstGeom prst="rect">
-            <a:avLst/>
-          </a:prstGeom>
-          <a:solidFill>
-            <a:srgbClr val="2E5A88"/>
-          </a:solidFill>
-          <a:ln w="12700">
-            <a:solidFill>
-              <a:srgbClr val="2E5A88"/>
-            </a:solidFill>
-          </a:ln>
-        </p:spPr>
-        <p:style>
-          <a:lnRef idx="1">
-            <a:schemeClr val="accent1"/>
-          </a:lnRef>
-          <a:fillRef idx="3">
-            <a:schemeClr val="accent1"/>
-          </a:fillRef>
-          <a:effectRef idx="2">
-            <a:schemeClr val="accent1"/>
-          </a:effectRef>
-          <a:fontRef idx="minor">
-            <a:schemeClr val="lt1"/>
-          </a:fontRef>
-        </p:style>
-        <p:txBody>
-          <a:bodyPr rtlCol="0" anchor="ctr"/>
-          <a:lstStyle/>
-          <a:p>
-            <a:pPr algn="ctr"/>
-          </a:p>
-        </p:txBody>
-      </p:sp>
-      <p:sp>
-        <p:nvSpPr>
-          <p:cNvPr id="5" name="TextBox 4"/>
-          <p:cNvSpPr txBox="1"/>
-          <p:nvPr/>
-        </p:nvSpPr>
-        <p:spPr>
-          <a:xfrm>
-            <a:off x="923544" y="1371600"/>
-            <a:ext cx="980440" cy="413766"/>
+            <a:ext cx="3749039" cy="413766"/>
           </a:xfrm>
           <a:prstGeom prst="rect">
             <a:avLst/>
@@ -8062,12 +7579,15 @@
           <a:noFill/>
         </p:spPr>
         <p:txBody>
-          <a:bodyPr wrap="square">
+          <a:bodyPr wrap="square" lIns="45720" rIns="45720" tIns="64008" bIns="64008">
             <a:spAutoFit/>
           </a:bodyPr>
           <a:lstStyle/>
           <a:p>
             <a:pPr algn="l">
+              <a:lnSpc>
+                <a:spcPct val="125000"/>
+              </a:lnSpc>
               <a:defRPr sz="1800" b="1" i="0">
                 <a:solidFill>
                   <a:srgbClr val="2E5A88"/>
@@ -8083,14 +7603,14 @@
       </p:sp>
       <p:sp>
         <p:nvSpPr>
-          <p:cNvPr id="6" name="TextBox 5"/>
+          <p:cNvPr id="5" name="TextBox 4"/>
           <p:cNvSpPr txBox="1"/>
           <p:nvPr/>
         </p:nvSpPr>
         <p:spPr>
           <a:xfrm>
-            <a:off x="923544" y="1876806"/>
-            <a:ext cx="980440" cy="572516"/>
+            <a:off x="731520" y="1858517"/>
+            <a:ext cx="3749039" cy="572516"/>
           </a:xfrm>
           <a:prstGeom prst="rect">
             <a:avLst/>
@@ -8098,12 +7618,15 @@
           <a:noFill/>
         </p:spPr>
         <p:txBody>
-          <a:bodyPr wrap="square">
+          <a:bodyPr wrap="square" lIns="45720" rIns="45720" tIns="64008" bIns="64008">
             <a:spAutoFit/>
           </a:bodyPr>
           <a:lstStyle/>
           <a:p>
             <a:pPr algn="l">
+              <a:lnSpc>
+                <a:spcPct val="125000"/>
+              </a:lnSpc>
               <a:defRPr sz="1400" b="0" i="0">
                 <a:solidFill>
                   <a:srgbClr val="2C3E50"/>
@@ -8117,6 +7640,9 @@
           </a:p>
           <a:p>
             <a:pPr algn="l">
+              <a:lnSpc>
+                <a:spcPct val="125000"/>
+              </a:lnSpc>
               <a:defRPr sz="1400" b="0" i="0">
                 <a:solidFill>
                   <a:srgbClr val="2C3E50"/>
@@ -8132,14 +7658,14 @@
       </p:sp>
       <p:sp>
         <p:nvSpPr>
-          <p:cNvPr id="7" name="TextBox 6"/>
+          <p:cNvPr id="6" name="TextBox 5"/>
           <p:cNvSpPr txBox="1"/>
           <p:nvPr/>
         </p:nvSpPr>
         <p:spPr>
           <a:xfrm>
-            <a:off x="731520" y="2677922"/>
-            <a:ext cx="1172464" cy="699516"/>
+            <a:off x="731520" y="2659634"/>
+            <a:ext cx="3749039" cy="699516"/>
           </a:xfrm>
           <a:prstGeom prst="rect">
             <a:avLst/>
@@ -8147,12 +7673,15 @@
           <a:noFill/>
         </p:spPr>
         <p:txBody>
-          <a:bodyPr wrap="square">
+          <a:bodyPr wrap="square" lIns="45720" rIns="45720" tIns="64008" bIns="64008">
             <a:spAutoFit/>
           </a:bodyPr>
           <a:lstStyle/>
           <a:p>
             <a:pPr algn="l">
+              <a:lnSpc>
+                <a:spcPct val="125000"/>
+              </a:lnSpc>
               <a:defRPr sz="1800" b="0" i="1">
                 <a:solidFill>
                   <a:srgbClr val="7B8FA3"/>
@@ -8166,6 +7695,9 @@
           </a:p>
           <a:p>
             <a:pPr algn="l">
+              <a:lnSpc>
+                <a:spcPct val="125000"/>
+              </a:lnSpc>
               <a:defRPr sz="1800" b="0" i="1">
                 <a:solidFill>
                   <a:srgbClr val="7B8FA3"/>
@@ -8181,7 +7713,7 @@
       </p:sp>
       <p:pic>
         <p:nvPicPr>
-          <p:cNvPr id="8" name="Picture 7" descr="tmpkur6j0nb.png"/>
+          <p:cNvPr id="7" name="Picture 6" descr="tmp4mdxt2c9.png"/>
           <p:cNvPicPr>
             <a:picLocks noChangeAspect="1"/>
           </p:cNvPicPr>
@@ -8195,7 +7727,7 @@
         </p:blipFill>
         <p:spPr>
           <a:xfrm>
-            <a:off x="2361184" y="1371600"/>
+            <a:off x="4937759" y="1371600"/>
             <a:ext cx="2560320" cy="2560320"/>
           </a:xfrm>
           <a:prstGeom prst="rect">
@@ -8300,74 +7832,47 @@
                       </p:childTnLst>
                     </p:cTn>
                   </p:par>
-                  <p:par>
-                    <p:cTn id="10" fill="hold">
-                      <p:stCondLst>
-                        <p:cond delay="0"/>
-                      </p:stCondLst>
-                      <p:childTnLst>
-                        <p:set>
-                          <p:cBhvr>
-                            <p:cTn id="11" dur="1" fill="hold">
-                              <p:stCondLst>
-                                <p:cond delay="0"/>
-                              </p:stCondLst>
-                            </p:cTn>
-                            <p:tgtEl>
-                              <p:spTgt spid="7"/>
-                            </p:tgtEl>
-                            <p:attrNameLst>
-                              <p:attrName>style.visibility</p:attrName>
-                            </p:attrNameLst>
-                          </p:cBhvr>
-                          <p:to>
-                            <p:strVal val="hidden"/>
-                          </p:to>
-                        </p:set>
-                      </p:childTnLst>
-                    </p:cTn>
-                  </p:par>
                 </p:childTnLst>
               </p:cTn>
             </p:par>
             <p:seq concurrent="1" nextAc="seek">
-              <p:cTn id="12" dur="indefinite" nodeType="mainSeq">
+              <p:cTn id="10" dur="indefinite" nodeType="mainSeq">
                 <p:childTnLst>
                   <p:par>
-                    <p:cTn id="13" fill="hold">
+                    <p:cTn id="11" fill="hold">
                       <p:stCondLst>
                         <p:cond delay="indefinite"/>
                       </p:stCondLst>
                       <p:childTnLst>
                         <p:par>
-                          <p:cTn id="14" fill="hold">
+                          <p:cTn id="12" fill="hold">
                             <p:stCondLst>
                               <p:cond delay="0"/>
                             </p:stCondLst>
                             <p:childTnLst>
                               <p:par>
-                                <p:cTn id="15" presetID="10" presetClass="entr" presetSubtype="0" fill="hold" grpId="0" nodeType="clickEffect">
+                                <p:cTn id="13" presetID="10" presetClass="entr" presetSubtype="0" fill="hold" grpId="0" nodeType="clickEffect">
                                   <p:stCondLst>
                                     <p:cond delay="0"/>
                                   </p:stCondLst>
                                   <p:childTnLst>
                                     <p:animEffect transition="in" filter="fade">
                                       <p:cBhvr>
-                                        <p:cTn id="16" dur="500"/>
-                                        <p:tgtEl>
-                                          <p:spTgt spid="8"/>
+                                        <p:cTn id="14" dur="500"/>
+                                        <p:tgtEl>
+                                          <p:spTgt spid="7"/>
                                         </p:tgtEl>
                                       </p:cBhvr>
                                     </p:animEffect>
                                     <p:set>
                                       <p:cBhvr>
-                                        <p:cTn id="17" dur="1" fill="hold">
+                                        <p:cTn id="15" dur="1" fill="hold">
                                           <p:stCondLst>
                                             <p:cond delay="0"/>
                                           </p:stCondLst>
                                         </p:cTn>
                                         <p:tgtEl>
-                                          <p:spTgt spid="8"/>
+                                          <p:spTgt spid="7"/>
                                         </p:tgtEl>
                                         <p:attrNameLst>
                                           <p:attrName>style.visibility</p:attrName>
@@ -8387,26 +7892,26 @@
                     </p:cTn>
                   </p:par>
                   <p:par>
-                    <p:cTn id="18" fill="hold">
+                    <p:cTn id="16" fill="hold">
                       <p:stCondLst>
                         <p:cond delay="indefinite"/>
                       </p:stCondLst>
                       <p:childTnLst>
                         <p:par>
-                          <p:cTn id="19" fill="hold">
+                          <p:cTn id="17" fill="hold">
                             <p:stCondLst>
                               <p:cond delay="0"/>
                             </p:stCondLst>
                             <p:childTnLst>
                               <p:par>
-                                <p:cTn id="20" presetID="10" presetClass="entr" presetSubtype="0" fill="hold" grpId="0" nodeType="clickEffect">
+                                <p:cTn id="18" presetID="10" presetClass="entr" presetSubtype="0" fill="hold" grpId="0" nodeType="clickEffect">
                                   <p:stCondLst>
                                     <p:cond delay="0"/>
                                   </p:stCondLst>
                                   <p:childTnLst>
                                     <p:animEffect transition="in" filter="fade">
                                       <p:cBhvr>
-                                        <p:cTn id="21" dur="500"/>
+                                        <p:cTn id="19" dur="500"/>
                                         <p:tgtEl>
                                           <p:spTgt spid="4"/>
                                         </p:tgtEl>
@@ -8414,7 +7919,7 @@
                                     </p:animEffect>
                                     <p:set>
                                       <p:cBhvr>
-                                        <p:cTn id="22" dur="1" fill="hold">
+                                        <p:cTn id="20" dur="1" fill="hold">
                                           <p:stCondLst>
                                             <p:cond delay="0"/>
                                           </p:stCondLst>
@@ -8434,14 +7939,14 @@
                                 </p:cTn>
                               </p:par>
                               <p:par>
-                                <p:cTn id="23" presetID="10" presetClass="entr" presetSubtype="0" fill="hold" grpId="0" nodeType="withEffect">
+                                <p:cTn id="21" presetID="10" presetClass="entr" presetSubtype="0" fill="hold" grpId="0" nodeType="withEffect">
                                   <p:stCondLst>
                                     <p:cond delay="0"/>
                                   </p:stCondLst>
                                   <p:childTnLst>
                                     <p:animEffect transition="in" filter="fade">
                                       <p:cBhvr>
-                                        <p:cTn id="24" dur="500"/>
+                                        <p:cTn id="22" dur="500"/>
                                         <p:tgtEl>
                                           <p:spTgt spid="5"/>
                                         </p:tgtEl>
@@ -8449,7 +7954,7 @@
                                     </p:animEffect>
                                     <p:set>
                                       <p:cBhvr>
-                                        <p:cTn id="25" dur="1" fill="hold">
+                                        <p:cTn id="23" dur="1" fill="hold">
                                           <p:stCondLst>
                                             <p:cond delay="0"/>
                                           </p:stCondLst>
@@ -8469,14 +7974,14 @@
                                 </p:cTn>
                               </p:par>
                               <p:par>
-                                <p:cTn id="26" presetID="10" presetClass="entr" presetSubtype="0" fill="hold" grpId="0" nodeType="withEffect">
+                                <p:cTn id="24" presetID="10" presetClass="entr" presetSubtype="0" fill="hold" grpId="0" nodeType="withEffect">
                                   <p:stCondLst>
                                     <p:cond delay="0"/>
                                   </p:stCondLst>
                                   <p:childTnLst>
                                     <p:animEffect transition="in" filter="fade">
                                       <p:cBhvr>
-                                        <p:cTn id="27" dur="500"/>
+                                        <p:cTn id="25" dur="500"/>
                                         <p:tgtEl>
                                           <p:spTgt spid="6"/>
                                         </p:tgtEl>
@@ -8484,48 +7989,13 @@
                                     </p:animEffect>
                                     <p:set>
                                       <p:cBhvr>
-                                        <p:cTn id="28" dur="1" fill="hold">
+                                        <p:cTn id="26" dur="1" fill="hold">
                                           <p:stCondLst>
                                             <p:cond delay="0"/>
                                           </p:stCondLst>
                                         </p:cTn>
                                         <p:tgtEl>
                                           <p:spTgt spid="6"/>
-                                        </p:tgtEl>
-                                        <p:attrNameLst>
-                                          <p:attrName>style.visibility</p:attrName>
-                                        </p:attrNameLst>
-                                      </p:cBhvr>
-                                      <p:to>
-                                        <p:strVal val="visible"/>
-                                      </p:to>
-                                    </p:set>
-                                  </p:childTnLst>
-                                </p:cTn>
-                              </p:par>
-                              <p:par>
-                                <p:cTn id="29" presetID="10" presetClass="entr" presetSubtype="0" fill="hold" grpId="0" nodeType="withEffect">
-                                  <p:stCondLst>
-                                    <p:cond delay="0"/>
-                                  </p:stCondLst>
-                                  <p:childTnLst>
-                                    <p:animEffect transition="in" filter="fade">
-                                      <p:cBhvr>
-                                        <p:cTn id="30" dur="500"/>
-                                        <p:tgtEl>
-                                          <p:spTgt spid="7"/>
-                                        </p:tgtEl>
-                                      </p:cBhvr>
-                                    </p:animEffect>
-                                    <p:set>
-                                      <p:cBhvr>
-                                        <p:cTn id="31" dur="1" fill="hold">
-                                          <p:stCondLst>
-                                            <p:cond delay="0"/>
-                                          </p:stCondLst>
-                                        </p:cTn>
-                                        <p:tgtEl>
-                                          <p:spTgt spid="7"/>
                                         </p:tgtEl>
                                         <p:attrNameLst>
                                           <p:attrName>style.visibility</p:attrName>
@@ -8712,7 +8182,7 @@
         <p:spPr>
           <a:xfrm>
             <a:off x="969264" y="1371600"/>
-            <a:ext cx="154940" cy="350266"/>
+            <a:ext cx="269240" cy="350266"/>
           </a:xfrm>
           <a:prstGeom prst="rect">
             <a:avLst/>
@@ -8720,12 +8190,15 @@
           <a:noFill/>
         </p:spPr>
         <p:txBody>
-          <a:bodyPr wrap="square">
+          <a:bodyPr wrap="square" lIns="45720" rIns="45720" tIns="64008" bIns="64008">
             <a:spAutoFit/>
           </a:bodyPr>
           <a:lstStyle/>
           <a:p>
             <a:pPr algn="l">
+              <a:lnSpc>
+                <a:spcPct val="125000"/>
+              </a:lnSpc>
               <a:defRPr sz="1400" b="1" i="0">
                 <a:solidFill>
                   <a:srgbClr val="2C3E50"/>
@@ -8748,7 +8221,7 @@
         <p:spPr>
           <a:xfrm>
             <a:off x="731520" y="1813306"/>
-            <a:ext cx="392684" cy="1387094"/>
+            <a:ext cx="506983" cy="3613149"/>
           </a:xfrm>
           <a:prstGeom prst="rect">
             <a:avLst/>
@@ -8756,12 +8229,15 @@
           <a:noFill/>
         </p:spPr>
         <p:txBody>
-          <a:bodyPr wrap="square">
+          <a:bodyPr wrap="square" tIns="54864" bIns="54864">
             <a:spAutoFit/>
           </a:bodyPr>
           <a:lstStyle/>
           <a:p>
             <a:pPr>
+              <a:lnSpc>
+                <a:spcPct val="125000"/>
+              </a:lnSpc>
               <a:defRPr sz="1800">
                 <a:solidFill>
                   <a:srgbClr val="2C3E50"/>
@@ -8776,6 +8252,9 @@
           </a:p>
           <a:p>
             <a:pPr>
+              <a:lnSpc>
+                <a:spcPct val="125000"/>
+              </a:lnSpc>
               <a:defRPr sz="1800">
                 <a:solidFill>
                   <a:srgbClr val="2C3E50"/>
@@ -8790,6 +8269,9 @@
           </a:p>
           <a:p>
             <a:pPr>
+              <a:lnSpc>
+                <a:spcPct val="125000"/>
+              </a:lnSpc>
               <a:defRPr sz="1800">
                 <a:solidFill>
                   <a:srgbClr val="2C3E50"/>
@@ -8806,7 +8288,7 @@
       </p:sp>
       <p:pic>
         <p:nvPicPr>
-          <p:cNvPr id="7" name="Picture 6" descr="tmp7g679y00.png"/>
+          <p:cNvPr id="7" name="Picture 6" descr="tmp5l_kx7yz.png"/>
           <p:cNvPicPr>
             <a:picLocks noChangeAspect="1"/>
           </p:cNvPicPr>
@@ -8820,7 +8302,7 @@
         </p:blipFill>
         <p:spPr>
           <a:xfrm>
-            <a:off x="1398524" y="1371600"/>
+            <a:off x="1512824" y="1371600"/>
             <a:ext cx="1828800" cy="1828800"/>
           </a:xfrm>
           <a:prstGeom prst="rect">
@@ -8836,7 +8318,7 @@
         </p:nvSpPr>
         <p:spPr>
           <a:xfrm>
-            <a:off x="3501644" y="1371600"/>
+            <a:off x="3615944" y="1371600"/>
             <a:ext cx="164592" cy="164592"/>
           </a:xfrm>
           <a:prstGeom prst="roundRect">
@@ -8881,8 +8363,8 @@
         </p:nvSpPr>
         <p:spPr>
           <a:xfrm>
-            <a:off x="3739388" y="1371600"/>
-            <a:ext cx="154940" cy="350266"/>
+            <a:off x="3853688" y="1371600"/>
+            <a:ext cx="269240" cy="350266"/>
           </a:xfrm>
           <a:prstGeom prst="rect">
             <a:avLst/>
@@ -8890,12 +8372,15 @@
           <a:noFill/>
         </p:spPr>
         <p:txBody>
-          <a:bodyPr wrap="square">
+          <a:bodyPr wrap="square" lIns="45720" rIns="45720" tIns="64008" bIns="64008">
             <a:spAutoFit/>
           </a:bodyPr>
           <a:lstStyle/>
           <a:p>
             <a:pPr algn="l">
+              <a:lnSpc>
+                <a:spcPct val="125000"/>
+              </a:lnSpc>
               <a:defRPr sz="1400" b="1" i="0">
                 <a:solidFill>
                   <a:srgbClr val="2C3E50"/>
@@ -8917,8 +8402,8 @@
         </p:nvSpPr>
         <p:spPr>
           <a:xfrm>
-            <a:off x="3501644" y="1813306"/>
-            <a:ext cx="392684" cy="1387094"/>
+            <a:off x="3615944" y="1813306"/>
+            <a:ext cx="506983" cy="3613149"/>
           </a:xfrm>
           <a:prstGeom prst="rect">
             <a:avLst/>
@@ -8926,12 +8411,15 @@
           <a:noFill/>
         </p:spPr>
         <p:txBody>
-          <a:bodyPr wrap="square">
+          <a:bodyPr wrap="square" tIns="54864" bIns="54864">
             <a:spAutoFit/>
           </a:bodyPr>
           <a:lstStyle/>
           <a:p>
             <a:pPr>
+              <a:lnSpc>
+                <a:spcPct val="125000"/>
+              </a:lnSpc>
               <a:defRPr sz="1800">
                 <a:solidFill>
                   <a:srgbClr val="2C3E50"/>
@@ -8946,6 +8434,9 @@
           </a:p>
           <a:p>
             <a:pPr>
+              <a:lnSpc>
+                <a:spcPct val="125000"/>
+              </a:lnSpc>
               <a:defRPr sz="1800">
                 <a:solidFill>
                   <a:srgbClr val="2C3E50"/>
@@ -8960,6 +8451,9 @@
           </a:p>
           <a:p>
             <a:pPr>
+              <a:lnSpc>
+                <a:spcPct val="125000"/>
+              </a:lnSpc>
               <a:defRPr sz="1800">
                 <a:solidFill>
                   <a:srgbClr val="2C3E50"/>
@@ -8974,6 +8468,9 @@
           </a:p>
           <a:p>
             <a:pPr>
+              <a:lnSpc>
+                <a:spcPct val="125000"/>
+              </a:lnSpc>
               <a:defRPr sz="1800">
                 <a:solidFill>
                   <a:srgbClr val="2C3E50"/>
@@ -8990,59 +8487,14 @@
       </p:sp>
       <p:sp>
         <p:nvSpPr>
-          <p:cNvPr id="11" name="Rectangle 10"/>
-          <p:cNvSpPr/>
+          <p:cNvPr id="11" name="TextBox 10"/>
+          <p:cNvSpPr txBox="1"/>
           <p:nvPr/>
         </p:nvSpPr>
         <p:spPr>
           <a:xfrm>
-            <a:off x="731520" y="3429000"/>
-            <a:ext cx="54864" cy="1077722"/>
-          </a:xfrm>
-          <a:prstGeom prst="rect">
-            <a:avLst/>
-          </a:prstGeom>
-          <a:solidFill>
-            <a:srgbClr val="3D8B8B"/>
-          </a:solidFill>
-          <a:ln w="12700">
-            <a:solidFill>
-              <a:srgbClr val="3D8B8B"/>
-            </a:solidFill>
-          </a:ln>
-        </p:spPr>
-        <p:style>
-          <a:lnRef idx="1">
-            <a:schemeClr val="accent1"/>
-          </a:lnRef>
-          <a:fillRef idx="3">
-            <a:schemeClr val="accent1"/>
-          </a:fillRef>
-          <a:effectRef idx="2">
-            <a:schemeClr val="accent1"/>
-          </a:effectRef>
-          <a:fontRef idx="minor">
-            <a:schemeClr val="lt1"/>
-          </a:fontRef>
-        </p:style>
-        <p:txBody>
-          <a:bodyPr rtlCol="0" anchor="ctr"/>
-          <a:lstStyle/>
-          <a:p>
-            <a:pPr algn="ctr"/>
-          </a:p>
-        </p:txBody>
-      </p:sp>
-      <p:sp>
-        <p:nvSpPr>
-          <p:cNvPr id="12" name="TextBox 11"/>
-          <p:cNvSpPr txBox="1"/>
-          <p:nvPr/>
-        </p:nvSpPr>
-        <p:spPr>
-          <a:xfrm>
-            <a:off x="923544" y="3429000"/>
-            <a:ext cx="10536631" cy="413766"/>
+            <a:off x="731520" y="5655055"/>
+            <a:ext cx="10728655" cy="413766"/>
           </a:xfrm>
           <a:prstGeom prst="rect">
             <a:avLst/>
@@ -9050,12 +8502,15 @@
           <a:noFill/>
         </p:spPr>
         <p:txBody>
-          <a:bodyPr wrap="square">
+          <a:bodyPr wrap="square" lIns="45720" rIns="45720" tIns="64008" bIns="64008">
             <a:spAutoFit/>
           </a:bodyPr>
           <a:lstStyle/>
           <a:p>
             <a:pPr algn="l">
+              <a:lnSpc>
+                <a:spcPct val="125000"/>
+              </a:lnSpc>
               <a:defRPr sz="1800" b="1" i="0">
                 <a:solidFill>
                   <a:srgbClr val="3D8B8B"/>
@@ -9071,14 +8526,14 @@
       </p:sp>
       <p:sp>
         <p:nvSpPr>
-          <p:cNvPr id="13" name="TextBox 12"/>
+          <p:cNvPr id="12" name="TextBox 11"/>
           <p:cNvSpPr txBox="1"/>
           <p:nvPr/>
         </p:nvSpPr>
         <p:spPr>
           <a:xfrm>
-            <a:off x="923544" y="3934206"/>
-            <a:ext cx="10536631" cy="572516"/>
+            <a:off x="731520" y="6141973"/>
+            <a:ext cx="10728655" cy="350266"/>
           </a:xfrm>
           <a:prstGeom prst="rect">
             <a:avLst/>
@@ -9086,12 +8541,15 @@
           <a:noFill/>
         </p:spPr>
         <p:txBody>
-          <a:bodyPr wrap="square">
+          <a:bodyPr wrap="square" lIns="45720" rIns="45720" tIns="64008" bIns="64008">
             <a:spAutoFit/>
           </a:bodyPr>
           <a:lstStyle/>
           <a:p>
             <a:pPr algn="l">
+              <a:lnSpc>
+                <a:spcPct val="125000"/>
+              </a:lnSpc>
               <a:defRPr sz="1400" b="0" i="0">
                 <a:solidFill>
                   <a:srgbClr val="2C3E50"/>
@@ -9105,6 +8563,9 @@
           </a:p>
           <a:p>
             <a:pPr algn="l">
+              <a:lnSpc>
+                <a:spcPct val="125000"/>
+              </a:lnSpc>
               <a:defRPr sz="1400" b="0" i="0">
                 <a:solidFill>
                   <a:srgbClr val="2C3E50"/>
@@ -9188,60 +8649,33 @@
                       </p:childTnLst>
                     </p:cTn>
                   </p:par>
-                  <p:par>
-                    <p:cTn id="8" fill="hold">
-                      <p:stCondLst>
-                        <p:cond delay="0"/>
-                      </p:stCondLst>
-                      <p:childTnLst>
-                        <p:set>
-                          <p:cBhvr>
-                            <p:cTn id="9" dur="1" fill="hold">
-                              <p:stCondLst>
-                                <p:cond delay="0"/>
-                              </p:stCondLst>
-                            </p:cTn>
-                            <p:tgtEl>
-                              <p:spTgt spid="13"/>
-                            </p:tgtEl>
-                            <p:attrNameLst>
-                              <p:attrName>style.visibility</p:attrName>
-                            </p:attrNameLst>
-                          </p:cBhvr>
-                          <p:to>
-                            <p:strVal val="hidden"/>
-                          </p:to>
-                        </p:set>
-                      </p:childTnLst>
-                    </p:cTn>
-                  </p:par>
                 </p:childTnLst>
               </p:cTn>
             </p:par>
             <p:seq concurrent="1" nextAc="seek">
-              <p:cTn id="10" dur="indefinite" nodeType="mainSeq">
+              <p:cTn id="8" dur="indefinite" nodeType="mainSeq">
                 <p:childTnLst>
                   <p:par>
-                    <p:cTn id="11" fill="hold">
+                    <p:cTn id="9" fill="hold">
                       <p:stCondLst>
                         <p:cond delay="indefinite"/>
                       </p:stCondLst>
                       <p:childTnLst>
                         <p:par>
-                          <p:cTn id="12" fill="hold">
+                          <p:cTn id="10" fill="hold">
                             <p:stCondLst>
                               <p:cond delay="0"/>
                             </p:stCondLst>
                             <p:childTnLst>
                               <p:par>
-                                <p:cTn id="13" presetID="10" presetClass="entr" presetSubtype="0" fill="hold" grpId="0" nodeType="clickEffect">
+                                <p:cTn id="11" presetID="10" presetClass="entr" presetSubtype="0" fill="hold" grpId="0" nodeType="clickEffect">
                                   <p:stCondLst>
                                     <p:cond delay="0"/>
                                   </p:stCondLst>
                                   <p:childTnLst>
                                     <p:animEffect transition="in" filter="fade">
                                       <p:cBhvr>
-                                        <p:cTn id="14" dur="500"/>
+                                        <p:cTn id="12" dur="500"/>
                                         <p:tgtEl>
                                           <p:spTgt spid="4"/>
                                         </p:tgtEl>
@@ -9249,7 +8683,7 @@
                                     </p:animEffect>
                                     <p:set>
                                       <p:cBhvr>
-                                        <p:cTn id="15" dur="1" fill="hold">
+                                        <p:cTn id="13" dur="1" fill="hold">
                                           <p:stCondLst>
                                             <p:cond delay="0"/>
                                           </p:stCondLst>
@@ -9269,14 +8703,14 @@
                                 </p:cTn>
                               </p:par>
                               <p:par>
-                                <p:cTn id="16" presetID="10" presetClass="entr" presetSubtype="0" fill="hold" grpId="0" nodeType="withEffect">
+                                <p:cTn id="14" presetID="10" presetClass="entr" presetSubtype="0" fill="hold" grpId="0" nodeType="withEffect">
                                   <p:stCondLst>
                                     <p:cond delay="0"/>
                                   </p:stCondLst>
                                   <p:childTnLst>
                                     <p:animEffect transition="in" filter="fade">
                                       <p:cBhvr>
-                                        <p:cTn id="17" dur="500"/>
+                                        <p:cTn id="15" dur="500"/>
                                         <p:tgtEl>
                                           <p:spTgt spid="5"/>
                                         </p:tgtEl>
@@ -9284,7 +8718,7 @@
                                     </p:animEffect>
                                     <p:set>
                                       <p:cBhvr>
-                                        <p:cTn id="18" dur="1" fill="hold">
+                                        <p:cTn id="16" dur="1" fill="hold">
                                           <p:stCondLst>
                                             <p:cond delay="0"/>
                                           </p:stCondLst>
@@ -9304,14 +8738,14 @@
                                 </p:cTn>
                               </p:par>
                               <p:par>
-                                <p:cTn id="19" presetID="10" presetClass="entr" presetSubtype="0" fill="hold" grpId="0" nodeType="withEffect">
+                                <p:cTn id="17" presetID="10" presetClass="entr" presetSubtype="0" fill="hold" grpId="0" nodeType="withEffect">
                                   <p:stCondLst>
                                     <p:cond delay="0"/>
                                   </p:stCondLst>
                                   <p:childTnLst>
                                     <p:animEffect transition="in" filter="fade">
                                       <p:cBhvr>
-                                        <p:cTn id="20" dur="500"/>
+                                        <p:cTn id="18" dur="500"/>
                                         <p:tgtEl>
                                           <p:spTgt spid="6"/>
                                         </p:tgtEl>
@@ -9319,7 +8753,7 @@
                                     </p:animEffect>
                                     <p:set>
                                       <p:cBhvr>
-                                        <p:cTn id="21" dur="1" fill="hold">
+                                        <p:cTn id="19" dur="1" fill="hold">
                                           <p:stCondLst>
                                             <p:cond delay="0"/>
                                           </p:stCondLst>
@@ -9339,14 +8773,14 @@
                                 </p:cTn>
                               </p:par>
                               <p:par>
-                                <p:cTn id="22" presetID="10" presetClass="entr" presetSubtype="0" fill="hold" grpId="0" nodeType="withEffect">
+                                <p:cTn id="20" presetID="10" presetClass="entr" presetSubtype="0" fill="hold" grpId="0" nodeType="withEffect">
                                   <p:stCondLst>
                                     <p:cond delay="0"/>
                                   </p:stCondLst>
                                   <p:childTnLst>
                                     <p:animEffect transition="in" filter="fade">
                                       <p:cBhvr>
-                                        <p:cTn id="23" dur="500"/>
+                                        <p:cTn id="21" dur="500"/>
                                         <p:tgtEl>
                                           <p:spTgt spid="7"/>
                                         </p:tgtEl>
@@ -9354,7 +8788,7 @@
                                     </p:animEffect>
                                     <p:set>
                                       <p:cBhvr>
-                                        <p:cTn id="24" dur="1" fill="hold">
+                                        <p:cTn id="22" dur="1" fill="hold">
                                           <p:stCondLst>
                                             <p:cond delay="0"/>
                                           </p:stCondLst>
@@ -9374,14 +8808,14 @@
                                 </p:cTn>
                               </p:par>
                               <p:par>
-                                <p:cTn id="25" presetID="10" presetClass="entr" presetSubtype="0" fill="hold" grpId="0" nodeType="withEffect">
+                                <p:cTn id="23" presetID="10" presetClass="entr" presetSubtype="0" fill="hold" grpId="0" nodeType="withEffect">
                                   <p:stCondLst>
                                     <p:cond delay="0"/>
                                   </p:stCondLst>
                                   <p:childTnLst>
                                     <p:animEffect transition="in" filter="fade">
                                       <p:cBhvr>
-                                        <p:cTn id="26" dur="500"/>
+                                        <p:cTn id="24" dur="500"/>
                                         <p:tgtEl>
                                           <p:spTgt spid="8"/>
                                         </p:tgtEl>
@@ -9389,7 +8823,7 @@
                                     </p:animEffect>
                                     <p:set>
                                       <p:cBhvr>
-                                        <p:cTn id="27" dur="1" fill="hold">
+                                        <p:cTn id="25" dur="1" fill="hold">
                                           <p:stCondLst>
                                             <p:cond delay="0"/>
                                           </p:stCondLst>
@@ -9409,14 +8843,14 @@
                                 </p:cTn>
                               </p:par>
                               <p:par>
-                                <p:cTn id="28" presetID="10" presetClass="entr" presetSubtype="0" fill="hold" grpId="0" nodeType="withEffect">
+                                <p:cTn id="26" presetID="10" presetClass="entr" presetSubtype="0" fill="hold" grpId="0" nodeType="withEffect">
                                   <p:stCondLst>
                                     <p:cond delay="0"/>
                                   </p:stCondLst>
                                   <p:childTnLst>
                                     <p:animEffect transition="in" filter="fade">
                                       <p:cBhvr>
-                                        <p:cTn id="29" dur="500"/>
+                                        <p:cTn id="27" dur="500"/>
                                         <p:tgtEl>
                                           <p:spTgt spid="9"/>
                                         </p:tgtEl>
@@ -9424,7 +8858,7 @@
                                     </p:animEffect>
                                     <p:set>
                                       <p:cBhvr>
-                                        <p:cTn id="30" dur="1" fill="hold">
+                                        <p:cTn id="28" dur="1" fill="hold">
                                           <p:stCondLst>
                                             <p:cond delay="0"/>
                                           </p:stCondLst>
@@ -9444,14 +8878,14 @@
                                 </p:cTn>
                               </p:par>
                               <p:par>
-                                <p:cTn id="31" presetID="10" presetClass="entr" presetSubtype="0" fill="hold" grpId="0" nodeType="withEffect">
+                                <p:cTn id="29" presetID="10" presetClass="entr" presetSubtype="0" fill="hold" grpId="0" nodeType="withEffect">
                                   <p:stCondLst>
                                     <p:cond delay="0"/>
                                   </p:stCondLst>
                                   <p:childTnLst>
                                     <p:animEffect transition="in" filter="fade">
                                       <p:cBhvr>
-                                        <p:cTn id="32" dur="500"/>
+                                        <p:cTn id="30" dur="500"/>
                                         <p:tgtEl>
                                           <p:spTgt spid="10"/>
                                         </p:tgtEl>
@@ -9459,7 +8893,7 @@
                                     </p:animEffect>
                                     <p:set>
                                       <p:cBhvr>
-                                        <p:cTn id="33" dur="1" fill="hold">
+                                        <p:cTn id="31" dur="1" fill="hold">
                                           <p:stCondLst>
                                             <p:cond delay="0"/>
                                           </p:stCondLst>
@@ -9485,26 +8919,26 @@
                     </p:cTn>
                   </p:par>
                   <p:par>
-                    <p:cTn id="34" fill="hold">
+                    <p:cTn id="32" fill="hold">
                       <p:stCondLst>
                         <p:cond delay="indefinite"/>
                       </p:stCondLst>
                       <p:childTnLst>
                         <p:par>
-                          <p:cTn id="35" fill="hold">
+                          <p:cTn id="33" fill="hold">
                             <p:stCondLst>
                               <p:cond delay="0"/>
                             </p:stCondLst>
                             <p:childTnLst>
                               <p:par>
-                                <p:cTn id="36" presetID="10" presetClass="entr" presetSubtype="0" fill="hold" grpId="0" nodeType="clickEffect">
+                                <p:cTn id="34" presetID="10" presetClass="entr" presetSubtype="0" fill="hold" grpId="0" nodeType="clickEffect">
                                   <p:stCondLst>
                                     <p:cond delay="0"/>
                                   </p:stCondLst>
                                   <p:childTnLst>
                                     <p:animEffect transition="in" filter="fade">
                                       <p:cBhvr>
-                                        <p:cTn id="37" dur="500"/>
+                                        <p:cTn id="35" dur="500"/>
                                         <p:tgtEl>
                                           <p:spTgt spid="11"/>
                                         </p:tgtEl>
@@ -9512,7 +8946,7 @@
                                     </p:animEffect>
                                     <p:set>
                                       <p:cBhvr>
-                                        <p:cTn id="38" dur="1" fill="hold">
+                                        <p:cTn id="36" dur="1" fill="hold">
                                           <p:stCondLst>
                                             <p:cond delay="0"/>
                                           </p:stCondLst>
@@ -9532,14 +8966,14 @@
                                 </p:cTn>
                               </p:par>
                               <p:par>
-                                <p:cTn id="39" presetID="10" presetClass="entr" presetSubtype="0" fill="hold" grpId="0" nodeType="withEffect">
+                                <p:cTn id="37" presetID="10" presetClass="entr" presetSubtype="0" fill="hold" grpId="0" nodeType="withEffect">
                                   <p:stCondLst>
                                     <p:cond delay="0"/>
                                   </p:stCondLst>
                                   <p:childTnLst>
                                     <p:animEffect transition="in" filter="fade">
                                       <p:cBhvr>
-                                        <p:cTn id="40" dur="500"/>
+                                        <p:cTn id="38" dur="500"/>
                                         <p:tgtEl>
                                           <p:spTgt spid="12"/>
                                         </p:tgtEl>
@@ -9547,48 +8981,13 @@
                                     </p:animEffect>
                                     <p:set>
                                       <p:cBhvr>
-                                        <p:cTn id="41" dur="1" fill="hold">
+                                        <p:cTn id="39" dur="1" fill="hold">
                                           <p:stCondLst>
                                             <p:cond delay="0"/>
                                           </p:stCondLst>
                                         </p:cTn>
                                         <p:tgtEl>
                                           <p:spTgt spid="12"/>
-                                        </p:tgtEl>
-                                        <p:attrNameLst>
-                                          <p:attrName>style.visibility</p:attrName>
-                                        </p:attrNameLst>
-                                      </p:cBhvr>
-                                      <p:to>
-                                        <p:strVal val="visible"/>
-                                      </p:to>
-                                    </p:set>
-                                  </p:childTnLst>
-                                </p:cTn>
-                              </p:par>
-                              <p:par>
-                                <p:cTn id="42" presetID="10" presetClass="entr" presetSubtype="0" fill="hold" grpId="0" nodeType="withEffect">
-                                  <p:stCondLst>
-                                    <p:cond delay="0"/>
-                                  </p:stCondLst>
-                                  <p:childTnLst>
-                                    <p:animEffect transition="in" filter="fade">
-                                      <p:cBhvr>
-                                        <p:cTn id="43" dur="500"/>
-                                        <p:tgtEl>
-                                          <p:spTgt spid="13"/>
-                                        </p:tgtEl>
-                                      </p:cBhvr>
-                                    </p:animEffect>
-                                    <p:set>
-                                      <p:cBhvr>
-                                        <p:cTn id="44" dur="1" fill="hold">
-                                          <p:stCondLst>
-                                            <p:cond delay="0"/>
-                                          </p:stCondLst>
-                                        </p:cTn>
-                                        <p:tgtEl>
-                                          <p:spTgt spid="13"/>
                                         </p:tgtEl>
                                         <p:attrNameLst>
                                           <p:attrName>style.visibility</p:attrName>
@@ -9730,7 +9129,7 @@
         <p:spPr>
           <a:xfrm>
             <a:off x="731520" y="1371600"/>
-            <a:ext cx="10728655" cy="822960"/>
+            <a:ext cx="3466490" cy="822960"/>
           </a:xfrm>
           <a:prstGeom prst="roundRect">
             <a:avLst/>
@@ -9759,7 +9158,7 @@
           </a:fontRef>
         </p:style>
         <p:txBody>
-          <a:bodyPr rtlCol="0" anchor="ctr" wrap="square"/>
+          <a:bodyPr rtlCol="0" anchor="ctr" wrap="square" lIns="201168" rIns="201168" tIns="128016" bIns="128016"/>
           <a:lstStyle/>
           <a:p>
             <a:pPr algn="ctr">
@@ -9780,42 +9179,61 @@
           </a:p>
         </p:txBody>
       </p:sp>
-      <p:cxnSp>
-        <p:nvCxnSpPr>
-          <p:cNvPr id="5" name="Connector 4"/>
-          <p:cNvCxnSpPr/>
+      <p:sp>
+        <p:nvSpPr>
+          <p:cNvPr id="5" name="Rounded Rectangle 4"/>
+          <p:cNvSpPr/>
           <p:nvPr/>
-        </p:nvCxnSpPr>
+        </p:nvSpPr>
         <p:spPr>
           <a:xfrm>
-            <a:off x="6095847" y="2194560"/>
-            <a:ext cx="0" cy="274319"/>
+            <a:off x="4362602" y="1371600"/>
+            <a:ext cx="3466490" cy="822960"/>
           </a:xfrm>
-          <a:prstGeom prst="line">
+          <a:prstGeom prst="roundRect">
             <a:avLst/>
           </a:prstGeom>
-          <a:ln w="19050">
+          <a:solidFill>
+            <a:srgbClr val="3D8B8B"/>
+          </a:solidFill>
+          <a:ln w="12700">
             <a:solidFill>
-              <a:srgbClr val="2E5A88"/>
+              <a:srgbClr val="3D8B8B"/>
             </a:solidFill>
-            <a:tailEnd type="triangle" w="med" len="med"/>
           </a:ln>
         </p:spPr>
         <p:style>
-          <a:lnRef idx="2">
+          <a:lnRef idx="1">
             <a:schemeClr val="accent1"/>
           </a:lnRef>
-          <a:fillRef idx="0">
+          <a:fillRef idx="3">
             <a:schemeClr val="accent1"/>
           </a:fillRef>
-          <a:effectRef idx="1">
+          <a:effectRef idx="2">
             <a:schemeClr val="accent1"/>
           </a:effectRef>
           <a:fontRef idx="minor">
-            <a:schemeClr val="tx1"/>
+            <a:schemeClr val="lt1"/>
           </a:fontRef>
         </p:style>
-      </p:cxnSp>
+        <p:txBody>
+          <a:bodyPr rtlCol="0" anchor="ctr" wrap="square" lIns="201168" rIns="201168" tIns="128016" bIns="128016"/>
+          <a:lstStyle/>
+          <a:p>
+            <a:pPr algn="ctr">
+              <a:defRPr sz="1400" b="1">
+                <a:solidFill>
+                  <a:srgbClr val="FFFFFF"/>
+                </a:solidFill>
+                <a:latin typeface="FangSong"/>
+              </a:defRPr>
+            </a:pPr>
+            <a:r>
+              <a:t>理解三层结构</a:t>
+            </a:r>
+          </a:p>
+        </p:txBody>
+      </p:sp>
       <p:sp>
         <p:nvSpPr>
           <p:cNvPr id="6" name="Rounded Rectangle 5"/>
@@ -9824,8 +9242,63 @@
         </p:nvSpPr>
         <p:spPr>
           <a:xfrm>
-            <a:off x="731520" y="2468879"/>
-            <a:ext cx="10728655" cy="822960"/>
+            <a:off x="7993684" y="1371600"/>
+            <a:ext cx="3466490" cy="822960"/>
+          </a:xfrm>
+          <a:prstGeom prst="roundRect">
+            <a:avLst/>
+          </a:prstGeom>
+          <a:solidFill>
+            <a:srgbClr val="6BC4A6"/>
+          </a:solidFill>
+          <a:ln w="12700">
+            <a:solidFill>
+              <a:srgbClr val="6BC4A6"/>
+            </a:solidFill>
+          </a:ln>
+        </p:spPr>
+        <p:style>
+          <a:lnRef idx="1">
+            <a:schemeClr val="accent1"/>
+          </a:lnRef>
+          <a:fillRef idx="3">
+            <a:schemeClr val="accent1"/>
+          </a:fillRef>
+          <a:effectRef idx="2">
+            <a:schemeClr val="accent1"/>
+          </a:effectRef>
+          <a:fontRef idx="minor">
+            <a:schemeClr val="lt1"/>
+          </a:fontRef>
+        </p:style>
+        <p:txBody>
+          <a:bodyPr rtlCol="0" anchor="ctr" wrap="square" lIns="201168" rIns="201168" tIns="128016" bIns="128016"/>
+          <a:lstStyle/>
+          <a:p>
+            <a:pPr algn="ctr">
+              <a:defRPr sz="1400" b="1">
+                <a:solidFill>
+                  <a:srgbClr val="FFFFFF"/>
+                </a:solidFill>
+                <a:latin typeface="FangSong"/>
+              </a:defRPr>
+            </a:pPr>
+            <a:r>
+              <a:t>练习层间切换</a:t>
+            </a:r>
+          </a:p>
+        </p:txBody>
+      </p:sp>
+      <p:sp>
+        <p:nvSpPr>
+          <p:cNvPr id="7" name="Rounded Rectangle 6"/>
+          <p:cNvSpPr/>
+          <p:nvPr/>
+        </p:nvSpPr>
+        <p:spPr>
+          <a:xfrm>
+            <a:off x="731520" y="2359152"/>
+            <a:ext cx="3466490" cy="822960"/>
           </a:xfrm>
           <a:prstGeom prst="roundRect">
             <a:avLst/>
@@ -9854,7 +9327,7 @@
           </a:fontRef>
         </p:style>
         <p:txBody>
-          <a:bodyPr rtlCol="0" anchor="ctr" wrap="square"/>
+          <a:bodyPr rtlCol="0" anchor="ctr" wrap="square" lIns="201168" rIns="201168" tIns="128016" bIns="128016"/>
           <a:lstStyle/>
           <a:p>
             <a:pPr algn="ctr">
@@ -9867,188 +9340,6 @@
             </a:pPr>
             <a:r>
               <a:t>区分术与道</a:t>
-            </a:r>
-          </a:p>
-        </p:txBody>
-      </p:sp>
-      <p:cxnSp>
-        <p:nvCxnSpPr>
-          <p:cNvPr id="7" name="Connector 6"/>
-          <p:cNvCxnSpPr/>
-          <p:nvPr/>
-        </p:nvCxnSpPr>
-        <p:spPr>
-          <a:xfrm>
-            <a:off x="6095847" y="3291839"/>
-            <a:ext cx="0" cy="274321"/>
-          </a:xfrm>
-          <a:prstGeom prst="line">
-            <a:avLst/>
-          </a:prstGeom>
-          <a:ln w="19050">
-            <a:solidFill>
-              <a:srgbClr val="2E5A88"/>
-            </a:solidFill>
-            <a:tailEnd type="triangle" w="med" len="med"/>
-          </a:ln>
-        </p:spPr>
-        <p:style>
-          <a:lnRef idx="2">
-            <a:schemeClr val="accent1"/>
-          </a:lnRef>
-          <a:fillRef idx="0">
-            <a:schemeClr val="accent1"/>
-          </a:fillRef>
-          <a:effectRef idx="1">
-            <a:schemeClr val="accent1"/>
-          </a:effectRef>
-          <a:fontRef idx="minor">
-            <a:schemeClr val="tx1"/>
-          </a:fontRef>
-        </p:style>
-      </p:cxnSp>
-      <p:sp>
-        <p:nvSpPr>
-          <p:cNvPr id="8" name="Rounded Rectangle 7"/>
-          <p:cNvSpPr/>
-          <p:nvPr/>
-        </p:nvSpPr>
-        <p:spPr>
-          <a:xfrm>
-            <a:off x="731520" y="3566160"/>
-            <a:ext cx="10728655" cy="822960"/>
-          </a:xfrm>
-          <a:prstGeom prst="roundRect">
-            <a:avLst/>
-          </a:prstGeom>
-          <a:solidFill>
-            <a:srgbClr val="3D8B8B"/>
-          </a:solidFill>
-          <a:ln w="12700">
-            <a:solidFill>
-              <a:srgbClr val="3D8B8B"/>
-            </a:solidFill>
-          </a:ln>
-        </p:spPr>
-        <p:style>
-          <a:lnRef idx="1">
-            <a:schemeClr val="accent1"/>
-          </a:lnRef>
-          <a:fillRef idx="3">
-            <a:schemeClr val="accent1"/>
-          </a:fillRef>
-          <a:effectRef idx="2">
-            <a:schemeClr val="accent1"/>
-          </a:effectRef>
-          <a:fontRef idx="minor">
-            <a:schemeClr val="lt1"/>
-          </a:fontRef>
-        </p:style>
-        <p:txBody>
-          <a:bodyPr rtlCol="0" anchor="ctr" wrap="square"/>
-          <a:lstStyle/>
-          <a:p>
-            <a:pPr algn="ctr">
-              <a:defRPr sz="1400" b="1">
-                <a:solidFill>
-                  <a:srgbClr val="FFFFFF"/>
-                </a:solidFill>
-                <a:latin typeface="FangSong"/>
-              </a:defRPr>
-            </a:pPr>
-            <a:r>
-              <a:t>理解三层结构</a:t>
-            </a:r>
-          </a:p>
-        </p:txBody>
-      </p:sp>
-      <p:cxnSp>
-        <p:nvCxnSpPr>
-          <p:cNvPr id="9" name="Connector 8"/>
-          <p:cNvCxnSpPr/>
-          <p:nvPr/>
-        </p:nvCxnSpPr>
-        <p:spPr>
-          <a:xfrm>
-            <a:off x="6095847" y="4389120"/>
-            <a:ext cx="0" cy="274320"/>
-          </a:xfrm>
-          <a:prstGeom prst="line">
-            <a:avLst/>
-          </a:prstGeom>
-          <a:ln w="19050">
-            <a:solidFill>
-              <a:srgbClr val="2E5A88"/>
-            </a:solidFill>
-            <a:tailEnd type="triangle" w="med" len="med"/>
-          </a:ln>
-        </p:spPr>
-        <p:style>
-          <a:lnRef idx="2">
-            <a:schemeClr val="accent1"/>
-          </a:lnRef>
-          <a:fillRef idx="0">
-            <a:schemeClr val="accent1"/>
-          </a:fillRef>
-          <a:effectRef idx="1">
-            <a:schemeClr val="accent1"/>
-          </a:effectRef>
-          <a:fontRef idx="minor">
-            <a:schemeClr val="tx1"/>
-          </a:fontRef>
-        </p:style>
-      </p:cxnSp>
-      <p:sp>
-        <p:nvSpPr>
-          <p:cNvPr id="10" name="Rounded Rectangle 9"/>
-          <p:cNvSpPr/>
-          <p:nvPr/>
-        </p:nvSpPr>
-        <p:spPr>
-          <a:xfrm>
-            <a:off x="731520" y="4663440"/>
-            <a:ext cx="10728655" cy="822960"/>
-          </a:xfrm>
-          <a:prstGeom prst="roundRect">
-            <a:avLst/>
-          </a:prstGeom>
-          <a:solidFill>
-            <a:srgbClr val="6BC4A6"/>
-          </a:solidFill>
-          <a:ln w="12700">
-            <a:solidFill>
-              <a:srgbClr val="6BC4A6"/>
-            </a:solidFill>
-          </a:ln>
-        </p:spPr>
-        <p:style>
-          <a:lnRef idx="1">
-            <a:schemeClr val="accent1"/>
-          </a:lnRef>
-          <a:fillRef idx="3">
-            <a:schemeClr val="accent1"/>
-          </a:fillRef>
-          <a:effectRef idx="2">
-            <a:schemeClr val="accent1"/>
-          </a:effectRef>
-          <a:fontRef idx="minor">
-            <a:schemeClr val="lt1"/>
-          </a:fontRef>
-        </p:style>
-        <p:txBody>
-          <a:bodyPr rtlCol="0" anchor="ctr" wrap="square"/>
-          <a:lstStyle/>
-          <a:p>
-            <a:pPr algn="ctr">
-              <a:defRPr sz="1400" b="1">
-                <a:solidFill>
-                  <a:srgbClr val="FFFFFF"/>
-                </a:solidFill>
-                <a:latin typeface="FangSong"/>
-              </a:defRPr>
-            </a:pPr>
-            <a:r>
-              <a:t>练习层间切换</a:t>
             </a:r>
           </a:p>
         </p:txBody>
@@ -10159,7 +9450,7 @@
         <p:spPr>
           <a:xfrm>
             <a:off x="731520" y="1371600"/>
-            <a:ext cx="1297940" cy="413766"/>
+            <a:ext cx="4434840" cy="413766"/>
           </a:xfrm>
           <a:prstGeom prst="rect">
             <a:avLst/>
@@ -10167,12 +9458,15 @@
           <a:noFill/>
         </p:spPr>
         <p:txBody>
-          <a:bodyPr wrap="square">
+          <a:bodyPr wrap="square" lIns="45720" rIns="45720" tIns="64008" bIns="64008">
             <a:spAutoFit/>
           </a:bodyPr>
           <a:lstStyle/>
           <a:p>
             <a:pPr algn="l">
+              <a:lnSpc>
+                <a:spcPct val="125000"/>
+              </a:lnSpc>
               <a:defRPr sz="1800" b="0" i="0">
                 <a:solidFill>
                   <a:srgbClr val="2C3E50"/>
@@ -10195,7 +9489,7 @@
         <p:spPr>
           <a:xfrm>
             <a:off x="731520" y="2013966"/>
-            <a:ext cx="1297940" cy="413766"/>
+            <a:ext cx="4434840" cy="413766"/>
           </a:xfrm>
           <a:prstGeom prst="rect">
             <a:avLst/>
@@ -10203,12 +9497,15 @@
           <a:noFill/>
         </p:spPr>
         <p:txBody>
-          <a:bodyPr wrap="square">
+          <a:bodyPr wrap="square" lIns="45720" rIns="45720" tIns="64008" bIns="64008">
             <a:spAutoFit/>
           </a:bodyPr>
           <a:lstStyle/>
           <a:p>
             <a:pPr algn="l">
+              <a:lnSpc>
+                <a:spcPct val="125000"/>
+              </a:lnSpc>
               <a:defRPr sz="1800" b="0" i="0">
                 <a:solidFill>
                   <a:srgbClr val="2C3E50"/>
@@ -10231,7 +9528,7 @@
         <p:spPr>
           <a:xfrm>
             <a:off x="731520" y="2656332"/>
-            <a:ext cx="1297940" cy="413766"/>
+            <a:ext cx="4434840" cy="413766"/>
           </a:xfrm>
           <a:prstGeom prst="rect">
             <a:avLst/>
@@ -10239,12 +9536,15 @@
           <a:noFill/>
         </p:spPr>
         <p:txBody>
-          <a:bodyPr wrap="square">
+          <a:bodyPr wrap="square" lIns="45720" rIns="45720" tIns="64008" bIns="64008">
             <a:spAutoFit/>
           </a:bodyPr>
           <a:lstStyle/>
           <a:p>
             <a:pPr algn="l">
+              <a:lnSpc>
+                <a:spcPct val="125000"/>
+              </a:lnSpc>
               <a:defRPr sz="1800" b="0" i="0">
                 <a:solidFill>
                   <a:srgbClr val="2C3E50"/>
@@ -10267,7 +9567,7 @@
         <p:spPr>
           <a:xfrm>
             <a:off x="731520" y="3298698"/>
-            <a:ext cx="1297940" cy="413766"/>
+            <a:ext cx="4434840" cy="413766"/>
           </a:xfrm>
           <a:prstGeom prst="rect">
             <a:avLst/>
@@ -10275,12 +9575,15 @@
           <a:noFill/>
         </p:spPr>
         <p:txBody>
-          <a:bodyPr wrap="square">
+          <a:bodyPr wrap="square" lIns="45720" rIns="45720" tIns="64008" bIns="64008">
             <a:spAutoFit/>
           </a:bodyPr>
           <a:lstStyle/>
           <a:p>
             <a:pPr algn="l">
+              <a:lnSpc>
+                <a:spcPct val="125000"/>
+              </a:lnSpc>
               <a:defRPr sz="1800" b="0" i="0">
                 <a:solidFill>
                   <a:srgbClr val="2C3E50"/>
@@ -10296,7 +9599,7 @@
       </p:sp>
       <p:pic>
         <p:nvPicPr>
-          <p:cNvPr id="8" name="Picture 7" descr="tmphyq3w694.png"/>
+          <p:cNvPr id="8" name="Picture 7" descr="tmpxz_tzqd6.png"/>
           <p:cNvPicPr>
             <a:picLocks noChangeAspect="1"/>
           </p:cNvPicPr>
@@ -10310,7 +9613,7 @@
         </p:blipFill>
         <p:spPr>
           <a:xfrm>
-            <a:off x="2486660" y="1371600"/>
+            <a:off x="5623559" y="1371600"/>
             <a:ext cx="1645920" cy="1645920"/>
           </a:xfrm>
           <a:prstGeom prst="rect">
@@ -10320,59 +9623,14 @@
       </p:pic>
       <p:sp>
         <p:nvSpPr>
-          <p:cNvPr id="9" name="Rectangle 8"/>
-          <p:cNvSpPr/>
+          <p:cNvPr id="9" name="TextBox 8"/>
+          <p:cNvSpPr txBox="1"/>
           <p:nvPr/>
         </p:nvSpPr>
         <p:spPr>
           <a:xfrm>
             <a:off x="731520" y="3986783"/>
-            <a:ext cx="54864" cy="1077722"/>
-          </a:xfrm>
-          <a:prstGeom prst="rect">
-            <a:avLst/>
-          </a:prstGeom>
-          <a:solidFill>
-            <a:srgbClr val="E8805C"/>
-          </a:solidFill>
-          <a:ln w="12700">
-            <a:solidFill>
-              <a:srgbClr val="E8805C"/>
-            </a:solidFill>
-          </a:ln>
-        </p:spPr>
-        <p:style>
-          <a:lnRef idx="1">
-            <a:schemeClr val="accent1"/>
-          </a:lnRef>
-          <a:fillRef idx="3">
-            <a:schemeClr val="accent1"/>
-          </a:fillRef>
-          <a:effectRef idx="2">
-            <a:schemeClr val="accent1"/>
-          </a:effectRef>
-          <a:fontRef idx="minor">
-            <a:schemeClr val="lt1"/>
-          </a:fontRef>
-        </p:style>
-        <p:txBody>
-          <a:bodyPr rtlCol="0" anchor="ctr"/>
-          <a:lstStyle/>
-          <a:p>
-            <a:pPr algn="ctr"/>
-          </a:p>
-        </p:txBody>
-      </p:sp>
-      <p:sp>
-        <p:nvSpPr>
-          <p:cNvPr id="10" name="TextBox 9"/>
-          <p:cNvSpPr txBox="1"/>
-          <p:nvPr/>
-        </p:nvSpPr>
-        <p:spPr>
-          <a:xfrm>
-            <a:off x="923544" y="3986783"/>
-            <a:ext cx="10536631" cy="413766"/>
+            <a:ext cx="10728655" cy="413766"/>
           </a:xfrm>
           <a:prstGeom prst="rect">
             <a:avLst/>
@@ -10380,12 +9638,15 @@
           <a:noFill/>
         </p:spPr>
         <p:txBody>
-          <a:bodyPr wrap="square">
+          <a:bodyPr wrap="square" lIns="45720" rIns="45720" tIns="64008" bIns="64008">
             <a:spAutoFit/>
           </a:bodyPr>
           <a:lstStyle/>
           <a:p>
             <a:pPr algn="l">
+              <a:lnSpc>
+                <a:spcPct val="125000"/>
+              </a:lnSpc>
               <a:defRPr sz="1800" b="1" i="0">
                 <a:solidFill>
                   <a:srgbClr val="E8805C"/>
@@ -10401,14 +9662,14 @@
       </p:sp>
       <p:sp>
         <p:nvSpPr>
-          <p:cNvPr id="11" name="TextBox 10"/>
+          <p:cNvPr id="10" name="TextBox 9"/>
           <p:cNvSpPr txBox="1"/>
           <p:nvPr/>
         </p:nvSpPr>
         <p:spPr>
           <a:xfrm>
-            <a:off x="923544" y="4491990"/>
-            <a:ext cx="10536631" cy="572516"/>
+            <a:off x="731520" y="4473701"/>
+            <a:ext cx="10728655" cy="572516"/>
           </a:xfrm>
           <a:prstGeom prst="rect">
             <a:avLst/>
@@ -10416,12 +9677,15 @@
           <a:noFill/>
         </p:spPr>
         <p:txBody>
-          <a:bodyPr wrap="square">
+          <a:bodyPr wrap="square" lIns="45720" rIns="45720" tIns="64008" bIns="64008">
             <a:spAutoFit/>
           </a:bodyPr>
           <a:lstStyle/>
           <a:p>
             <a:pPr algn="l">
+              <a:lnSpc>
+                <a:spcPct val="125000"/>
+              </a:lnSpc>
               <a:defRPr sz="1400" b="0" i="0">
                 <a:solidFill>
                   <a:srgbClr val="2C3E50"/>
@@ -10435,6 +9699,9 @@
           </a:p>
           <a:p>
             <a:pPr algn="l">
+              <a:lnSpc>
+                <a:spcPct val="125000"/>
+              </a:lnSpc>
               <a:defRPr sz="1400" b="0" i="0">
                 <a:solidFill>
                   <a:srgbClr val="2C3E50"/>
@@ -10545,60 +9812,33 @@
                       </p:childTnLst>
                     </p:cTn>
                   </p:par>
-                  <p:par>
-                    <p:cTn id="10" fill="hold">
-                      <p:stCondLst>
-                        <p:cond delay="0"/>
-                      </p:stCondLst>
-                      <p:childTnLst>
-                        <p:set>
-                          <p:cBhvr>
-                            <p:cTn id="11" dur="1" fill="hold">
-                              <p:stCondLst>
-                                <p:cond delay="0"/>
-                              </p:stCondLst>
-                            </p:cTn>
-                            <p:tgtEl>
-                              <p:spTgt spid="11"/>
-                            </p:tgtEl>
-                            <p:attrNameLst>
-                              <p:attrName>style.visibility</p:attrName>
-                            </p:attrNameLst>
-                          </p:cBhvr>
-                          <p:to>
-                            <p:strVal val="hidden"/>
-                          </p:to>
-                        </p:set>
-                      </p:childTnLst>
-                    </p:cTn>
-                  </p:par>
                 </p:childTnLst>
               </p:cTn>
             </p:par>
             <p:seq concurrent="1" nextAc="seek">
-              <p:cTn id="12" dur="indefinite" nodeType="mainSeq">
+              <p:cTn id="10" dur="indefinite" nodeType="mainSeq">
                 <p:childTnLst>
                   <p:par>
-                    <p:cTn id="13" fill="hold">
+                    <p:cTn id="11" fill="hold">
                       <p:stCondLst>
                         <p:cond delay="indefinite"/>
                       </p:stCondLst>
                       <p:childTnLst>
                         <p:par>
-                          <p:cTn id="14" fill="hold">
+                          <p:cTn id="12" fill="hold">
                             <p:stCondLst>
                               <p:cond delay="0"/>
                             </p:stCondLst>
                             <p:childTnLst>
                               <p:par>
-                                <p:cTn id="15" presetID="10" presetClass="entr" presetSubtype="0" fill="hold" grpId="0" nodeType="clickEffect">
+                                <p:cTn id="13" presetID="10" presetClass="entr" presetSubtype="0" fill="hold" grpId="0" nodeType="clickEffect">
                                   <p:stCondLst>
                                     <p:cond delay="0"/>
                                   </p:stCondLst>
                                   <p:childTnLst>
                                     <p:animEffect transition="in" filter="fade">
                                       <p:cBhvr>
-                                        <p:cTn id="16" dur="500"/>
+                                        <p:cTn id="14" dur="500"/>
                                         <p:tgtEl>
                                           <p:spTgt spid="4"/>
                                         </p:tgtEl>
@@ -10606,7 +9846,7 @@
                                     </p:animEffect>
                                     <p:set>
                                       <p:cBhvr>
-                                        <p:cTn id="17" dur="1" fill="hold">
+                                        <p:cTn id="15" dur="1" fill="hold">
                                           <p:stCondLst>
                                             <p:cond delay="0"/>
                                           </p:stCondLst>
@@ -10626,14 +9866,14 @@
                                 </p:cTn>
                               </p:par>
                               <p:par>
-                                <p:cTn id="18" presetID="10" presetClass="entr" presetSubtype="0" fill="hold" grpId="0" nodeType="withEffect">
+                                <p:cTn id="16" presetID="10" presetClass="entr" presetSubtype="0" fill="hold" grpId="0" nodeType="withEffect">
                                   <p:stCondLst>
                                     <p:cond delay="0"/>
                                   </p:stCondLst>
                                   <p:childTnLst>
                                     <p:animEffect transition="in" filter="fade">
                                       <p:cBhvr>
-                                        <p:cTn id="19" dur="500"/>
+                                        <p:cTn id="17" dur="500"/>
                                         <p:tgtEl>
                                           <p:spTgt spid="5"/>
                                         </p:tgtEl>
@@ -10641,7 +9881,7 @@
                                     </p:animEffect>
                                     <p:set>
                                       <p:cBhvr>
-                                        <p:cTn id="20" dur="1" fill="hold">
+                                        <p:cTn id="18" dur="1" fill="hold">
                                           <p:stCondLst>
                                             <p:cond delay="0"/>
                                           </p:stCondLst>
@@ -10661,14 +9901,14 @@
                                 </p:cTn>
                               </p:par>
                               <p:par>
-                                <p:cTn id="21" presetID="10" presetClass="entr" presetSubtype="0" fill="hold" grpId="0" nodeType="withEffect">
+                                <p:cTn id="19" presetID="10" presetClass="entr" presetSubtype="0" fill="hold" grpId="0" nodeType="withEffect">
                                   <p:stCondLst>
                                     <p:cond delay="0"/>
                                   </p:stCondLst>
                                   <p:childTnLst>
                                     <p:animEffect transition="in" filter="fade">
                                       <p:cBhvr>
-                                        <p:cTn id="22" dur="500"/>
+                                        <p:cTn id="20" dur="500"/>
                                         <p:tgtEl>
                                           <p:spTgt spid="6"/>
                                         </p:tgtEl>
@@ -10676,7 +9916,7 @@
                                     </p:animEffect>
                                     <p:set>
                                       <p:cBhvr>
-                                        <p:cTn id="23" dur="1" fill="hold">
+                                        <p:cTn id="21" dur="1" fill="hold">
                                           <p:stCondLst>
                                             <p:cond delay="0"/>
                                           </p:stCondLst>
@@ -10696,14 +9936,14 @@
                                 </p:cTn>
                               </p:par>
                               <p:par>
-                                <p:cTn id="24" presetID="10" presetClass="entr" presetSubtype="0" fill="hold" grpId="0" nodeType="withEffect">
+                                <p:cTn id="22" presetID="10" presetClass="entr" presetSubtype="0" fill="hold" grpId="0" nodeType="withEffect">
                                   <p:stCondLst>
                                     <p:cond delay="0"/>
                                   </p:stCondLst>
                                   <p:childTnLst>
                                     <p:animEffect transition="in" filter="fade">
                                       <p:cBhvr>
-                                        <p:cTn id="25" dur="500"/>
+                                        <p:cTn id="23" dur="500"/>
                                         <p:tgtEl>
                                           <p:spTgt spid="7"/>
                                         </p:tgtEl>
@@ -10711,7 +9951,7 @@
                                     </p:animEffect>
                                     <p:set>
                                       <p:cBhvr>
-                                        <p:cTn id="26" dur="1" fill="hold">
+                                        <p:cTn id="24" dur="1" fill="hold">
                                           <p:stCondLst>
                                             <p:cond delay="0"/>
                                           </p:stCondLst>
@@ -10737,26 +9977,26 @@
                     </p:cTn>
                   </p:par>
                   <p:par>
-                    <p:cTn id="27" fill="hold">
+                    <p:cTn id="25" fill="hold">
                       <p:stCondLst>
                         <p:cond delay="indefinite"/>
                       </p:stCondLst>
                       <p:childTnLst>
                         <p:par>
-                          <p:cTn id="28" fill="hold">
+                          <p:cTn id="26" fill="hold">
                             <p:stCondLst>
                               <p:cond delay="0"/>
                             </p:stCondLst>
                             <p:childTnLst>
                               <p:par>
-                                <p:cTn id="29" presetID="10" presetClass="entr" presetSubtype="0" fill="hold" grpId="0" nodeType="clickEffect">
+                                <p:cTn id="27" presetID="10" presetClass="entr" presetSubtype="0" fill="hold" grpId="0" nodeType="clickEffect">
                                   <p:stCondLst>
                                     <p:cond delay="0"/>
                                   </p:stCondLst>
                                   <p:childTnLst>
                                     <p:animEffect transition="in" filter="fade">
                                       <p:cBhvr>
-                                        <p:cTn id="30" dur="500"/>
+                                        <p:cTn id="28" dur="500"/>
                                         <p:tgtEl>
                                           <p:spTgt spid="8"/>
                                         </p:tgtEl>
@@ -10764,7 +10004,7 @@
                                     </p:animEffect>
                                     <p:set>
                                       <p:cBhvr>
-                                        <p:cTn id="31" dur="1" fill="hold">
+                                        <p:cTn id="29" dur="1" fill="hold">
                                           <p:stCondLst>
                                             <p:cond delay="0"/>
                                           </p:stCondLst>
@@ -10790,26 +10030,26 @@
                     </p:cTn>
                   </p:par>
                   <p:par>
-                    <p:cTn id="32" fill="hold">
+                    <p:cTn id="30" fill="hold">
                       <p:stCondLst>
                         <p:cond delay="indefinite"/>
                       </p:stCondLst>
                       <p:childTnLst>
                         <p:par>
-                          <p:cTn id="33" fill="hold">
+                          <p:cTn id="31" fill="hold">
                             <p:stCondLst>
                               <p:cond delay="0"/>
                             </p:stCondLst>
                             <p:childTnLst>
                               <p:par>
-                                <p:cTn id="34" presetID="10" presetClass="entr" presetSubtype="0" fill="hold" grpId="0" nodeType="clickEffect">
+                                <p:cTn id="32" presetID="10" presetClass="entr" presetSubtype="0" fill="hold" grpId="0" nodeType="clickEffect">
                                   <p:stCondLst>
                                     <p:cond delay="0"/>
                                   </p:stCondLst>
                                   <p:childTnLst>
                                     <p:animEffect transition="in" filter="fade">
                                       <p:cBhvr>
-                                        <p:cTn id="35" dur="500"/>
+                                        <p:cTn id="33" dur="500"/>
                                         <p:tgtEl>
                                           <p:spTgt spid="9"/>
                                         </p:tgtEl>
@@ -10817,7 +10057,7 @@
                                     </p:animEffect>
                                     <p:set>
                                       <p:cBhvr>
-                                        <p:cTn id="36" dur="1" fill="hold">
+                                        <p:cTn id="34" dur="1" fill="hold">
                                           <p:stCondLst>
                                             <p:cond delay="0"/>
                                           </p:stCondLst>
@@ -10837,14 +10077,14 @@
                                 </p:cTn>
                               </p:par>
                               <p:par>
-                                <p:cTn id="37" presetID="10" presetClass="entr" presetSubtype="0" fill="hold" grpId="0" nodeType="withEffect">
+                                <p:cTn id="35" presetID="10" presetClass="entr" presetSubtype="0" fill="hold" grpId="0" nodeType="withEffect">
                                   <p:stCondLst>
                                     <p:cond delay="0"/>
                                   </p:stCondLst>
                                   <p:childTnLst>
                                     <p:animEffect transition="in" filter="fade">
                                       <p:cBhvr>
-                                        <p:cTn id="38" dur="500"/>
+                                        <p:cTn id="36" dur="500"/>
                                         <p:tgtEl>
                                           <p:spTgt spid="10"/>
                                         </p:tgtEl>
@@ -10852,48 +10092,13 @@
                                     </p:animEffect>
                                     <p:set>
                                       <p:cBhvr>
-                                        <p:cTn id="39" dur="1" fill="hold">
+                                        <p:cTn id="37" dur="1" fill="hold">
                                           <p:stCondLst>
                                             <p:cond delay="0"/>
                                           </p:stCondLst>
                                         </p:cTn>
                                         <p:tgtEl>
                                           <p:spTgt spid="10"/>
-                                        </p:tgtEl>
-                                        <p:attrNameLst>
-                                          <p:attrName>style.visibility</p:attrName>
-                                        </p:attrNameLst>
-                                      </p:cBhvr>
-                                      <p:to>
-                                        <p:strVal val="visible"/>
-                                      </p:to>
-                                    </p:set>
-                                  </p:childTnLst>
-                                </p:cTn>
-                              </p:par>
-                              <p:par>
-                                <p:cTn id="40" presetID="10" presetClass="entr" presetSubtype="0" fill="hold" grpId="0" nodeType="withEffect">
-                                  <p:stCondLst>
-                                    <p:cond delay="0"/>
-                                  </p:stCondLst>
-                                  <p:childTnLst>
-                                    <p:animEffect transition="in" filter="fade">
-                                      <p:cBhvr>
-                                        <p:cTn id="41" dur="500"/>
-                                        <p:tgtEl>
-                                          <p:spTgt spid="11"/>
-                                        </p:tgtEl>
-                                      </p:cBhvr>
-                                    </p:animEffect>
-                                    <p:set>
-                                      <p:cBhvr>
-                                        <p:cTn id="42" dur="1" fill="hold">
-                                          <p:stCondLst>
-                                            <p:cond delay="0"/>
-                                          </p:stCondLst>
-                                        </p:cTn>
-                                        <p:tgtEl>
-                                          <p:spTgt spid="11"/>
                                         </p:tgtEl>
                                         <p:attrNameLst>
                                           <p:attrName>style.visibility</p:attrName>
@@ -10940,6 +10145,14 @@
 <file path=ppt/slides/slide20.xml><?xml version="1.0" encoding="utf-8"?>
 <p:sld xmlns:a="http://schemas.openxmlformats.org/drawingml/2006/main" xmlns:p="http://schemas.openxmlformats.org/presentationml/2006/main" xmlns:r="http://schemas.openxmlformats.org/officeDocument/2006/relationships">
   <p:cSld>
+    <p:bg>
+      <p:bgPr>
+        <a:solidFill>
+          <a:srgbClr val="FAFBFC"/>
+        </a:solidFill>
+        <a:effectLst/>
+      </p:bgPr>
+    </p:bg>
     <p:spTree>
       <p:nvGrpSpPr>
         <p:cNvPr id="1" name=""/>
@@ -10955,8 +10168,8 @@
         </p:nvSpPr>
         <p:spPr>
           <a:xfrm>
-            <a:off x="731520" y="2286000"/>
-            <a:ext cx="10728655" cy="1371600"/>
+            <a:off x="731520" y="1371600"/>
+            <a:ext cx="10728655" cy="604266"/>
           </a:xfrm>
           <a:prstGeom prst="rect">
             <a:avLst/>
@@ -10964,15 +10177,18 @@
           <a:noFill/>
         </p:spPr>
         <p:txBody>
-          <a:bodyPr wrap="square">
+          <a:bodyPr wrap="square" lIns="45720" rIns="45720" tIns="64008" bIns="64008">
             <a:spAutoFit/>
           </a:bodyPr>
           <a:lstStyle/>
           <a:p>
             <a:pPr algn="ctr">
-              <a:defRPr sz="4000" b="1">
+              <a:lnSpc>
+                <a:spcPct val="125000"/>
+              </a:lnSpc>
+              <a:defRPr sz="3000" b="1" i="0">
                 <a:solidFill>
-                  <a:srgbClr val="2C3E50"/>
+                  <a:srgbClr val="2E5A88"/>
                 </a:solidFill>
                 <a:latin typeface="FangSong"/>
               </a:defRPr>
@@ -10985,57 +10201,14 @@
       </p:sp>
       <p:sp>
         <p:nvSpPr>
-          <p:cNvPr id="3" name="Rectangle 2"/>
-          <p:cNvSpPr/>
+          <p:cNvPr id="3" name="TextBox 2"/>
+          <p:cNvSpPr txBox="1"/>
           <p:nvPr/>
         </p:nvSpPr>
         <p:spPr>
           <a:xfrm>
-            <a:off x="5181447" y="3840480"/>
-            <a:ext cx="1828800" cy="45720"/>
-          </a:xfrm>
-          <a:prstGeom prst="rect">
-            <a:avLst/>
-          </a:prstGeom>
-          <a:solidFill>
-            <a:srgbClr val="2E5A88"/>
-          </a:solidFill>
-          <a:ln>
-            <a:noFill/>
-          </a:ln>
-        </p:spPr>
-        <p:style>
-          <a:lnRef idx="1">
-            <a:schemeClr val="accent1"/>
-          </a:lnRef>
-          <a:fillRef idx="3">
-            <a:schemeClr val="accent1"/>
-          </a:fillRef>
-          <a:effectRef idx="2">
-            <a:schemeClr val="accent1"/>
-          </a:effectRef>
-          <a:fontRef idx="minor">
-            <a:schemeClr val="lt1"/>
-          </a:fontRef>
-        </p:style>
-        <p:txBody>
-          <a:bodyPr rtlCol="0" anchor="ctr"/>
-          <a:lstStyle/>
-          <a:p>
-            <a:pPr algn="ctr"/>
-          </a:p>
-        </p:txBody>
-      </p:sp>
-      <p:sp>
-        <p:nvSpPr>
-          <p:cNvPr id="4" name="TextBox 3"/>
-          <p:cNvSpPr txBox="1"/>
-          <p:nvPr/>
-        </p:nvSpPr>
-        <p:spPr>
-          <a:xfrm>
-            <a:off x="731520" y="4114800"/>
-            <a:ext cx="10728655" cy="731520"/>
+            <a:off x="731520" y="2231898"/>
+            <a:ext cx="10728655" cy="413766"/>
           </a:xfrm>
           <a:prstGeom prst="rect">
             <a:avLst/>
@@ -11043,13 +10216,16 @@
           <a:noFill/>
         </p:spPr>
         <p:txBody>
-          <a:bodyPr wrap="square">
+          <a:bodyPr wrap="square" lIns="45720" rIns="45720" tIns="64008" bIns="64008">
             <a:spAutoFit/>
           </a:bodyPr>
           <a:lstStyle/>
           <a:p>
             <a:pPr algn="ctr">
-              <a:defRPr sz="2400">
+              <a:lnSpc>
+                <a:spcPct val="125000"/>
+              </a:lnSpc>
+              <a:defRPr sz="1800" b="0" i="0">
                 <a:solidFill>
                   <a:srgbClr val="7B8FA3"/>
                 </a:solidFill>
@@ -11161,7 +10337,7 @@
       </p:sp>
       <p:pic>
         <p:nvPicPr>
-          <p:cNvPr id="4" name="Picture 3" descr="tmpipvijmjt.png"/>
+          <p:cNvPr id="4" name="Picture 3" descr="tmptt_hxbbg.png"/>
           <p:cNvPicPr>
             <a:picLocks noChangeAspect="1"/>
           </p:cNvPicPr>
@@ -11192,7 +10368,7 @@
         <p:spPr>
           <a:xfrm>
             <a:off x="731520" y="2834640"/>
-            <a:ext cx="1371600" cy="445516"/>
+            <a:ext cx="2047240" cy="445516"/>
           </a:xfrm>
           <a:prstGeom prst="rect">
             <a:avLst/>
@@ -11200,12 +10376,15 @@
           <a:noFill/>
         </p:spPr>
         <p:txBody>
-          <a:bodyPr wrap="square">
+          <a:bodyPr wrap="square" lIns="45720" rIns="45720" tIns="64008" bIns="64008">
             <a:spAutoFit/>
           </a:bodyPr>
           <a:lstStyle/>
           <a:p>
             <a:pPr algn="l">
+              <a:lnSpc>
+                <a:spcPct val="125000"/>
+              </a:lnSpc>
               <a:defRPr sz="2000" b="1" i="0">
                 <a:solidFill>
                   <a:srgbClr val="6BC4A6"/>
@@ -11228,7 +10407,7 @@
         <p:spPr>
           <a:xfrm>
             <a:off x="731520" y="3371596"/>
-            <a:ext cx="1371600" cy="572516"/>
+            <a:ext cx="2047240" cy="572516"/>
           </a:xfrm>
           <a:prstGeom prst="rect">
             <a:avLst/>
@@ -11236,12 +10415,15 @@
           <a:noFill/>
         </p:spPr>
         <p:txBody>
-          <a:bodyPr wrap="square">
+          <a:bodyPr wrap="square" lIns="45720" rIns="45720" tIns="64008" bIns="64008">
             <a:spAutoFit/>
           </a:bodyPr>
           <a:lstStyle/>
           <a:p>
             <a:pPr algn="l">
+              <a:lnSpc>
+                <a:spcPct val="125000"/>
+              </a:lnSpc>
               <a:defRPr sz="1400" b="0" i="0">
                 <a:solidFill>
                   <a:srgbClr val="7B8FA3"/>
@@ -11255,6 +10437,9 @@
           </a:p>
           <a:p>
             <a:pPr algn="l">
+              <a:lnSpc>
+                <a:spcPct val="125000"/>
+              </a:lnSpc>
               <a:defRPr sz="1400" b="0" i="0">
                 <a:solidFill>
                   <a:srgbClr val="7B8FA3"/>
@@ -11276,7 +10461,7 @@
         </p:nvCxnSpPr>
         <p:spPr>
           <a:xfrm>
-            <a:off x="2103120" y="3931920"/>
+            <a:off x="2778760" y="3931920"/>
             <a:ext cx="219456" cy="0"/>
           </a:xfrm>
           <a:prstGeom prst="line">
@@ -11306,7 +10491,7 @@
       </p:cxnSp>
       <p:pic>
         <p:nvPicPr>
-          <p:cNvPr id="8" name="Picture 7" descr="tmpj8qs2xio.png"/>
+          <p:cNvPr id="8" name="Picture 7" descr="tmpkus5loqa.png"/>
           <p:cNvPicPr>
             <a:picLocks noChangeAspect="1"/>
           </p:cNvPicPr>
@@ -11320,7 +10505,7 @@
         </p:blipFill>
         <p:spPr>
           <a:xfrm>
-            <a:off x="2322576" y="1371600"/>
+            <a:off x="2998216" y="1371600"/>
             <a:ext cx="1371600" cy="1371600"/>
           </a:xfrm>
           <a:prstGeom prst="rect">
@@ -11336,8 +10521,8 @@
         </p:nvSpPr>
         <p:spPr>
           <a:xfrm>
-            <a:off x="2322576" y="2834640"/>
-            <a:ext cx="1371600" cy="445516"/>
+            <a:off x="2998216" y="2834640"/>
+            <a:ext cx="1844040" cy="445516"/>
           </a:xfrm>
           <a:prstGeom prst="rect">
             <a:avLst/>
@@ -11345,12 +10530,15 @@
           <a:noFill/>
         </p:spPr>
         <p:txBody>
-          <a:bodyPr wrap="square">
+          <a:bodyPr wrap="square" lIns="45720" rIns="45720" tIns="64008" bIns="64008">
             <a:spAutoFit/>
           </a:bodyPr>
           <a:lstStyle/>
           <a:p>
             <a:pPr algn="l">
+              <a:lnSpc>
+                <a:spcPct val="125000"/>
+              </a:lnSpc>
               <a:defRPr sz="2000" b="1" i="0">
                 <a:solidFill>
                   <a:srgbClr val="3D8B8B"/>
@@ -11372,8 +10560,8 @@
         </p:nvSpPr>
         <p:spPr>
           <a:xfrm>
-            <a:off x="2322576" y="3371596"/>
-            <a:ext cx="1371600" cy="572516"/>
+            <a:off x="2998216" y="3371596"/>
+            <a:ext cx="1844040" cy="572516"/>
           </a:xfrm>
           <a:prstGeom prst="rect">
             <a:avLst/>
@@ -11381,12 +10569,15 @@
           <a:noFill/>
         </p:spPr>
         <p:txBody>
-          <a:bodyPr wrap="square">
+          <a:bodyPr wrap="square" lIns="45720" rIns="45720" tIns="64008" bIns="64008">
             <a:spAutoFit/>
           </a:bodyPr>
           <a:lstStyle/>
           <a:p>
             <a:pPr algn="l">
+              <a:lnSpc>
+                <a:spcPct val="125000"/>
+              </a:lnSpc>
               <a:defRPr sz="1400" b="0" i="0">
                 <a:solidFill>
                   <a:srgbClr val="7B8FA3"/>
@@ -11400,6 +10591,9 @@
           </a:p>
           <a:p>
             <a:pPr algn="l">
+              <a:lnSpc>
+                <a:spcPct val="125000"/>
+              </a:lnSpc>
               <a:defRPr sz="1400" b="0" i="0">
                 <a:solidFill>
                   <a:srgbClr val="7B8FA3"/>
@@ -11421,7 +10615,7 @@
         </p:nvCxnSpPr>
         <p:spPr>
           <a:xfrm>
-            <a:off x="3694176" y="3931920"/>
+            <a:off x="4842256" y="3931920"/>
             <a:ext cx="219456" cy="0"/>
           </a:xfrm>
           <a:prstGeom prst="line">
@@ -11451,7 +10645,7 @@
       </p:cxnSp>
       <p:pic>
         <p:nvPicPr>
-          <p:cNvPr id="12" name="Picture 11" descr="tmphkwplr67.png"/>
+          <p:cNvPr id="12" name="Picture 11" descr="tmp8b_7x90n.png"/>
           <p:cNvPicPr>
             <a:picLocks noChangeAspect="1"/>
           </p:cNvPicPr>
@@ -11465,7 +10659,7 @@
         </p:blipFill>
         <p:spPr>
           <a:xfrm>
-            <a:off x="3913632" y="1371600"/>
+            <a:off x="5061712" y="1371600"/>
             <a:ext cx="1371600" cy="1371600"/>
           </a:xfrm>
           <a:prstGeom prst="rect">
@@ -11481,8 +10675,8 @@
         </p:nvSpPr>
         <p:spPr>
           <a:xfrm>
-            <a:off x="3913632" y="2834640"/>
-            <a:ext cx="1371600" cy="445516"/>
+            <a:off x="5061712" y="2834640"/>
+            <a:ext cx="2110740" cy="445516"/>
           </a:xfrm>
           <a:prstGeom prst="rect">
             <a:avLst/>
@@ -11490,12 +10684,15 @@
           <a:noFill/>
         </p:spPr>
         <p:txBody>
-          <a:bodyPr wrap="square">
+          <a:bodyPr wrap="square" lIns="45720" rIns="45720" tIns="64008" bIns="64008">
             <a:spAutoFit/>
           </a:bodyPr>
           <a:lstStyle/>
           <a:p>
             <a:pPr algn="l">
+              <a:lnSpc>
+                <a:spcPct val="125000"/>
+              </a:lnSpc>
               <a:defRPr sz="2000" b="1" i="0">
                 <a:solidFill>
                   <a:srgbClr val="2E5A88"/>
@@ -11517,8 +10714,8 @@
         </p:nvSpPr>
         <p:spPr>
           <a:xfrm>
-            <a:off x="3913632" y="3371596"/>
-            <a:ext cx="1371600" cy="572516"/>
+            <a:off x="5061712" y="3371596"/>
+            <a:ext cx="2110740" cy="572516"/>
           </a:xfrm>
           <a:prstGeom prst="rect">
             <a:avLst/>
@@ -11526,12 +10723,15 @@
           <a:noFill/>
         </p:spPr>
         <p:txBody>
-          <a:bodyPr wrap="square">
+          <a:bodyPr wrap="square" lIns="45720" rIns="45720" tIns="64008" bIns="64008">
             <a:spAutoFit/>
           </a:bodyPr>
           <a:lstStyle/>
           <a:p>
             <a:pPr algn="l">
+              <a:lnSpc>
+                <a:spcPct val="125000"/>
+              </a:lnSpc>
               <a:defRPr sz="1400" b="0" i="0">
                 <a:solidFill>
                   <a:srgbClr val="7B8FA3"/>
@@ -11545,6 +10745,9 @@
           </a:p>
           <a:p>
             <a:pPr algn="l">
+              <a:lnSpc>
+                <a:spcPct val="125000"/>
+              </a:lnSpc>
               <a:defRPr sz="1400" b="0" i="0">
                 <a:solidFill>
                   <a:srgbClr val="7B8FA3"/>
@@ -13015,7 +12218,7 @@
         <p:spPr>
           <a:xfrm>
             <a:off x="969264" y="1371600"/>
-            <a:ext cx="281940" cy="350266"/>
+            <a:ext cx="624840" cy="350266"/>
           </a:xfrm>
           <a:prstGeom prst="rect">
             <a:avLst/>
@@ -13023,12 +12226,15 @@
           <a:noFill/>
         </p:spPr>
         <p:txBody>
-          <a:bodyPr wrap="square">
+          <a:bodyPr wrap="square" lIns="45720" rIns="45720" tIns="64008" bIns="64008">
             <a:spAutoFit/>
           </a:bodyPr>
           <a:lstStyle/>
           <a:p>
             <a:pPr algn="l">
+              <a:lnSpc>
+                <a:spcPct val="125000"/>
+              </a:lnSpc>
               <a:defRPr sz="1400" b="1" i="0">
                 <a:solidFill>
                   <a:srgbClr val="2C3E50"/>
@@ -13051,7 +12257,7 @@
         <p:spPr>
           <a:xfrm>
             <a:off x="731520" y="1859025"/>
-            <a:ext cx="767079" cy="2109978"/>
+            <a:ext cx="995679" cy="2998978"/>
           </a:xfrm>
           <a:prstGeom prst="rect">
             <a:avLst/>
@@ -13059,12 +12265,15 @@
           <a:noFill/>
         </p:spPr>
         <p:txBody>
-          <a:bodyPr wrap="square">
+          <a:bodyPr wrap="square" tIns="54864" bIns="54864">
             <a:spAutoFit/>
           </a:bodyPr>
           <a:lstStyle/>
           <a:p>
             <a:pPr>
+              <a:lnSpc>
+                <a:spcPct val="125000"/>
+              </a:lnSpc>
               <a:defRPr sz="1400">
                 <a:solidFill>
                   <a:srgbClr val="2C3E50"/>
@@ -13079,6 +12288,9 @@
           </a:p>
           <a:p>
             <a:pPr>
+              <a:lnSpc>
+                <a:spcPct val="125000"/>
+              </a:lnSpc>
               <a:defRPr sz="1400">
                 <a:solidFill>
                   <a:srgbClr val="2C3E50"/>
@@ -13093,6 +12305,9 @@
           </a:p>
           <a:p>
             <a:pPr>
+              <a:lnSpc>
+                <a:spcPct val="125000"/>
+              </a:lnSpc>
               <a:defRPr sz="1400">
                 <a:solidFill>
                   <a:srgbClr val="2C3E50"/>
@@ -13107,6 +12322,9 @@
           </a:p>
           <a:p>
             <a:pPr>
+              <a:lnSpc>
+                <a:spcPct val="125000"/>
+              </a:lnSpc>
               <a:defRPr sz="1400">
                 <a:solidFill>
                   <a:srgbClr val="2C3E50"/>
@@ -13129,8 +12347,8 @@
         </p:nvCxnSpPr>
         <p:spPr>
           <a:xfrm>
-            <a:off x="1498600" y="3931920"/>
-            <a:ext cx="219456" cy="0"/>
+            <a:off x="1727200" y="3931920"/>
+            <a:ext cx="219455" cy="0"/>
           </a:xfrm>
           <a:prstGeom prst="line">
             <a:avLst/>
@@ -13165,7 +12383,7 @@
         </p:nvSpPr>
         <p:spPr>
           <a:xfrm>
-            <a:off x="1718056" y="1371600"/>
+            <a:off x="1946655" y="1371600"/>
             <a:ext cx="164592" cy="164592"/>
           </a:xfrm>
           <a:prstGeom prst="roundRect">
@@ -13210,8 +12428,8 @@
         </p:nvSpPr>
         <p:spPr>
           <a:xfrm>
-            <a:off x="1955800" y="1371600"/>
-            <a:ext cx="281940" cy="350266"/>
+            <a:off x="2184399" y="1371600"/>
+            <a:ext cx="624840" cy="350266"/>
           </a:xfrm>
           <a:prstGeom prst="rect">
             <a:avLst/>
@@ -13219,12 +12437,15 @@
           <a:noFill/>
         </p:spPr>
         <p:txBody>
-          <a:bodyPr wrap="square">
+          <a:bodyPr wrap="square" lIns="45720" rIns="45720" tIns="64008" bIns="64008">
             <a:spAutoFit/>
           </a:bodyPr>
           <a:lstStyle/>
           <a:p>
             <a:pPr algn="l">
+              <a:lnSpc>
+                <a:spcPct val="125000"/>
+              </a:lnSpc>
               <a:defRPr sz="1400" b="1" i="0">
                 <a:solidFill>
                   <a:srgbClr val="2C3E50"/>
@@ -13246,8 +12467,8 @@
         </p:nvSpPr>
         <p:spPr>
           <a:xfrm>
-            <a:off x="1718056" y="1859025"/>
-            <a:ext cx="678180" cy="1665478"/>
+            <a:off x="1946655" y="1859025"/>
+            <a:ext cx="906780" cy="2332228"/>
           </a:xfrm>
           <a:prstGeom prst="rect">
             <a:avLst/>
@@ -13255,12 +12476,15 @@
           <a:noFill/>
         </p:spPr>
         <p:txBody>
-          <a:bodyPr wrap="square">
+          <a:bodyPr wrap="square" tIns="54864" bIns="54864">
             <a:spAutoFit/>
           </a:bodyPr>
           <a:lstStyle/>
           <a:p>
             <a:pPr>
+              <a:lnSpc>
+                <a:spcPct val="125000"/>
+              </a:lnSpc>
               <a:defRPr sz="1400">
                 <a:solidFill>
                   <a:srgbClr val="2C3E50"/>
@@ -13275,6 +12499,9 @@
           </a:p>
           <a:p>
             <a:pPr>
+              <a:lnSpc>
+                <a:spcPct val="125000"/>
+              </a:lnSpc>
               <a:defRPr sz="1400">
                 <a:solidFill>
                   <a:srgbClr val="2C3E50"/>
@@ -13289,6 +12516,9 @@
           </a:p>
           <a:p>
             <a:pPr>
+              <a:lnSpc>
+                <a:spcPct val="125000"/>
+              </a:lnSpc>
               <a:defRPr sz="1400">
                 <a:solidFill>
                   <a:srgbClr val="2C3E50"/>
@@ -13311,7 +12541,7 @@
         </p:nvCxnSpPr>
         <p:spPr>
           <a:xfrm>
-            <a:off x="2396236" y="3931920"/>
+            <a:off x="2853436" y="3931920"/>
             <a:ext cx="219456" cy="0"/>
           </a:xfrm>
           <a:prstGeom prst="line">
@@ -13347,7 +12577,7 @@
         </p:nvSpPr>
         <p:spPr>
           <a:xfrm>
-            <a:off x="2615692" y="1371600"/>
+            <a:off x="3072892" y="1371600"/>
             <a:ext cx="164592" cy="164592"/>
           </a:xfrm>
           <a:prstGeom prst="roundRect">
@@ -13392,8 +12622,8 @@
         </p:nvSpPr>
         <p:spPr>
           <a:xfrm>
-            <a:off x="2853436" y="1371600"/>
-            <a:ext cx="281940" cy="350266"/>
+            <a:off x="3310636" y="1371600"/>
+            <a:ext cx="624840" cy="350266"/>
           </a:xfrm>
           <a:prstGeom prst="rect">
             <a:avLst/>
@@ -13401,12 +12631,15 @@
           <a:noFill/>
         </p:spPr>
         <p:txBody>
-          <a:bodyPr wrap="square">
+          <a:bodyPr wrap="square" lIns="45720" rIns="45720" tIns="64008" bIns="64008">
             <a:spAutoFit/>
           </a:bodyPr>
           <a:lstStyle/>
           <a:p>
             <a:pPr algn="l">
+              <a:lnSpc>
+                <a:spcPct val="125000"/>
+              </a:lnSpc>
               <a:defRPr sz="1400" b="1" i="0">
                 <a:solidFill>
                   <a:srgbClr val="2C3E50"/>
@@ -13428,8 +12661,8 @@
         </p:nvSpPr>
         <p:spPr>
           <a:xfrm>
-            <a:off x="2615692" y="1859025"/>
-            <a:ext cx="881379" cy="1443227"/>
+            <a:off x="3072892" y="1859025"/>
+            <a:ext cx="1173480" cy="1443227"/>
           </a:xfrm>
           <a:prstGeom prst="rect">
             <a:avLst/>
@@ -13437,12 +12670,15 @@
           <a:noFill/>
         </p:spPr>
         <p:txBody>
-          <a:bodyPr wrap="square">
+          <a:bodyPr wrap="square" tIns="54864" bIns="54864">
             <a:spAutoFit/>
           </a:bodyPr>
           <a:lstStyle/>
           <a:p>
             <a:pPr>
+              <a:lnSpc>
+                <a:spcPct val="125000"/>
+              </a:lnSpc>
               <a:defRPr sz="1400">
                 <a:solidFill>
                   <a:srgbClr val="2C3E50"/>
@@ -13457,6 +12693,9 @@
           </a:p>
           <a:p>
             <a:pPr>
+              <a:lnSpc>
+                <a:spcPct val="125000"/>
+              </a:lnSpc>
               <a:defRPr sz="1400">
                 <a:solidFill>
                   <a:srgbClr val="2C3E50"/>
@@ -14540,59 +13779,14 @@
       </p:graphicFrame>
       <p:sp>
         <p:nvSpPr>
-          <p:cNvPr id="5" name="Rectangle 4"/>
-          <p:cNvSpPr/>
+          <p:cNvPr id="5" name="TextBox 4"/>
+          <p:cNvSpPr txBox="1"/>
           <p:nvPr/>
         </p:nvSpPr>
         <p:spPr>
           <a:xfrm>
             <a:off x="731520" y="3703320"/>
-            <a:ext cx="54864" cy="855472"/>
-          </a:xfrm>
-          <a:prstGeom prst="rect">
-            <a:avLst/>
-          </a:prstGeom>
-          <a:solidFill>
-            <a:srgbClr val="E8805C"/>
-          </a:solidFill>
-          <a:ln w="12700">
-            <a:solidFill>
-              <a:srgbClr val="E8805C"/>
-            </a:solidFill>
-          </a:ln>
-        </p:spPr>
-        <p:style>
-          <a:lnRef idx="1">
-            <a:schemeClr val="accent1"/>
-          </a:lnRef>
-          <a:fillRef idx="3">
-            <a:schemeClr val="accent1"/>
-          </a:fillRef>
-          <a:effectRef idx="2">
-            <a:schemeClr val="accent1"/>
-          </a:effectRef>
-          <a:fontRef idx="minor">
-            <a:schemeClr val="lt1"/>
-          </a:fontRef>
-        </p:style>
-        <p:txBody>
-          <a:bodyPr rtlCol="0" anchor="ctr"/>
-          <a:lstStyle/>
-          <a:p>
-            <a:pPr algn="ctr"/>
-          </a:p>
-        </p:txBody>
-      </p:sp>
-      <p:sp>
-        <p:nvSpPr>
-          <p:cNvPr id="6" name="TextBox 5"/>
-          <p:cNvSpPr txBox="1"/>
-          <p:nvPr/>
-        </p:nvSpPr>
-        <p:spPr>
-          <a:xfrm>
-            <a:off x="923544" y="3703320"/>
-            <a:ext cx="10536631" cy="413766"/>
+            <a:ext cx="10728655" cy="413766"/>
           </a:xfrm>
           <a:prstGeom prst="rect">
             <a:avLst/>
@@ -14600,12 +13794,15 @@
           <a:noFill/>
         </p:spPr>
         <p:txBody>
-          <a:bodyPr wrap="square">
+          <a:bodyPr wrap="square" lIns="45720" rIns="45720" tIns="64008" bIns="64008">
             <a:spAutoFit/>
           </a:bodyPr>
           <a:lstStyle/>
           <a:p>
             <a:pPr algn="l">
+              <a:lnSpc>
+                <a:spcPct val="125000"/>
+              </a:lnSpc>
               <a:defRPr sz="1800" b="1" i="0">
                 <a:solidFill>
                   <a:srgbClr val="E8805C"/>
@@ -14621,14 +13818,14 @@
       </p:sp>
       <p:sp>
         <p:nvSpPr>
-          <p:cNvPr id="7" name="TextBox 6"/>
+          <p:cNvPr id="6" name="TextBox 5"/>
           <p:cNvSpPr txBox="1"/>
           <p:nvPr/>
         </p:nvSpPr>
         <p:spPr>
           <a:xfrm>
-            <a:off x="923544" y="4208526"/>
-            <a:ext cx="10536631" cy="350266"/>
+            <a:off x="731520" y="4190237"/>
+            <a:ext cx="10728655" cy="350266"/>
           </a:xfrm>
           <a:prstGeom prst="rect">
             <a:avLst/>
@@ -14636,12 +13833,15 @@
           <a:noFill/>
         </p:spPr>
         <p:txBody>
-          <a:bodyPr wrap="square">
+          <a:bodyPr wrap="square" lIns="45720" rIns="45720" tIns="64008" bIns="64008">
             <a:spAutoFit/>
           </a:bodyPr>
           <a:lstStyle/>
           <a:p>
             <a:pPr algn="l">
+              <a:lnSpc>
+                <a:spcPct val="125000"/>
+              </a:lnSpc>
               <a:defRPr sz="1400" b="0" i="0">
                 <a:solidFill>
                   <a:srgbClr val="2C3E50"/>
@@ -14725,60 +13925,33 @@
                       </p:childTnLst>
                     </p:cTn>
                   </p:par>
-                  <p:par>
-                    <p:cTn id="8" fill="hold">
-                      <p:stCondLst>
-                        <p:cond delay="0"/>
-                      </p:stCondLst>
-                      <p:childTnLst>
-                        <p:set>
-                          <p:cBhvr>
-                            <p:cTn id="9" dur="1" fill="hold">
-                              <p:stCondLst>
-                                <p:cond delay="0"/>
-                              </p:stCondLst>
-                            </p:cTn>
-                            <p:tgtEl>
-                              <p:spTgt spid="7"/>
-                            </p:tgtEl>
-                            <p:attrNameLst>
-                              <p:attrName>style.visibility</p:attrName>
-                            </p:attrNameLst>
-                          </p:cBhvr>
-                          <p:to>
-                            <p:strVal val="hidden"/>
-                          </p:to>
-                        </p:set>
-                      </p:childTnLst>
-                    </p:cTn>
-                  </p:par>
                 </p:childTnLst>
               </p:cTn>
             </p:par>
             <p:seq concurrent="1" nextAc="seek">
-              <p:cTn id="10" dur="indefinite" nodeType="mainSeq">
+              <p:cTn id="8" dur="indefinite" nodeType="mainSeq">
                 <p:childTnLst>
                   <p:par>
-                    <p:cTn id="11" fill="hold">
+                    <p:cTn id="9" fill="hold">
                       <p:stCondLst>
                         <p:cond delay="indefinite"/>
                       </p:stCondLst>
                       <p:childTnLst>
                         <p:par>
-                          <p:cTn id="12" fill="hold">
+                          <p:cTn id="10" fill="hold">
                             <p:stCondLst>
                               <p:cond delay="0"/>
                             </p:stCondLst>
                             <p:childTnLst>
                               <p:par>
-                                <p:cTn id="13" presetID="10" presetClass="entr" presetSubtype="0" fill="hold" grpId="0" nodeType="clickEffect">
+                                <p:cTn id="11" presetID="10" presetClass="entr" presetSubtype="0" fill="hold" grpId="0" nodeType="clickEffect">
                                   <p:stCondLst>
                                     <p:cond delay="0"/>
                                   </p:stCondLst>
                                   <p:childTnLst>
                                     <p:animEffect transition="in" filter="fade">
                                       <p:cBhvr>
-                                        <p:cTn id="14" dur="500"/>
+                                        <p:cTn id="12" dur="500"/>
                                         <p:tgtEl>
                                           <p:spTgt spid="4"/>
                                         </p:tgtEl>
@@ -14786,7 +13959,7 @@
                                     </p:animEffect>
                                     <p:set>
                                       <p:cBhvr>
-                                        <p:cTn id="15" dur="1" fill="hold">
+                                        <p:cTn id="13" dur="1" fill="hold">
                                           <p:stCondLst>
                                             <p:cond delay="0"/>
                                           </p:stCondLst>
@@ -14812,26 +13985,26 @@
                     </p:cTn>
                   </p:par>
                   <p:par>
-                    <p:cTn id="16" fill="hold">
+                    <p:cTn id="14" fill="hold">
                       <p:stCondLst>
                         <p:cond delay="indefinite"/>
                       </p:stCondLst>
                       <p:childTnLst>
                         <p:par>
-                          <p:cTn id="17" fill="hold">
+                          <p:cTn id="15" fill="hold">
                             <p:stCondLst>
                               <p:cond delay="0"/>
                             </p:stCondLst>
                             <p:childTnLst>
                               <p:par>
-                                <p:cTn id="18" presetID="10" presetClass="entr" presetSubtype="0" fill="hold" grpId="0" nodeType="clickEffect">
+                                <p:cTn id="16" presetID="10" presetClass="entr" presetSubtype="0" fill="hold" grpId="0" nodeType="clickEffect">
                                   <p:stCondLst>
                                     <p:cond delay="0"/>
                                   </p:stCondLst>
                                   <p:childTnLst>
                                     <p:animEffect transition="in" filter="fade">
                                       <p:cBhvr>
-                                        <p:cTn id="19" dur="500"/>
+                                        <p:cTn id="17" dur="500"/>
                                         <p:tgtEl>
                                           <p:spTgt spid="5"/>
                                         </p:tgtEl>
@@ -14839,7 +14012,7 @@
                                     </p:animEffect>
                                     <p:set>
                                       <p:cBhvr>
-                                        <p:cTn id="20" dur="1" fill="hold">
+                                        <p:cTn id="18" dur="1" fill="hold">
                                           <p:stCondLst>
                                             <p:cond delay="0"/>
                                           </p:stCondLst>
@@ -14859,14 +14032,14 @@
                                 </p:cTn>
                               </p:par>
                               <p:par>
-                                <p:cTn id="21" presetID="10" presetClass="entr" presetSubtype="0" fill="hold" grpId="0" nodeType="withEffect">
+                                <p:cTn id="19" presetID="10" presetClass="entr" presetSubtype="0" fill="hold" grpId="0" nodeType="withEffect">
                                   <p:stCondLst>
                                     <p:cond delay="0"/>
                                   </p:stCondLst>
                                   <p:childTnLst>
                                     <p:animEffect transition="in" filter="fade">
                                       <p:cBhvr>
-                                        <p:cTn id="22" dur="500"/>
+                                        <p:cTn id="20" dur="500"/>
                                         <p:tgtEl>
                                           <p:spTgt spid="6"/>
                                         </p:tgtEl>
@@ -14874,48 +14047,13 @@
                                     </p:animEffect>
                                     <p:set>
                                       <p:cBhvr>
-                                        <p:cTn id="23" dur="1" fill="hold">
+                                        <p:cTn id="21" dur="1" fill="hold">
                                           <p:stCondLst>
                                             <p:cond delay="0"/>
                                           </p:stCondLst>
                                         </p:cTn>
                                         <p:tgtEl>
                                           <p:spTgt spid="6"/>
-                                        </p:tgtEl>
-                                        <p:attrNameLst>
-                                          <p:attrName>style.visibility</p:attrName>
-                                        </p:attrNameLst>
-                                      </p:cBhvr>
-                                      <p:to>
-                                        <p:strVal val="visible"/>
-                                      </p:to>
-                                    </p:set>
-                                  </p:childTnLst>
-                                </p:cTn>
-                              </p:par>
-                              <p:par>
-                                <p:cTn id="24" presetID="10" presetClass="entr" presetSubtype="0" fill="hold" grpId="0" nodeType="withEffect">
-                                  <p:stCondLst>
-                                    <p:cond delay="0"/>
-                                  </p:stCondLst>
-                                  <p:childTnLst>
-                                    <p:animEffect transition="in" filter="fade">
-                                      <p:cBhvr>
-                                        <p:cTn id="25" dur="500"/>
-                                        <p:tgtEl>
-                                          <p:spTgt spid="7"/>
-                                        </p:tgtEl>
-                                      </p:cBhvr>
-                                    </p:animEffect>
-                                    <p:set>
-                                      <p:cBhvr>
-                                        <p:cTn id="26" dur="1" fill="hold">
-                                          <p:stCondLst>
-                                            <p:cond delay="0"/>
-                                          </p:stCondLst>
-                                        </p:cTn>
-                                        <p:tgtEl>
-                                          <p:spTgt spid="7"/>
                                         </p:tgtEl>
                                         <p:attrNameLst>
                                           <p:attrName>style.visibility</p:attrName>
@@ -14962,6 +14100,14 @@
 <file path=ppt/slides/slide7.xml><?xml version="1.0" encoding="utf-8"?>
 <p:sld xmlns:a="http://schemas.openxmlformats.org/drawingml/2006/main" xmlns:p="http://schemas.openxmlformats.org/presentationml/2006/main" xmlns:r="http://schemas.openxmlformats.org/officeDocument/2006/relationships">
   <p:cSld>
+    <p:bg>
+      <p:bgPr>
+        <a:solidFill>
+          <a:srgbClr val="F0F4F8"/>
+        </a:solidFill>
+        <a:effectLst/>
+      </p:bgPr>
+    </p:bg>
     <p:spTree>
       <p:nvGrpSpPr>
         <p:cNvPr id="1" name=""/>
@@ -14977,8 +14123,8 @@
         </p:nvSpPr>
         <p:spPr>
           <a:xfrm>
-            <a:off x="731520" y="2286000"/>
-            <a:ext cx="10728655" cy="1371600"/>
+            <a:off x="731520" y="1371600"/>
+            <a:ext cx="10728655" cy="540766"/>
           </a:xfrm>
           <a:prstGeom prst="rect">
             <a:avLst/>
@@ -14986,15 +14132,18 @@
           <a:noFill/>
         </p:spPr>
         <p:txBody>
-          <a:bodyPr wrap="square">
+          <a:bodyPr wrap="square" lIns="45720" rIns="45720" tIns="64008" bIns="64008">
             <a:spAutoFit/>
           </a:bodyPr>
           <a:lstStyle/>
           <a:p>
             <a:pPr algn="ctr">
-              <a:defRPr sz="3600" b="1">
+              <a:lnSpc>
+                <a:spcPct val="125000"/>
+              </a:lnSpc>
+              <a:defRPr sz="2600" b="1" i="0">
                 <a:solidFill>
-                  <a:srgbClr val="2C3E50"/>
+                  <a:srgbClr val="2E5A88"/>
                 </a:solidFill>
                 <a:latin typeface="FangSong"/>
               </a:defRPr>
@@ -15013,8 +14162,8 @@
         </p:nvSpPr>
         <p:spPr>
           <a:xfrm>
-            <a:off x="731520" y="3840480"/>
-            <a:ext cx="10728655" cy="914400"/>
+            <a:off x="731520" y="2076957"/>
+            <a:ext cx="10728655" cy="413766"/>
           </a:xfrm>
           <a:prstGeom prst="rect">
             <a:avLst/>
@@ -15022,13 +14171,16 @@
           <a:noFill/>
         </p:spPr>
         <p:txBody>
-          <a:bodyPr wrap="square">
+          <a:bodyPr wrap="square" lIns="45720" rIns="45720" tIns="64008" bIns="64008">
             <a:spAutoFit/>
           </a:bodyPr>
           <a:lstStyle/>
           <a:p>
             <a:pPr algn="ctr">
-              <a:defRPr sz="1800">
+              <a:lnSpc>
+                <a:spcPct val="125000"/>
+              </a:lnSpc>
+              <a:defRPr sz="1800" b="0" i="0">
                 <a:solidFill>
                   <a:srgbClr val="7B8FA3"/>
                 </a:solidFill>
@@ -15155,12 +14307,15 @@
           <a:noFill/>
         </p:spPr>
         <p:txBody>
-          <a:bodyPr wrap="square">
+          <a:bodyPr wrap="square" lIns="45720" rIns="45720" tIns="64008" bIns="64008">
             <a:spAutoFit/>
           </a:bodyPr>
           <a:lstStyle/>
           <a:p>
             <a:pPr algn="l">
+              <a:lnSpc>
+                <a:spcPct val="125000"/>
+              </a:lnSpc>
               <a:defRPr sz="2000" b="1" i="0">
                 <a:solidFill>
                   <a:srgbClr val="2C3E50"/>
@@ -15183,7 +14338,7 @@
         <p:spPr>
           <a:xfrm>
             <a:off x="731520" y="3081527"/>
-            <a:ext cx="592836" cy="749808"/>
+            <a:ext cx="935736" cy="749808"/>
           </a:xfrm>
           <a:prstGeom prst="roundRect">
             <a:avLst/>
@@ -15193,7 +14348,7 @@
           </a:solidFill>
           <a:ln w="12700">
             <a:solidFill>
-              <a:srgbClr val="E2E8F0"/>
+              <a:srgbClr val="6BC4A6"/>
             </a:solidFill>
           </a:ln>
         </p:spPr>
@@ -15212,13 +14367,13 @@
           </a:fontRef>
         </p:style>
         <p:txBody>
-          <a:bodyPr rtlCol="0" anchor="ctr" wrap="square"/>
+          <a:bodyPr rtlCol="0" anchor="ctr" wrap="square" lIns="201168" rIns="201168" tIns="128016" bIns="128016"/>
           <a:lstStyle/>
           <a:p>
             <a:pPr algn="ctr">
-              <a:defRPr sz="1400" b="0">
+              <a:defRPr sz="1400" b="1">
                 <a:solidFill>
-                  <a:srgbClr val="2C3E50"/>
+                  <a:srgbClr val="FFFFFF"/>
                 </a:solidFill>
                 <a:latin typeface="FangSong"/>
               </a:defRPr>
@@ -15237,8 +14392,8 @@
         </p:nvCxnSpPr>
         <p:spPr>
           <a:xfrm>
-            <a:off x="1324356" y="3456432"/>
-            <a:ext cx="475488" cy="0"/>
+            <a:off x="1667256" y="3456432"/>
+            <a:ext cx="274320" cy="0"/>
           </a:xfrm>
           <a:prstGeom prst="line">
             <a:avLst/>
@@ -15273,8 +14428,8 @@
         </p:nvSpPr>
         <p:spPr>
           <a:xfrm>
-            <a:off x="1799844" y="3081527"/>
-            <a:ext cx="592836" cy="749808"/>
+            <a:off x="1941576" y="3081527"/>
+            <a:ext cx="935736" cy="749808"/>
           </a:xfrm>
           <a:prstGeom prst="roundRect">
             <a:avLst/>
@@ -15284,7 +14439,7 @@
           </a:solidFill>
           <a:ln w="12700">
             <a:solidFill>
-              <a:srgbClr val="E2E8F0"/>
+              <a:srgbClr val="3D8B8B"/>
             </a:solidFill>
           </a:ln>
         </p:spPr>
@@ -15303,13 +14458,13 @@
           </a:fontRef>
         </p:style>
         <p:txBody>
-          <a:bodyPr rtlCol="0" anchor="ctr" wrap="square"/>
+          <a:bodyPr rtlCol="0" anchor="ctr" wrap="square" lIns="201168" rIns="201168" tIns="128016" bIns="128016"/>
           <a:lstStyle/>
           <a:p>
             <a:pPr algn="ctr">
-              <a:defRPr sz="1400" b="0">
+              <a:defRPr sz="1400" b="1">
                 <a:solidFill>
-                  <a:srgbClr val="2C3E50"/>
+                  <a:srgbClr val="FFFFFF"/>
                 </a:solidFill>
                 <a:latin typeface="FangSong"/>
               </a:defRPr>
@@ -15328,8 +14483,8 @@
         </p:nvCxnSpPr>
         <p:spPr>
           <a:xfrm>
-            <a:off x="2392680" y="3456432"/>
-            <a:ext cx="475488" cy="0"/>
+            <a:off x="2877312" y="3456432"/>
+            <a:ext cx="274320" cy="0"/>
           </a:xfrm>
           <a:prstGeom prst="line">
             <a:avLst/>
@@ -15364,8 +14519,8 @@
         </p:nvSpPr>
         <p:spPr>
           <a:xfrm>
-            <a:off x="2868168" y="3081527"/>
-            <a:ext cx="592836" cy="749808"/>
+            <a:off x="3151632" y="3081527"/>
+            <a:ext cx="935736" cy="749808"/>
           </a:xfrm>
           <a:prstGeom prst="roundRect">
             <a:avLst/>
@@ -15375,7 +14530,7 @@
           </a:solidFill>
           <a:ln w="12700">
             <a:solidFill>
-              <a:srgbClr val="E2E8F0"/>
+              <a:srgbClr val="2E5A88"/>
             </a:solidFill>
           </a:ln>
         </p:spPr>
@@ -15394,13 +14549,13 @@
           </a:fontRef>
         </p:style>
         <p:txBody>
-          <a:bodyPr rtlCol="0" anchor="ctr" wrap="square"/>
+          <a:bodyPr rtlCol="0" anchor="ctr" wrap="square" lIns="201168" rIns="201168" tIns="128016" bIns="128016"/>
           <a:lstStyle/>
           <a:p>
             <a:pPr algn="ctr">
-              <a:defRPr sz="1400" b="0">
+              <a:defRPr sz="1400" b="1">
                 <a:solidFill>
-                  <a:srgbClr val="2C3E50"/>
+                  <a:srgbClr val="FFFFFF"/>
                 </a:solidFill>
                 <a:latin typeface="FangSong"/>
               </a:defRPr>
@@ -15428,12 +14583,15 @@
           <a:noFill/>
         </p:spPr>
         <p:txBody>
-          <a:bodyPr wrap="square">
+          <a:bodyPr wrap="square" lIns="45720" rIns="45720" tIns="64008" bIns="64008">
             <a:spAutoFit/>
           </a:bodyPr>
           <a:lstStyle/>
           <a:p>
             <a:pPr algn="l">
+              <a:lnSpc>
+                <a:spcPct val="125000"/>
+              </a:lnSpc>
               <a:defRPr sz="2000" b="1" i="0">
                 <a:solidFill>
                   <a:srgbClr val="2C3E50"/>
@@ -15456,7 +14614,7 @@
         <p:spPr>
           <a:xfrm>
             <a:off x="731520" y="4679188"/>
-            <a:ext cx="592836" cy="749808"/>
+            <a:ext cx="935736" cy="749808"/>
           </a:xfrm>
           <a:prstGeom prst="roundRect">
             <a:avLst/>
@@ -15466,7 +14624,7 @@
           </a:solidFill>
           <a:ln w="12700">
             <a:solidFill>
-              <a:srgbClr val="E2E8F0"/>
+              <a:srgbClr val="2E5A88"/>
             </a:solidFill>
           </a:ln>
         </p:spPr>
@@ -15485,13 +14643,13 @@
           </a:fontRef>
         </p:style>
         <p:txBody>
-          <a:bodyPr rtlCol="0" anchor="ctr" wrap="square"/>
+          <a:bodyPr rtlCol="0" anchor="ctr" wrap="square" lIns="201168" rIns="201168" tIns="128016" bIns="128016"/>
           <a:lstStyle/>
           <a:p>
             <a:pPr algn="ctr">
-              <a:defRPr sz="1400" b="0">
+              <a:defRPr sz="1400" b="1">
                 <a:solidFill>
-                  <a:srgbClr val="2C3E50"/>
+                  <a:srgbClr val="FFFFFF"/>
                 </a:solidFill>
                 <a:latin typeface="FangSong"/>
               </a:defRPr>
@@ -15510,8 +14668,8 @@
         </p:nvCxnSpPr>
         <p:spPr>
           <a:xfrm>
-            <a:off x="1324356" y="5054092"/>
-            <a:ext cx="475488" cy="0"/>
+            <a:off x="1667256" y="5054092"/>
+            <a:ext cx="274320" cy="0"/>
           </a:xfrm>
           <a:prstGeom prst="line">
             <a:avLst/>
@@ -15546,8 +14704,8 @@
         </p:nvSpPr>
         <p:spPr>
           <a:xfrm>
-            <a:off x="1799844" y="4679188"/>
-            <a:ext cx="592836" cy="749808"/>
+            <a:off x="1941576" y="4679188"/>
+            <a:ext cx="935736" cy="749808"/>
           </a:xfrm>
           <a:prstGeom prst="roundRect">
             <a:avLst/>
@@ -15557,7 +14715,7 @@
           </a:solidFill>
           <a:ln w="12700">
             <a:solidFill>
-              <a:srgbClr val="E2E8F0"/>
+              <a:srgbClr val="3D8B8B"/>
             </a:solidFill>
           </a:ln>
         </p:spPr>
@@ -15576,13 +14734,13 @@
           </a:fontRef>
         </p:style>
         <p:txBody>
-          <a:bodyPr rtlCol="0" anchor="ctr" wrap="square"/>
+          <a:bodyPr rtlCol="0" anchor="ctr" wrap="square" lIns="201168" rIns="201168" tIns="128016" bIns="128016"/>
           <a:lstStyle/>
           <a:p>
             <a:pPr algn="ctr">
-              <a:defRPr sz="1400" b="0">
+              <a:defRPr sz="1400" b="1">
                 <a:solidFill>
-                  <a:srgbClr val="2C3E50"/>
+                  <a:srgbClr val="FFFFFF"/>
                 </a:solidFill>
                 <a:latin typeface="FangSong"/>
               </a:defRPr>
@@ -15601,8 +14759,8 @@
         </p:nvCxnSpPr>
         <p:spPr>
           <a:xfrm>
-            <a:off x="2392680" y="5054092"/>
-            <a:ext cx="475488" cy="0"/>
+            <a:off x="2877312" y="5054092"/>
+            <a:ext cx="274320" cy="0"/>
           </a:xfrm>
           <a:prstGeom prst="line">
             <a:avLst/>
@@ -15637,8 +14795,8 @@
         </p:nvSpPr>
         <p:spPr>
           <a:xfrm>
-            <a:off x="2868168" y="4679188"/>
-            <a:ext cx="592836" cy="749808"/>
+            <a:off x="3151632" y="4679188"/>
+            <a:ext cx="935736" cy="749808"/>
           </a:xfrm>
           <a:prstGeom prst="roundRect">
             <a:avLst/>
@@ -15648,7 +14806,7 @@
           </a:solidFill>
           <a:ln w="12700">
             <a:solidFill>
-              <a:srgbClr val="E2E8F0"/>
+              <a:srgbClr val="6BC4A6"/>
             </a:solidFill>
           </a:ln>
         </p:spPr>
@@ -15667,13 +14825,13 @@
           </a:fontRef>
         </p:style>
         <p:txBody>
-          <a:bodyPr rtlCol="0" anchor="ctr" wrap="square"/>
+          <a:bodyPr rtlCol="0" anchor="ctr" wrap="square" lIns="201168" rIns="201168" tIns="128016" bIns="128016"/>
           <a:lstStyle/>
           <a:p>
             <a:pPr algn="ctr">
-              <a:defRPr sz="1400" b="0">
+              <a:defRPr sz="1400" b="1">
                 <a:solidFill>
-                  <a:srgbClr val="2C3E50"/>
+                  <a:srgbClr val="FFFFFF"/>
                 </a:solidFill>
                 <a:latin typeface="FangSong"/>
               </a:defRPr>
@@ -15686,7 +14844,7 @@
       </p:sp>
       <p:pic>
         <p:nvPicPr>
-          <p:cNvPr id="16" name="Picture 15" descr="tmpkur6j0nb.png"/>
+          <p:cNvPr id="16" name="Picture 15" descr="tmp4mdxt2c9.png"/>
           <p:cNvPicPr>
             <a:picLocks noChangeAspect="1"/>
           </p:cNvPicPr>
@@ -15765,7 +14923,7 @@
                               </p:stCondLst>
                             </p:cTn>
                             <p:tgtEl>
-                              <p:spTgt spid="7"/>
+                              <p:spTgt spid="11"/>
                             </p:tgtEl>
                             <p:attrNameLst>
                               <p:attrName>style.visibility</p:attrName>
@@ -15792,7 +14950,7 @@
                               </p:stCondLst>
                             </p:cTn>
                             <p:tgtEl>
-                              <p:spTgt spid="11"/>
+                              <p:spTgt spid="12"/>
                             </p:tgtEl>
                             <p:attrNameLst>
                               <p:attrName>style.visibility</p:attrName>
@@ -15819,7 +14977,7 @@
                               </p:stCondLst>
                             </p:cTn>
                             <p:tgtEl>
-                              <p:spTgt spid="12"/>
+                              <p:spTgt spid="13"/>
                             </p:tgtEl>
                             <p:attrNameLst>
                               <p:attrName>style.visibility</p:attrName>
@@ -15846,7 +15004,7 @@
                               </p:stCondLst>
                             </p:cTn>
                             <p:tgtEl>
-                              <p:spTgt spid="13"/>
+                              <p:spTgt spid="14"/>
                             </p:tgtEl>
                             <p:attrNameLst>
                               <p:attrName>style.visibility</p:attrName>
@@ -15873,7 +15031,7 @@
                               </p:stCondLst>
                             </p:cTn>
                             <p:tgtEl>
-                              <p:spTgt spid="5"/>
+                              <p:spTgt spid="15"/>
                             </p:tgtEl>
                             <p:attrNameLst>
                               <p:attrName>style.visibility</p:attrName>
@@ -15900,60 +15058,6 @@
                               </p:stCondLst>
                             </p:cTn>
                             <p:tgtEl>
-                              <p:spTgt spid="14"/>
-                            </p:tgtEl>
-                            <p:attrNameLst>
-                              <p:attrName>style.visibility</p:attrName>
-                            </p:attrNameLst>
-                          </p:cBhvr>
-                          <p:to>
-                            <p:strVal val="hidden"/>
-                          </p:to>
-                        </p:set>
-                      </p:childTnLst>
-                    </p:cTn>
-                  </p:par>
-                  <p:par>
-                    <p:cTn id="18" fill="hold">
-                      <p:stCondLst>
-                        <p:cond delay="0"/>
-                      </p:stCondLst>
-                      <p:childTnLst>
-                        <p:set>
-                          <p:cBhvr>
-                            <p:cTn id="19" dur="1" fill="hold">
-                              <p:stCondLst>
-                                <p:cond delay="0"/>
-                              </p:stCondLst>
-                            </p:cTn>
-                            <p:tgtEl>
-                              <p:spTgt spid="15"/>
-                            </p:tgtEl>
-                            <p:attrNameLst>
-                              <p:attrName>style.visibility</p:attrName>
-                            </p:attrNameLst>
-                          </p:cBhvr>
-                          <p:to>
-                            <p:strVal val="hidden"/>
-                          </p:to>
-                        </p:set>
-                      </p:childTnLst>
-                    </p:cTn>
-                  </p:par>
-                  <p:par>
-                    <p:cTn id="20" fill="hold">
-                      <p:stCondLst>
-                        <p:cond delay="0"/>
-                      </p:stCondLst>
-                      <p:childTnLst>
-                        <p:set>
-                          <p:cBhvr>
-                            <p:cTn id="21" dur="1" fill="hold">
-                              <p:stCondLst>
-                                <p:cond delay="0"/>
-                              </p:stCondLst>
-                            </p:cTn>
-                            <p:tgtEl>
                               <p:spTgt spid="16"/>
                             </p:tgtEl>
                             <p:attrNameLst>
@@ -15971,29 +15075,29 @@
               </p:cTn>
             </p:par>
             <p:seq concurrent="1" nextAc="seek">
-              <p:cTn id="22" dur="indefinite" nodeType="mainSeq">
+              <p:cTn id="18" dur="indefinite" nodeType="mainSeq">
                 <p:childTnLst>
                   <p:par>
-                    <p:cTn id="23" fill="hold">
+                    <p:cTn id="19" fill="hold">
                       <p:stCondLst>
                         <p:cond delay="indefinite"/>
                       </p:stCondLst>
                       <p:childTnLst>
                         <p:par>
-                          <p:cTn id="24" fill="hold">
+                          <p:cTn id="20" fill="hold">
                             <p:stCondLst>
                               <p:cond delay="0"/>
                             </p:stCondLst>
                             <p:childTnLst>
                               <p:par>
-                                <p:cTn id="25" presetID="10" presetClass="entr" presetSubtype="0" fill="hold" grpId="0" nodeType="clickEffect">
+                                <p:cTn id="21" presetID="10" presetClass="entr" presetSubtype="0" fill="hold" grpId="0" nodeType="clickEffect">
                                   <p:stCondLst>
                                     <p:cond delay="0"/>
                                   </p:stCondLst>
                                   <p:childTnLst>
                                     <p:animEffect transition="in" filter="fade">
                                       <p:cBhvr>
-                                        <p:cTn id="26" dur="500"/>
+                                        <p:cTn id="22" dur="500"/>
                                         <p:tgtEl>
                                           <p:spTgt spid="4"/>
                                         </p:tgtEl>
@@ -16001,7 +15105,7 @@
                                     </p:animEffect>
                                     <p:set>
                                       <p:cBhvr>
-                                        <p:cTn id="27" dur="1" fill="hold">
+                                        <p:cTn id="23" dur="1" fill="hold">
                                           <p:stCondLst>
                                             <p:cond delay="0"/>
                                           </p:stCondLst>
@@ -16021,14 +15125,14 @@
                                 </p:cTn>
                               </p:par>
                               <p:par>
-                                <p:cTn id="28" presetID="10" presetClass="entr" presetSubtype="0" fill="hold" grpId="0" nodeType="withEffect">
+                                <p:cTn id="24" presetID="10" presetClass="entr" presetSubtype="0" fill="hold" grpId="0" nodeType="withEffect">
                                   <p:stCondLst>
                                     <p:cond delay="0"/>
                                   </p:stCondLst>
                                   <p:childTnLst>
                                     <p:animEffect transition="in" filter="fade">
                                       <p:cBhvr>
-                                        <p:cTn id="29" dur="500"/>
+                                        <p:cTn id="25" dur="500"/>
                                         <p:tgtEl>
                                           <p:spTgt spid="5"/>
                                         </p:tgtEl>
@@ -16036,7 +15140,7 @@
                                     </p:animEffect>
                                     <p:set>
                                       <p:cBhvr>
-                                        <p:cTn id="30" dur="1" fill="hold">
+                                        <p:cTn id="26" dur="1" fill="hold">
                                           <p:stCondLst>
                                             <p:cond delay="0"/>
                                           </p:stCondLst>
@@ -16056,14 +15160,14 @@
                                 </p:cTn>
                               </p:par>
                               <p:par>
-                                <p:cTn id="31" presetID="10" presetClass="entr" presetSubtype="0" fill="hold" grpId="0" nodeType="withEffect">
+                                <p:cTn id="27" presetID="10" presetClass="entr" presetSubtype="0" fill="hold" grpId="0" nodeType="withEffect">
                                   <p:stCondLst>
                                     <p:cond delay="0"/>
                                   </p:stCondLst>
                                   <p:childTnLst>
                                     <p:animEffect transition="in" filter="fade">
                                       <p:cBhvr>
-                                        <p:cTn id="32" dur="500"/>
+                                        <p:cTn id="28" dur="500"/>
                                         <p:tgtEl>
                                           <p:spTgt spid="6"/>
                                         </p:tgtEl>
@@ -16071,7 +15175,7 @@
                                     </p:animEffect>
                                     <p:set>
                                       <p:cBhvr>
-                                        <p:cTn id="33" dur="1" fill="hold">
+                                        <p:cTn id="29" dur="1" fill="hold">
                                           <p:stCondLst>
                                             <p:cond delay="0"/>
                                           </p:stCondLst>
@@ -16091,14 +15195,14 @@
                                 </p:cTn>
                               </p:par>
                               <p:par>
-                                <p:cTn id="34" presetID="10" presetClass="entr" presetSubtype="0" fill="hold" grpId="0" nodeType="withEffect">
+                                <p:cTn id="30" presetID="10" presetClass="entr" presetSubtype="0" fill="hold" grpId="0" nodeType="withEffect">
                                   <p:stCondLst>
                                     <p:cond delay="0"/>
                                   </p:stCondLst>
                                   <p:childTnLst>
                                     <p:animEffect transition="in" filter="fade">
                                       <p:cBhvr>
-                                        <p:cTn id="35" dur="500"/>
+                                        <p:cTn id="31" dur="500"/>
                                         <p:tgtEl>
                                           <p:spTgt spid="7"/>
                                         </p:tgtEl>
@@ -16106,7 +15210,7 @@
                                     </p:animEffect>
                                     <p:set>
                                       <p:cBhvr>
-                                        <p:cTn id="36" dur="1" fill="hold">
+                                        <p:cTn id="32" dur="1" fill="hold">
                                           <p:stCondLst>
                                             <p:cond delay="0"/>
                                           </p:stCondLst>
@@ -16126,14 +15230,14 @@
                                 </p:cTn>
                               </p:par>
                               <p:par>
-                                <p:cTn id="37" presetID="10" presetClass="entr" presetSubtype="0" fill="hold" grpId="0" nodeType="withEffect">
+                                <p:cTn id="33" presetID="10" presetClass="entr" presetSubtype="0" fill="hold" grpId="0" nodeType="withEffect">
                                   <p:stCondLst>
                                     <p:cond delay="0"/>
                                   </p:stCondLst>
                                   <p:childTnLst>
                                     <p:animEffect transition="in" filter="fade">
                                       <p:cBhvr>
-                                        <p:cTn id="38" dur="500"/>
+                                        <p:cTn id="34" dur="500"/>
                                         <p:tgtEl>
                                           <p:spTgt spid="8"/>
                                         </p:tgtEl>
@@ -16141,7 +15245,7 @@
                                     </p:animEffect>
                                     <p:set>
                                       <p:cBhvr>
-                                        <p:cTn id="39" dur="1" fill="hold">
+                                        <p:cTn id="35" dur="1" fill="hold">
                                           <p:stCondLst>
                                             <p:cond delay="0"/>
                                           </p:stCondLst>
@@ -16161,14 +15265,14 @@
                                 </p:cTn>
                               </p:par>
                               <p:par>
-                                <p:cTn id="40" presetID="10" presetClass="entr" presetSubtype="0" fill="hold" grpId="0" nodeType="withEffect">
+                                <p:cTn id="36" presetID="10" presetClass="entr" presetSubtype="0" fill="hold" grpId="0" nodeType="withEffect">
                                   <p:stCondLst>
                                     <p:cond delay="0"/>
                                   </p:stCondLst>
                                   <p:childTnLst>
                                     <p:animEffect transition="in" filter="fade">
                                       <p:cBhvr>
-                                        <p:cTn id="41" dur="500"/>
+                                        <p:cTn id="37" dur="500"/>
                                         <p:tgtEl>
                                           <p:spTgt spid="9"/>
                                         </p:tgtEl>
@@ -16176,7 +15280,7 @@
                                     </p:animEffect>
                                     <p:set>
                                       <p:cBhvr>
-                                        <p:cTn id="42" dur="1" fill="hold">
+                                        <p:cTn id="38" dur="1" fill="hold">
                                           <p:stCondLst>
                                             <p:cond delay="0"/>
                                           </p:stCondLst>
@@ -16202,26 +15306,26 @@
                     </p:cTn>
                   </p:par>
                   <p:par>
-                    <p:cTn id="43" fill="hold">
+                    <p:cTn id="39" fill="hold">
                       <p:stCondLst>
                         <p:cond delay="indefinite"/>
                       </p:stCondLst>
                       <p:childTnLst>
                         <p:par>
-                          <p:cTn id="44" fill="hold">
+                          <p:cTn id="40" fill="hold">
                             <p:stCondLst>
                               <p:cond delay="0"/>
                             </p:stCondLst>
                             <p:childTnLst>
                               <p:par>
-                                <p:cTn id="45" presetID="10" presetClass="entr" presetSubtype="0" fill="hold" grpId="0" nodeType="clickEffect">
+                                <p:cTn id="41" presetID="10" presetClass="entr" presetSubtype="0" fill="hold" grpId="0" nodeType="clickEffect">
                                   <p:stCondLst>
                                     <p:cond delay="0"/>
                                   </p:stCondLst>
                                   <p:childTnLst>
                                     <p:animEffect transition="in" filter="fade">
                                       <p:cBhvr>
-                                        <p:cTn id="46" dur="500"/>
+                                        <p:cTn id="42" dur="500"/>
                                         <p:tgtEl>
                                           <p:spTgt spid="10"/>
                                         </p:tgtEl>
@@ -16229,7 +15333,7 @@
                                     </p:animEffect>
                                     <p:set>
                                       <p:cBhvr>
-                                        <p:cTn id="47" dur="1" fill="hold">
+                                        <p:cTn id="43" dur="1" fill="hold">
                                           <p:stCondLst>
                                             <p:cond delay="0"/>
                                           </p:stCondLst>
@@ -16249,28 +15353,28 @@
                                 </p:cTn>
                               </p:par>
                               <p:par>
-                                <p:cTn id="48" presetID="10" presetClass="entr" presetSubtype="0" fill="hold" grpId="0" nodeType="withEffect">
+                                <p:cTn id="44" presetID="10" presetClass="entr" presetSubtype="0" fill="hold" grpId="0" nodeType="withEffect">
                                   <p:stCondLst>
                                     <p:cond delay="0"/>
                                   </p:stCondLst>
                                   <p:childTnLst>
                                     <p:animEffect transition="in" filter="fade">
                                       <p:cBhvr>
-                                        <p:cTn id="49" dur="500"/>
-                                        <p:tgtEl>
-                                          <p:spTgt spid="7"/>
+                                        <p:cTn id="45" dur="500"/>
+                                        <p:tgtEl>
+                                          <p:spTgt spid="11"/>
                                         </p:tgtEl>
                                       </p:cBhvr>
                                     </p:animEffect>
                                     <p:set>
                                       <p:cBhvr>
-                                        <p:cTn id="50" dur="1" fill="hold">
+                                        <p:cTn id="46" dur="1" fill="hold">
                                           <p:stCondLst>
                                             <p:cond delay="0"/>
                                           </p:stCondLst>
                                         </p:cTn>
                                         <p:tgtEl>
-                                          <p:spTgt spid="7"/>
+                                          <p:spTgt spid="11"/>
                                         </p:tgtEl>
                                         <p:attrNameLst>
                                           <p:attrName>style.visibility</p:attrName>
@@ -16284,28 +15388,28 @@
                                 </p:cTn>
                               </p:par>
                               <p:par>
-                                <p:cTn id="51" presetID="10" presetClass="entr" presetSubtype="0" fill="hold" grpId="0" nodeType="withEffect">
+                                <p:cTn id="47" presetID="10" presetClass="entr" presetSubtype="0" fill="hold" grpId="0" nodeType="withEffect">
                                   <p:stCondLst>
                                     <p:cond delay="0"/>
                                   </p:stCondLst>
                                   <p:childTnLst>
                                     <p:animEffect transition="in" filter="fade">
                                       <p:cBhvr>
-                                        <p:cTn id="52" dur="500"/>
-                                        <p:tgtEl>
-                                          <p:spTgt spid="11"/>
+                                        <p:cTn id="48" dur="500"/>
+                                        <p:tgtEl>
+                                          <p:spTgt spid="12"/>
                                         </p:tgtEl>
                                       </p:cBhvr>
                                     </p:animEffect>
                                     <p:set>
                                       <p:cBhvr>
-                                        <p:cTn id="53" dur="1" fill="hold">
+                                        <p:cTn id="49" dur="1" fill="hold">
                                           <p:stCondLst>
                                             <p:cond delay="0"/>
                                           </p:stCondLst>
                                         </p:cTn>
                                         <p:tgtEl>
-                                          <p:spTgt spid="11"/>
+                                          <p:spTgt spid="12"/>
                                         </p:tgtEl>
                                         <p:attrNameLst>
                                           <p:attrName>style.visibility</p:attrName>
@@ -16319,28 +15423,28 @@
                                 </p:cTn>
                               </p:par>
                               <p:par>
-                                <p:cTn id="54" presetID="10" presetClass="entr" presetSubtype="0" fill="hold" grpId="0" nodeType="withEffect">
+                                <p:cTn id="50" presetID="10" presetClass="entr" presetSubtype="0" fill="hold" grpId="0" nodeType="withEffect">
                                   <p:stCondLst>
                                     <p:cond delay="0"/>
                                   </p:stCondLst>
                                   <p:childTnLst>
                                     <p:animEffect transition="in" filter="fade">
                                       <p:cBhvr>
-                                        <p:cTn id="55" dur="500"/>
-                                        <p:tgtEl>
-                                          <p:spTgt spid="12"/>
+                                        <p:cTn id="51" dur="500"/>
+                                        <p:tgtEl>
+                                          <p:spTgt spid="13"/>
                                         </p:tgtEl>
                                       </p:cBhvr>
                                     </p:animEffect>
                                     <p:set>
                                       <p:cBhvr>
-                                        <p:cTn id="56" dur="1" fill="hold">
+                                        <p:cTn id="52" dur="1" fill="hold">
                                           <p:stCondLst>
                                             <p:cond delay="0"/>
                                           </p:stCondLst>
                                         </p:cTn>
                                         <p:tgtEl>
-                                          <p:spTgt spid="12"/>
+                                          <p:spTgt spid="13"/>
                                         </p:tgtEl>
                                         <p:attrNameLst>
                                           <p:attrName>style.visibility</p:attrName>
@@ -16354,28 +15458,28 @@
                                 </p:cTn>
                               </p:par>
                               <p:par>
-                                <p:cTn id="57" presetID="10" presetClass="entr" presetSubtype="0" fill="hold" grpId="0" nodeType="withEffect">
+                                <p:cTn id="53" presetID="10" presetClass="entr" presetSubtype="0" fill="hold" grpId="0" nodeType="withEffect">
                                   <p:stCondLst>
                                     <p:cond delay="0"/>
                                   </p:stCondLst>
                                   <p:childTnLst>
                                     <p:animEffect transition="in" filter="fade">
                                       <p:cBhvr>
-                                        <p:cTn id="58" dur="500"/>
-                                        <p:tgtEl>
-                                          <p:spTgt spid="13"/>
+                                        <p:cTn id="54" dur="500"/>
+                                        <p:tgtEl>
+                                          <p:spTgt spid="14"/>
                                         </p:tgtEl>
                                       </p:cBhvr>
                                     </p:animEffect>
                                     <p:set>
                                       <p:cBhvr>
-                                        <p:cTn id="59" dur="1" fill="hold">
+                                        <p:cTn id="55" dur="1" fill="hold">
                                           <p:stCondLst>
                                             <p:cond delay="0"/>
                                           </p:stCondLst>
                                         </p:cTn>
                                         <p:tgtEl>
-                                          <p:spTgt spid="13"/>
+                                          <p:spTgt spid="14"/>
                                         </p:tgtEl>
                                         <p:attrNameLst>
                                           <p:attrName>style.visibility</p:attrName>
@@ -16389,92 +15493,22 @@
                                 </p:cTn>
                               </p:par>
                               <p:par>
-                                <p:cTn id="60" presetID="10" presetClass="entr" presetSubtype="0" fill="hold" grpId="0" nodeType="withEffect">
+                                <p:cTn id="56" presetID="10" presetClass="entr" presetSubtype="0" fill="hold" grpId="0" nodeType="withEffect">
                                   <p:stCondLst>
                                     <p:cond delay="0"/>
                                   </p:stCondLst>
                                   <p:childTnLst>
                                     <p:animEffect transition="in" filter="fade">
                                       <p:cBhvr>
-                                        <p:cTn id="61" dur="500"/>
-                                        <p:tgtEl>
-                                          <p:spTgt spid="5"/>
+                                        <p:cTn id="57" dur="500"/>
+                                        <p:tgtEl>
+                                          <p:spTgt spid="15"/>
                                         </p:tgtEl>
                                       </p:cBhvr>
                                     </p:animEffect>
                                     <p:set>
                                       <p:cBhvr>
-                                        <p:cTn id="62" dur="1" fill="hold">
-                                          <p:stCondLst>
-                                            <p:cond delay="0"/>
-                                          </p:stCondLst>
-                                        </p:cTn>
-                                        <p:tgtEl>
-                                          <p:spTgt spid="5"/>
-                                        </p:tgtEl>
-                                        <p:attrNameLst>
-                                          <p:attrName>style.visibility</p:attrName>
-                                        </p:attrNameLst>
-                                      </p:cBhvr>
-                                      <p:to>
-                                        <p:strVal val="visible"/>
-                                      </p:to>
-                                    </p:set>
-                                  </p:childTnLst>
-                                </p:cTn>
-                              </p:par>
-                              <p:par>
-                                <p:cTn id="63" presetID="10" presetClass="entr" presetSubtype="0" fill="hold" grpId="0" nodeType="withEffect">
-                                  <p:stCondLst>
-                                    <p:cond delay="0"/>
-                                  </p:stCondLst>
-                                  <p:childTnLst>
-                                    <p:animEffect transition="in" filter="fade">
-                                      <p:cBhvr>
-                                        <p:cTn id="64" dur="500"/>
-                                        <p:tgtEl>
-                                          <p:spTgt spid="14"/>
-                                        </p:tgtEl>
-                                      </p:cBhvr>
-                                    </p:animEffect>
-                                    <p:set>
-                                      <p:cBhvr>
-                                        <p:cTn id="65" dur="1" fill="hold">
-                                          <p:stCondLst>
-                                            <p:cond delay="0"/>
-                                          </p:stCondLst>
-                                        </p:cTn>
-                                        <p:tgtEl>
-                                          <p:spTgt spid="14"/>
-                                        </p:tgtEl>
-                                        <p:attrNameLst>
-                                          <p:attrName>style.visibility</p:attrName>
-                                        </p:attrNameLst>
-                                      </p:cBhvr>
-                                      <p:to>
-                                        <p:strVal val="visible"/>
-                                      </p:to>
-                                    </p:set>
-                                  </p:childTnLst>
-                                </p:cTn>
-                              </p:par>
-                              <p:par>
-                                <p:cTn id="66" presetID="10" presetClass="entr" presetSubtype="0" fill="hold" grpId="0" nodeType="withEffect">
-                                  <p:stCondLst>
-                                    <p:cond delay="0"/>
-                                  </p:stCondLst>
-                                  <p:childTnLst>
-                                    <p:animEffect transition="in" filter="fade">
-                                      <p:cBhvr>
-                                        <p:cTn id="67" dur="500"/>
-                                        <p:tgtEl>
-                                          <p:spTgt spid="15"/>
-                                        </p:tgtEl>
-                                      </p:cBhvr>
-                                    </p:animEffect>
-                                    <p:set>
-                                      <p:cBhvr>
-                                        <p:cTn id="68" dur="1" fill="hold">
+                                        <p:cTn id="58" dur="1" fill="hold">
                                           <p:stCondLst>
                                             <p:cond delay="0"/>
                                           </p:stCondLst>
@@ -16500,26 +15534,26 @@
                     </p:cTn>
                   </p:par>
                   <p:par>
-                    <p:cTn id="69" fill="hold">
+                    <p:cTn id="59" fill="hold">
                       <p:stCondLst>
                         <p:cond delay="indefinite"/>
                       </p:stCondLst>
                       <p:childTnLst>
                         <p:par>
-                          <p:cTn id="70" fill="hold">
+                          <p:cTn id="60" fill="hold">
                             <p:stCondLst>
                               <p:cond delay="0"/>
                             </p:stCondLst>
                             <p:childTnLst>
                               <p:par>
-                                <p:cTn id="71" presetID="10" presetClass="entr" presetSubtype="0" fill="hold" grpId="0" nodeType="clickEffect">
+                                <p:cTn id="61" presetID="10" presetClass="entr" presetSubtype="0" fill="hold" grpId="0" nodeType="clickEffect">
                                   <p:stCondLst>
                                     <p:cond delay="0"/>
                                   </p:stCondLst>
                                   <p:childTnLst>
                                     <p:animEffect transition="in" filter="fade">
                                       <p:cBhvr>
-                                        <p:cTn id="72" dur="500"/>
+                                        <p:cTn id="62" dur="500"/>
                                         <p:tgtEl>
                                           <p:spTgt spid="16"/>
                                         </p:tgtEl>
@@ -16527,7 +15561,7 @@
                                     </p:animEffect>
                                     <p:set>
                                       <p:cBhvr>
-                                        <p:cTn id="73" dur="1" fill="hold">
+                                        <p:cTn id="63" dur="1" fill="hold">
                                           <p:stCondLst>
                                             <p:cond delay="0"/>
                                           </p:stCondLst>
@@ -16668,59 +15702,14 @@
       </p:sp>
       <p:sp>
         <p:nvSpPr>
-          <p:cNvPr id="4" name="Rectangle 3"/>
-          <p:cNvSpPr/>
+          <p:cNvPr id="4" name="TextBox 3"/>
+          <p:cNvSpPr txBox="1"/>
           <p:nvPr/>
         </p:nvSpPr>
         <p:spPr>
           <a:xfrm>
             <a:off x="731520" y="1371600"/>
-            <a:ext cx="54864" cy="1077722"/>
-          </a:xfrm>
-          <a:prstGeom prst="rect">
-            <a:avLst/>
-          </a:prstGeom>
-          <a:solidFill>
-            <a:srgbClr val="6BC4A6"/>
-          </a:solidFill>
-          <a:ln w="12700">
-            <a:solidFill>
-              <a:srgbClr val="6BC4A6"/>
-            </a:solidFill>
-          </a:ln>
-        </p:spPr>
-        <p:style>
-          <a:lnRef idx="1">
-            <a:schemeClr val="accent1"/>
-          </a:lnRef>
-          <a:fillRef idx="3">
-            <a:schemeClr val="accent1"/>
-          </a:fillRef>
-          <a:effectRef idx="2">
-            <a:schemeClr val="accent1"/>
-          </a:effectRef>
-          <a:fontRef idx="minor">
-            <a:schemeClr val="lt1"/>
-          </a:fontRef>
-        </p:style>
-        <p:txBody>
-          <a:bodyPr rtlCol="0" anchor="ctr"/>
-          <a:lstStyle/>
-          <a:p>
-            <a:pPr algn="ctr"/>
-          </a:p>
-        </p:txBody>
-      </p:sp>
-      <p:sp>
-        <p:nvSpPr>
-          <p:cNvPr id="5" name="TextBox 4"/>
-          <p:cNvSpPr txBox="1"/>
-          <p:nvPr/>
-        </p:nvSpPr>
-        <p:spPr>
-          <a:xfrm>
-            <a:off x="923544" y="1371600"/>
-            <a:ext cx="662939" cy="413766"/>
+            <a:ext cx="1691640" cy="413766"/>
           </a:xfrm>
           <a:prstGeom prst="rect">
             <a:avLst/>
@@ -16728,12 +15717,15 @@
           <a:noFill/>
         </p:spPr>
         <p:txBody>
-          <a:bodyPr wrap="square">
+          <a:bodyPr wrap="square" lIns="45720" rIns="45720" tIns="64008" bIns="64008">
             <a:spAutoFit/>
           </a:bodyPr>
           <a:lstStyle/>
           <a:p>
             <a:pPr algn="l">
+              <a:lnSpc>
+                <a:spcPct val="125000"/>
+              </a:lnSpc>
               <a:defRPr sz="1800" b="1" i="0">
                 <a:solidFill>
                   <a:srgbClr val="6BC4A6"/>
@@ -16749,14 +15741,14 @@
       </p:sp>
       <p:sp>
         <p:nvSpPr>
-          <p:cNvPr id="6" name="TextBox 5"/>
+          <p:cNvPr id="5" name="TextBox 4"/>
           <p:cNvSpPr txBox="1"/>
           <p:nvPr/>
         </p:nvSpPr>
         <p:spPr>
           <a:xfrm>
-            <a:off x="923544" y="1876806"/>
-            <a:ext cx="662939" cy="572516"/>
+            <a:off x="731520" y="1858517"/>
+            <a:ext cx="1691640" cy="572516"/>
           </a:xfrm>
           <a:prstGeom prst="rect">
             <a:avLst/>
@@ -16764,12 +15756,15 @@
           <a:noFill/>
         </p:spPr>
         <p:txBody>
-          <a:bodyPr wrap="square">
+          <a:bodyPr wrap="square" lIns="45720" rIns="45720" tIns="64008" bIns="64008">
             <a:spAutoFit/>
           </a:bodyPr>
           <a:lstStyle/>
           <a:p>
             <a:pPr algn="l">
+              <a:lnSpc>
+                <a:spcPct val="125000"/>
+              </a:lnSpc>
               <a:defRPr sz="1400" b="0" i="0">
                 <a:solidFill>
                   <a:srgbClr val="2C3E50"/>
@@ -16783,6 +15778,9 @@
           </a:p>
           <a:p>
             <a:pPr algn="l">
+              <a:lnSpc>
+                <a:spcPct val="125000"/>
+              </a:lnSpc>
               <a:defRPr sz="1400" b="0" i="0">
                 <a:solidFill>
                   <a:srgbClr val="2C3E50"/>
@@ -16798,13 +15796,13 @@
       </p:sp>
       <p:cxnSp>
         <p:nvCxnSpPr>
-          <p:cNvPr id="7" name="Connector 6"/>
+          <p:cNvPr id="6" name="Connector 5"/>
           <p:cNvCxnSpPr/>
           <p:nvPr/>
         </p:nvCxnSpPr>
         <p:spPr>
           <a:xfrm>
-            <a:off x="1586484" y="1910461"/>
+            <a:off x="2423160" y="1901317"/>
             <a:ext cx="548640" cy="0"/>
           </a:xfrm>
           <a:prstGeom prst="line">
@@ -16834,59 +15832,14 @@
       </p:cxnSp>
       <p:sp>
         <p:nvSpPr>
-          <p:cNvPr id="8" name="Rectangle 7"/>
-          <p:cNvSpPr/>
+          <p:cNvPr id="7" name="TextBox 6"/>
+          <p:cNvSpPr txBox="1"/>
           <p:nvPr/>
         </p:nvSpPr>
         <p:spPr>
           <a:xfrm>
-            <a:off x="2135124" y="1371600"/>
-            <a:ext cx="54864" cy="1077722"/>
-          </a:xfrm>
-          <a:prstGeom prst="rect">
-            <a:avLst/>
-          </a:prstGeom>
-          <a:solidFill>
-            <a:srgbClr val="2E5A88"/>
-          </a:solidFill>
-          <a:ln w="12700">
-            <a:solidFill>
-              <a:srgbClr val="2E5A88"/>
-            </a:solidFill>
-          </a:ln>
-        </p:spPr>
-        <p:style>
-          <a:lnRef idx="1">
-            <a:schemeClr val="accent1"/>
-          </a:lnRef>
-          <a:fillRef idx="3">
-            <a:schemeClr val="accent1"/>
-          </a:fillRef>
-          <a:effectRef idx="2">
-            <a:schemeClr val="accent1"/>
-          </a:effectRef>
-          <a:fontRef idx="minor">
-            <a:schemeClr val="lt1"/>
-          </a:fontRef>
-        </p:style>
-        <p:txBody>
-          <a:bodyPr rtlCol="0" anchor="ctr"/>
-          <a:lstStyle/>
-          <a:p>
-            <a:pPr algn="ctr"/>
-          </a:p>
-        </p:txBody>
-      </p:sp>
-      <p:sp>
-        <p:nvSpPr>
-          <p:cNvPr id="9" name="TextBox 8"/>
-          <p:cNvSpPr txBox="1"/>
-          <p:nvPr/>
-        </p:nvSpPr>
-        <p:spPr>
-          <a:xfrm>
-            <a:off x="2327148" y="1371600"/>
-            <a:ext cx="535939" cy="413766"/>
+            <a:off x="2971800" y="1371600"/>
+            <a:ext cx="1348740" cy="413766"/>
           </a:xfrm>
           <a:prstGeom prst="rect">
             <a:avLst/>
@@ -16894,12 +15847,15 @@
           <a:noFill/>
         </p:spPr>
         <p:txBody>
-          <a:bodyPr wrap="square">
+          <a:bodyPr wrap="square" lIns="45720" rIns="45720" tIns="64008" bIns="64008">
             <a:spAutoFit/>
           </a:bodyPr>
           <a:lstStyle/>
           <a:p>
             <a:pPr algn="l">
+              <a:lnSpc>
+                <a:spcPct val="125000"/>
+              </a:lnSpc>
               <a:defRPr sz="1800" b="1" i="0">
                 <a:solidFill>
                   <a:srgbClr val="2E5A88"/>
@@ -16915,14 +15871,14 @@
       </p:sp>
       <p:sp>
         <p:nvSpPr>
-          <p:cNvPr id="10" name="TextBox 9"/>
+          <p:cNvPr id="8" name="TextBox 7"/>
           <p:cNvSpPr txBox="1"/>
           <p:nvPr/>
         </p:nvSpPr>
         <p:spPr>
           <a:xfrm>
-            <a:off x="2327148" y="1876806"/>
-            <a:ext cx="535939" cy="572516"/>
+            <a:off x="2971800" y="1858517"/>
+            <a:ext cx="1348740" cy="572516"/>
           </a:xfrm>
           <a:prstGeom prst="rect">
             <a:avLst/>
@@ -16930,12 +15886,15 @@
           <a:noFill/>
         </p:spPr>
         <p:txBody>
-          <a:bodyPr wrap="square">
+          <a:bodyPr wrap="square" lIns="45720" rIns="45720" tIns="64008" bIns="64008">
             <a:spAutoFit/>
           </a:bodyPr>
           <a:lstStyle/>
           <a:p>
             <a:pPr algn="l">
+              <a:lnSpc>
+                <a:spcPct val="125000"/>
+              </a:lnSpc>
               <a:defRPr sz="1400" b="0" i="0">
                 <a:solidFill>
                   <a:srgbClr val="2C3E50"/>
@@ -16949,6 +15908,9 @@
           </a:p>
           <a:p>
             <a:pPr algn="l">
+              <a:lnSpc>
+                <a:spcPct val="125000"/>
+              </a:lnSpc>
               <a:defRPr sz="1400" b="0" i="0">
                 <a:solidFill>
                   <a:srgbClr val="2C3E50"/>
@@ -16964,13 +15926,13 @@
       </p:sp>
       <p:sp>
         <p:nvSpPr>
-          <p:cNvPr id="11" name="TextBox 10"/>
+          <p:cNvPr id="9" name="TextBox 8"/>
           <p:cNvSpPr txBox="1"/>
           <p:nvPr/>
         </p:nvSpPr>
         <p:spPr>
           <a:xfrm>
-            <a:off x="731520" y="2723642"/>
+            <a:off x="731520" y="2705354"/>
             <a:ext cx="10728655" cy="413766"/>
           </a:xfrm>
           <a:prstGeom prst="rect">
@@ -16979,12 +15941,15 @@
           <a:noFill/>
         </p:spPr>
         <p:txBody>
-          <a:bodyPr wrap="square">
+          <a:bodyPr wrap="square" lIns="45720" rIns="45720" tIns="64008" bIns="64008">
             <a:spAutoFit/>
           </a:bodyPr>
           <a:lstStyle/>
           <a:p>
             <a:pPr algn="l">
+              <a:lnSpc>
+                <a:spcPct val="125000"/>
+              </a:lnSpc>
               <a:defRPr sz="1800" b="0" i="1">
                 <a:solidFill>
                   <a:srgbClr val="7B8FA3"/>
@@ -17028,7 +15993,7 @@
                               </p:stCondLst>
                             </p:cTn>
                             <p:tgtEl>
-                              <p:spTgt spid="7"/>
+                              <p:spTgt spid="6"/>
                             </p:tgtEl>
                             <p:attrNameLst>
                               <p:attrName>style.visibility</p:attrName>
@@ -17055,7 +16020,7 @@
                               </p:stCondLst>
                             </p:cTn>
                             <p:tgtEl>
-                              <p:spTgt spid="6"/>
+                              <p:spTgt spid="7"/>
                             </p:tgtEl>
                             <p:attrNameLst>
                               <p:attrName>style.visibility</p:attrName>
@@ -17122,87 +16087,33 @@
                       </p:childTnLst>
                     </p:cTn>
                   </p:par>
-                  <p:par>
-                    <p:cTn id="12" fill="hold">
-                      <p:stCondLst>
-                        <p:cond delay="0"/>
-                      </p:stCondLst>
-                      <p:childTnLst>
-                        <p:set>
-                          <p:cBhvr>
-                            <p:cTn id="13" dur="1" fill="hold">
-                              <p:stCondLst>
-                                <p:cond delay="0"/>
-                              </p:stCondLst>
-                            </p:cTn>
-                            <p:tgtEl>
-                              <p:spTgt spid="10"/>
-                            </p:tgtEl>
-                            <p:attrNameLst>
-                              <p:attrName>style.visibility</p:attrName>
-                            </p:attrNameLst>
-                          </p:cBhvr>
-                          <p:to>
-                            <p:strVal val="hidden"/>
-                          </p:to>
-                        </p:set>
-                      </p:childTnLst>
-                    </p:cTn>
-                  </p:par>
-                  <p:par>
-                    <p:cTn id="14" fill="hold">
-                      <p:stCondLst>
-                        <p:cond delay="0"/>
-                      </p:stCondLst>
-                      <p:childTnLst>
-                        <p:set>
-                          <p:cBhvr>
-                            <p:cTn id="15" dur="1" fill="hold">
-                              <p:stCondLst>
-                                <p:cond delay="0"/>
-                              </p:stCondLst>
-                            </p:cTn>
-                            <p:tgtEl>
-                              <p:spTgt spid="11"/>
-                            </p:tgtEl>
-                            <p:attrNameLst>
-                              <p:attrName>style.visibility</p:attrName>
-                            </p:attrNameLst>
-                          </p:cBhvr>
-                          <p:to>
-                            <p:strVal val="hidden"/>
-                          </p:to>
-                        </p:set>
-                      </p:childTnLst>
-                    </p:cTn>
-                  </p:par>
                 </p:childTnLst>
               </p:cTn>
             </p:par>
             <p:seq concurrent="1" nextAc="seek">
-              <p:cTn id="16" dur="indefinite" nodeType="mainSeq">
+              <p:cTn id="12" dur="indefinite" nodeType="mainSeq">
                 <p:childTnLst>
                   <p:par>
-                    <p:cTn id="17" fill="hold">
+                    <p:cTn id="13" fill="hold">
                       <p:stCondLst>
                         <p:cond delay="indefinite"/>
                       </p:stCondLst>
                       <p:childTnLst>
                         <p:par>
-                          <p:cTn id="18" fill="hold">
+                          <p:cTn id="14" fill="hold">
                             <p:stCondLst>
                               <p:cond delay="0"/>
                             </p:stCondLst>
                             <p:childTnLst>
                               <p:par>
-                                <p:cTn id="19" presetID="10" presetClass="entr" presetSubtype="0" fill="hold" grpId="0" nodeType="clickEffect">
+                                <p:cTn id="15" presetID="10" presetClass="entr" presetSubtype="0" fill="hold" grpId="0" nodeType="clickEffect">
                                   <p:stCondLst>
                                     <p:cond delay="0"/>
                                   </p:stCondLst>
                                   <p:childTnLst>
                                     <p:animEffect transition="in" filter="fade">
                                       <p:cBhvr>
-                                        <p:cTn id="20" dur="500"/>
+                                        <p:cTn id="16" dur="500"/>
                                         <p:tgtEl>
                                           <p:spTgt spid="4"/>
                                         </p:tgtEl>
@@ -17210,7 +16121,7 @@
                                     </p:animEffect>
                                     <p:set>
                                       <p:cBhvr>
-                                        <p:cTn id="21" dur="1" fill="hold">
+                                        <p:cTn id="17" dur="1" fill="hold">
                                           <p:stCondLst>
                                             <p:cond delay="0"/>
                                           </p:stCondLst>
@@ -17230,14 +16141,14 @@
                                 </p:cTn>
                               </p:par>
                               <p:par>
-                                <p:cTn id="22" presetID="10" presetClass="entr" presetSubtype="0" fill="hold" grpId="0" nodeType="withEffect">
+                                <p:cTn id="18" presetID="10" presetClass="entr" presetSubtype="0" fill="hold" grpId="0" nodeType="withEffect">
                                   <p:stCondLst>
                                     <p:cond delay="0"/>
                                   </p:stCondLst>
                                   <p:childTnLst>
                                     <p:animEffect transition="in" filter="fade">
                                       <p:cBhvr>
-                                        <p:cTn id="23" dur="500"/>
+                                        <p:cTn id="19" dur="500"/>
                                         <p:tgtEl>
                                           <p:spTgt spid="5"/>
                                         </p:tgtEl>
@@ -17245,48 +16156,13 @@
                                     </p:animEffect>
                                     <p:set>
                                       <p:cBhvr>
-                                        <p:cTn id="24" dur="1" fill="hold">
+                                        <p:cTn id="20" dur="1" fill="hold">
                                           <p:stCondLst>
                                             <p:cond delay="0"/>
                                           </p:stCondLst>
                                         </p:cTn>
                                         <p:tgtEl>
                                           <p:spTgt spid="5"/>
-                                        </p:tgtEl>
-                                        <p:attrNameLst>
-                                          <p:attrName>style.visibility</p:attrName>
-                                        </p:attrNameLst>
-                                      </p:cBhvr>
-                                      <p:to>
-                                        <p:strVal val="visible"/>
-                                      </p:to>
-                                    </p:set>
-                                  </p:childTnLst>
-                                </p:cTn>
-                              </p:par>
-                              <p:par>
-                                <p:cTn id="25" presetID="10" presetClass="entr" presetSubtype="0" fill="hold" grpId="0" nodeType="withEffect">
-                                  <p:stCondLst>
-                                    <p:cond delay="0"/>
-                                  </p:stCondLst>
-                                  <p:childTnLst>
-                                    <p:animEffect transition="in" filter="fade">
-                                      <p:cBhvr>
-                                        <p:cTn id="26" dur="500"/>
-                                        <p:tgtEl>
-                                          <p:spTgt spid="6"/>
-                                        </p:tgtEl>
-                                      </p:cBhvr>
-                                    </p:animEffect>
-                                    <p:set>
-                                      <p:cBhvr>
-                                        <p:cTn id="27" dur="1" fill="hold">
-                                          <p:stCondLst>
-                                            <p:cond delay="0"/>
-                                          </p:stCondLst>
-                                        </p:cTn>
-                                        <p:tgtEl>
-                                          <p:spTgt spid="6"/>
                                         </p:tgtEl>
                                         <p:attrNameLst>
                                           <p:attrName>style.visibility</p:attrName>
@@ -17306,40 +16182,40 @@
                     </p:cTn>
                   </p:par>
                   <p:par>
-                    <p:cTn id="28" fill="hold">
+                    <p:cTn id="21" fill="hold">
                       <p:stCondLst>
                         <p:cond delay="indefinite"/>
                       </p:stCondLst>
                       <p:childTnLst>
                         <p:par>
-                          <p:cTn id="29" fill="hold">
+                          <p:cTn id="22" fill="hold">
                             <p:stCondLst>
                               <p:cond delay="0"/>
                             </p:stCondLst>
                             <p:childTnLst>
                               <p:par>
-                                <p:cTn id="30" presetID="10" presetClass="entr" presetSubtype="0" fill="hold" grpId="0" nodeType="clickEffect">
+                                <p:cTn id="23" presetID="10" presetClass="entr" presetSubtype="0" fill="hold" grpId="0" nodeType="clickEffect">
                                   <p:stCondLst>
                                     <p:cond delay="0"/>
                                   </p:stCondLst>
                                   <p:childTnLst>
                                     <p:animEffect transition="in" filter="fade">
                                       <p:cBhvr>
-                                        <p:cTn id="31" dur="500"/>
-                                        <p:tgtEl>
-                                          <p:spTgt spid="7"/>
+                                        <p:cTn id="24" dur="500"/>
+                                        <p:tgtEl>
+                                          <p:spTgt spid="6"/>
                                         </p:tgtEl>
                                       </p:cBhvr>
                                     </p:animEffect>
                                     <p:set>
                                       <p:cBhvr>
-                                        <p:cTn id="32" dur="1" fill="hold">
+                                        <p:cTn id="25" dur="1" fill="hold">
                                           <p:stCondLst>
                                             <p:cond delay="0"/>
                                           </p:stCondLst>
                                         </p:cTn>
                                         <p:tgtEl>
-                                          <p:spTgt spid="7"/>
+                                          <p:spTgt spid="6"/>
                                         </p:tgtEl>
                                         <p:attrNameLst>
                                           <p:attrName>style.visibility</p:attrName>
@@ -17353,28 +16229,28 @@
                                 </p:cTn>
                               </p:par>
                               <p:par>
-                                <p:cTn id="33" presetID="10" presetClass="entr" presetSubtype="0" fill="hold" grpId="0" nodeType="withEffect">
+                                <p:cTn id="26" presetID="10" presetClass="entr" presetSubtype="0" fill="hold" grpId="0" nodeType="withEffect">
                                   <p:stCondLst>
                                     <p:cond delay="0"/>
                                   </p:stCondLst>
                                   <p:childTnLst>
                                     <p:animEffect transition="in" filter="fade">
                                       <p:cBhvr>
-                                        <p:cTn id="34" dur="500"/>
-                                        <p:tgtEl>
-                                          <p:spTgt spid="6"/>
+                                        <p:cTn id="27" dur="500"/>
+                                        <p:tgtEl>
+                                          <p:spTgt spid="7"/>
                                         </p:tgtEl>
                                       </p:cBhvr>
                                     </p:animEffect>
                                     <p:set>
                                       <p:cBhvr>
-                                        <p:cTn id="35" dur="1" fill="hold">
+                                        <p:cTn id="28" dur="1" fill="hold">
                                           <p:stCondLst>
                                             <p:cond delay="0"/>
                                           </p:stCondLst>
                                         </p:cTn>
                                         <p:tgtEl>
-                                          <p:spTgt spid="6"/>
+                                          <p:spTgt spid="7"/>
                                         </p:tgtEl>
                                         <p:attrNameLst>
                                           <p:attrName>style.visibility</p:attrName>
@@ -17388,14 +16264,14 @@
                                 </p:cTn>
                               </p:par>
                               <p:par>
-                                <p:cTn id="36" presetID="10" presetClass="entr" presetSubtype="0" fill="hold" grpId="0" nodeType="withEffect">
+                                <p:cTn id="29" presetID="10" presetClass="entr" presetSubtype="0" fill="hold" grpId="0" nodeType="withEffect">
                                   <p:stCondLst>
                                     <p:cond delay="0"/>
                                   </p:stCondLst>
                                   <p:childTnLst>
                                     <p:animEffect transition="in" filter="fade">
                                       <p:cBhvr>
-                                        <p:cTn id="37" dur="500"/>
+                                        <p:cTn id="30" dur="500"/>
                                         <p:tgtEl>
                                           <p:spTgt spid="8"/>
                                         </p:tgtEl>
@@ -17403,83 +16279,13 @@
                                     </p:animEffect>
                                     <p:set>
                                       <p:cBhvr>
-                                        <p:cTn id="38" dur="1" fill="hold">
+                                        <p:cTn id="31" dur="1" fill="hold">
                                           <p:stCondLst>
                                             <p:cond delay="0"/>
                                           </p:stCondLst>
                                         </p:cTn>
                                         <p:tgtEl>
                                           <p:spTgt spid="8"/>
-                                        </p:tgtEl>
-                                        <p:attrNameLst>
-                                          <p:attrName>style.visibility</p:attrName>
-                                        </p:attrNameLst>
-                                      </p:cBhvr>
-                                      <p:to>
-                                        <p:strVal val="visible"/>
-                                      </p:to>
-                                    </p:set>
-                                  </p:childTnLst>
-                                </p:cTn>
-                              </p:par>
-                              <p:par>
-                                <p:cTn id="39" presetID="10" presetClass="entr" presetSubtype="0" fill="hold" grpId="0" nodeType="withEffect">
-                                  <p:stCondLst>
-                                    <p:cond delay="0"/>
-                                  </p:stCondLst>
-                                  <p:childTnLst>
-                                    <p:animEffect transition="in" filter="fade">
-                                      <p:cBhvr>
-                                        <p:cTn id="40" dur="500"/>
-                                        <p:tgtEl>
-                                          <p:spTgt spid="9"/>
-                                        </p:tgtEl>
-                                      </p:cBhvr>
-                                    </p:animEffect>
-                                    <p:set>
-                                      <p:cBhvr>
-                                        <p:cTn id="41" dur="1" fill="hold">
-                                          <p:stCondLst>
-                                            <p:cond delay="0"/>
-                                          </p:stCondLst>
-                                        </p:cTn>
-                                        <p:tgtEl>
-                                          <p:spTgt spid="9"/>
-                                        </p:tgtEl>
-                                        <p:attrNameLst>
-                                          <p:attrName>style.visibility</p:attrName>
-                                        </p:attrNameLst>
-                                      </p:cBhvr>
-                                      <p:to>
-                                        <p:strVal val="visible"/>
-                                      </p:to>
-                                    </p:set>
-                                  </p:childTnLst>
-                                </p:cTn>
-                              </p:par>
-                              <p:par>
-                                <p:cTn id="42" presetID="10" presetClass="entr" presetSubtype="0" fill="hold" grpId="0" nodeType="withEffect">
-                                  <p:stCondLst>
-                                    <p:cond delay="0"/>
-                                  </p:stCondLst>
-                                  <p:childTnLst>
-                                    <p:animEffect transition="in" filter="fade">
-                                      <p:cBhvr>
-                                        <p:cTn id="43" dur="500"/>
-                                        <p:tgtEl>
-                                          <p:spTgt spid="10"/>
-                                        </p:tgtEl>
-                                      </p:cBhvr>
-                                    </p:animEffect>
-                                    <p:set>
-                                      <p:cBhvr>
-                                        <p:cTn id="44" dur="1" fill="hold">
-                                          <p:stCondLst>
-                                            <p:cond delay="0"/>
-                                          </p:stCondLst>
-                                        </p:cTn>
-                                        <p:tgtEl>
-                                          <p:spTgt spid="10"/>
                                         </p:tgtEl>
                                         <p:attrNameLst>
                                           <p:attrName>style.visibility</p:attrName>
@@ -17499,40 +16305,40 @@
                     </p:cTn>
                   </p:par>
                   <p:par>
-                    <p:cTn id="45" fill="hold">
+                    <p:cTn id="32" fill="hold">
                       <p:stCondLst>
                         <p:cond delay="indefinite"/>
                       </p:stCondLst>
                       <p:childTnLst>
                         <p:par>
-                          <p:cTn id="46" fill="hold">
+                          <p:cTn id="33" fill="hold">
                             <p:stCondLst>
                               <p:cond delay="0"/>
                             </p:stCondLst>
                             <p:childTnLst>
                               <p:par>
-                                <p:cTn id="47" presetID="10" presetClass="entr" presetSubtype="0" fill="hold" grpId="0" nodeType="clickEffect">
+                                <p:cTn id="34" presetID="10" presetClass="entr" presetSubtype="0" fill="hold" grpId="0" nodeType="clickEffect">
                                   <p:stCondLst>
                                     <p:cond delay="0"/>
                                   </p:stCondLst>
                                   <p:childTnLst>
                                     <p:animEffect transition="in" filter="fade">
                                       <p:cBhvr>
-                                        <p:cTn id="48" dur="500"/>
-                                        <p:tgtEl>
-                                          <p:spTgt spid="11"/>
+                                        <p:cTn id="35" dur="500"/>
+                                        <p:tgtEl>
+                                          <p:spTgt spid="9"/>
                                         </p:tgtEl>
                                       </p:cBhvr>
                                     </p:animEffect>
                                     <p:set>
                                       <p:cBhvr>
-                                        <p:cTn id="49" dur="1" fill="hold">
+                                        <p:cTn id="36" dur="1" fill="hold">
                                           <p:stCondLst>
                                             <p:cond delay="0"/>
                                           </p:stCondLst>
                                         </p:cTn>
                                         <p:tgtEl>
-                                          <p:spTgt spid="11"/>
+                                          <p:spTgt spid="9"/>
                                         </p:tgtEl>
                                         <p:attrNameLst>
                                           <p:attrName>style.visibility</p:attrName>
